--- a/week02_game_of_life/Slides/Lecture2b_Entropy_of_GoL.pptx
+++ b/week02_game_of_life/Slides/Lecture2b_Entropy_of_GoL.pptx
@@ -1,39 +1,39 @@
 
 <file path=ppt/presentation.xml><?xml version="1.0" encoding="utf-8"?>
-<p:presentation xmlns:a="http://schemas.openxmlformats.org/drawingml/2006/main" xmlns:r="http://schemas.openxmlformats.org/officeDocument/2006/relationships" xmlns:p="http://schemas.openxmlformats.org/presentationml/2006/main" xmlns:m="http://schemas.openxmlformats.org/officeDocument/2006/math" xmlns:a14="http://schemas.microsoft.com/office/drawing/2010/main">
+<p:presentation xmlns:a="http://schemas.openxmlformats.org/drawingml/2006/main" xmlns:r="http://schemas.openxmlformats.org/officeDocument/2006/relationships" xmlns:p="http://schemas.openxmlformats.org/presentationml/2006/main">
   <p:sldMasterIdLst>
-    <p:sldMasterId id="2147483648" r:id="rId5"/>
+    <p:sldMasterId id="2147483648" r:id="rId1"/>
   </p:sldMasterIdLst>
   <p:notesMasterIdLst>
-    <p:notesMasterId r:id="rId7"/>
+    <p:notesMasterId r:id="rId26"/>
   </p:notesMasterIdLst>
   <p:sldIdLst>
-    <p:sldId id="256" r:id="rId8"/>
-    <p:sldId id="257" r:id="rId9"/>
-    <p:sldId id="258" r:id="rId10"/>
-    <p:sldId id="259" r:id="rId11"/>
-    <p:sldId id="260" r:id="rId12"/>
-    <p:sldId id="261" r:id="rId13"/>
-    <p:sldId id="262" r:id="rId14"/>
-    <p:sldId id="263" r:id="rId15"/>
-    <p:sldId id="264" r:id="rId16"/>
-    <p:sldId id="265" r:id="rId17"/>
-    <p:sldId id="266" r:id="rId18"/>
-    <p:sldId id="267" r:id="rId19"/>
-    <p:sldId id="268" r:id="rId20"/>
-    <p:sldId id="269" r:id="rId21"/>
-    <p:sldId id="270" r:id="rId22"/>
-    <p:sldId id="271" r:id="rId23"/>
-    <p:sldId id="272" r:id="rId24"/>
-    <p:sldId id="273" r:id="rId25"/>
-    <p:sldId id="274" r:id="rId26"/>
-    <p:sldId id="275" r:id="rId27"/>
-    <p:sldId id="276" r:id="rId28"/>
-    <p:sldId id="277" r:id="rId29"/>
-    <p:sldId id="278" r:id="rId30"/>
-    <p:sldId id="279" r:id="rId31"/>
+    <p:sldId id="256" r:id="rId2"/>
+    <p:sldId id="257" r:id="rId3"/>
+    <p:sldId id="258" r:id="rId4"/>
+    <p:sldId id="259" r:id="rId5"/>
+    <p:sldId id="260" r:id="rId6"/>
+    <p:sldId id="261" r:id="rId7"/>
+    <p:sldId id="262" r:id="rId8"/>
+    <p:sldId id="263" r:id="rId9"/>
+    <p:sldId id="264" r:id="rId10"/>
+    <p:sldId id="265" r:id="rId11"/>
+    <p:sldId id="266" r:id="rId12"/>
+    <p:sldId id="267" r:id="rId13"/>
+    <p:sldId id="268" r:id="rId14"/>
+    <p:sldId id="269" r:id="rId15"/>
+    <p:sldId id="270" r:id="rId16"/>
+    <p:sldId id="271" r:id="rId17"/>
+    <p:sldId id="272" r:id="rId18"/>
+    <p:sldId id="273" r:id="rId19"/>
+    <p:sldId id="274" r:id="rId20"/>
+    <p:sldId id="275" r:id="rId21"/>
+    <p:sldId id="276" r:id="rId22"/>
+    <p:sldId id="277" r:id="rId23"/>
+    <p:sldId id="278" r:id="rId24"/>
+    <p:sldId id="279" r:id="rId25"/>
   </p:sldIdLst>
-  <p:sldSz cx="9144000" cy="5143500"/>
+  <p:sldSz cx="9144000" cy="5143500" type="screen16x9"/>
   <p:notesSz cx="6858000" cy="9144000"/>
   <p:defaultTextStyle>
     <a:defPPr marL="0" marR="0" indent="0" algn="l" defTabSz="914400" rtl="0" fontAlgn="auto" latinLnBrk="1" hangingPunct="0">
@@ -51,7 +51,7 @@
       <a:buFontTx/>
       <a:buNone/>
       <a:tabLst/>
-      <a:defRPr b="0" baseline="0" cap="none" i="0" spc="0" strike="noStrike" sz="1800" u="none" kumimoji="0" normalizeH="0">
+      <a:defRPr kumimoji="0" sz="1800" b="0" i="0" u="none" strike="noStrike" cap="none" spc="0" normalizeH="0" baseline="0">
         <a:ln>
           <a:noFill/>
         </a:ln>
@@ -77,7 +77,7 @@
       <a:buFontTx/>
       <a:buNone/>
       <a:tabLst/>
-      <a:defRPr b="0" baseline="0" cap="none" i="0" spc="0" strike="noStrike" sz="1800" u="none" kumimoji="0" normalizeH="0">
+      <a:defRPr kumimoji="0" sz="1800" b="0" i="0" u="none" strike="noStrike" cap="none" spc="0" normalizeH="0" baseline="0">
         <a:ln>
           <a:noFill/>
         </a:ln>
@@ -107,7 +107,7 @@
       <a:buFontTx/>
       <a:buNone/>
       <a:tabLst/>
-      <a:defRPr b="0" baseline="0" cap="none" i="0" spc="0" strike="noStrike" sz="1800" u="none" kumimoji="0" normalizeH="0">
+      <a:defRPr kumimoji="0" sz="1800" b="0" i="0" u="none" strike="noStrike" cap="none" spc="0" normalizeH="0" baseline="0">
         <a:ln>
           <a:noFill/>
         </a:ln>
@@ -137,7 +137,7 @@
       <a:buFontTx/>
       <a:buNone/>
       <a:tabLst/>
-      <a:defRPr b="0" baseline="0" cap="none" i="0" spc="0" strike="noStrike" sz="1800" u="none" kumimoji="0" normalizeH="0">
+      <a:defRPr kumimoji="0" sz="1800" b="0" i="0" u="none" strike="noStrike" cap="none" spc="0" normalizeH="0" baseline="0">
         <a:ln>
           <a:noFill/>
         </a:ln>
@@ -167,7 +167,7 @@
       <a:buFontTx/>
       <a:buNone/>
       <a:tabLst/>
-      <a:defRPr b="0" baseline="0" cap="none" i="0" spc="0" strike="noStrike" sz="1800" u="none" kumimoji="0" normalizeH="0">
+      <a:defRPr kumimoji="0" sz="1800" b="0" i="0" u="none" strike="noStrike" cap="none" spc="0" normalizeH="0" baseline="0">
         <a:ln>
           <a:noFill/>
         </a:ln>
@@ -197,7 +197,7 @@
       <a:buFontTx/>
       <a:buNone/>
       <a:tabLst/>
-      <a:defRPr b="0" baseline="0" cap="none" i="0" spc="0" strike="noStrike" sz="1800" u="none" kumimoji="0" normalizeH="0">
+      <a:defRPr kumimoji="0" sz="1800" b="0" i="0" u="none" strike="noStrike" cap="none" spc="0" normalizeH="0" baseline="0">
         <a:ln>
           <a:noFill/>
         </a:ln>
@@ -227,7 +227,7 @@
       <a:buFontTx/>
       <a:buNone/>
       <a:tabLst/>
-      <a:defRPr b="0" baseline="0" cap="none" i="0" spc="0" strike="noStrike" sz="1800" u="none" kumimoji="0" normalizeH="0">
+      <a:defRPr kumimoji="0" sz="1800" b="0" i="0" u="none" strike="noStrike" cap="none" spc="0" normalizeH="0" baseline="0">
         <a:ln>
           <a:noFill/>
         </a:ln>
@@ -257,7 +257,7 @@
       <a:buFontTx/>
       <a:buNone/>
       <a:tabLst/>
-      <a:defRPr b="0" baseline="0" cap="none" i="0" spc="0" strike="noStrike" sz="1800" u="none" kumimoji="0" normalizeH="0">
+      <a:defRPr kumimoji="0" sz="1800" b="0" i="0" u="none" strike="noStrike" cap="none" spc="0" normalizeH="0" baseline="0">
         <a:ln>
           <a:noFill/>
         </a:ln>
@@ -287,7 +287,7 @@
       <a:buFontTx/>
       <a:buNone/>
       <a:tabLst/>
-      <a:defRPr b="0" baseline="0" cap="none" i="0" spc="0" strike="noStrike" sz="1800" u="none" kumimoji="0" normalizeH="0">
+      <a:defRPr kumimoji="0" sz="1800" b="0" i="0" u="none" strike="noStrike" cap="none" spc="0" normalizeH="0" baseline="0">
         <a:ln>
           <a:noFill/>
         </a:ln>
@@ -317,7 +317,7 @@
       <a:buFontTx/>
       <a:buNone/>
       <a:tabLst/>
-      <a:defRPr b="0" baseline="0" cap="none" i="0" spc="0" strike="noStrike" sz="1800" u="none" kumimoji="0" normalizeH="0">
+      <a:defRPr kumimoji="0" sz="1800" b="0" i="0" u="none" strike="noStrike" cap="none" spc="0" normalizeH="0" baseline="0">
         <a:ln>
           <a:noFill/>
         </a:ln>
@@ -336,13 +336,14 @@
 </p:presentation>
 </file>
 
-<file path=ppt/commentAuthors.xml><?xml version="1.0" encoding="utf-8"?>
-<p:cmAuthorLst xmlns:a="http://schemas.openxmlformats.org/drawingml/2006/main" xmlns:r="http://schemas.openxmlformats.org/officeDocument/2006/relationships" xmlns:p="http://schemas.openxmlformats.org/presentationml/2006/main" xmlns:m="http://schemas.openxmlformats.org/officeDocument/2006/math" xmlns:a14="http://schemas.microsoft.com/office/drawing/2010/main"/>
-</file>
-
 <file path=ppt/notesMasters/notesMaster1.xml><?xml version="1.0" encoding="utf-8"?>
-<p:notesMaster xmlns:a="http://schemas.openxmlformats.org/drawingml/2006/main" xmlns:r="http://schemas.openxmlformats.org/officeDocument/2006/relationships" xmlns:p="http://schemas.openxmlformats.org/presentationml/2006/main" xmlns:m="http://schemas.openxmlformats.org/officeDocument/2006/math" xmlns:a14="http://schemas.microsoft.com/office/drawing/2010/main">
+<p:notesMaster xmlns:a="http://schemas.openxmlformats.org/drawingml/2006/main" xmlns:r="http://schemas.openxmlformats.org/officeDocument/2006/relationships" xmlns:p="http://schemas.openxmlformats.org/presentationml/2006/main">
   <p:cSld>
+    <p:bg>
+      <p:bgRef idx="1001">
+        <a:schemeClr val="bg1"/>
+      </p:bgRef>
+    </p:bg>
     <p:spTree>
       <p:nvGrpSpPr>
         <p:cNvPr id="1" name=""/>
@@ -360,7 +361,9 @@
       <p:sp>
         <p:nvSpPr>
           <p:cNvPr id="17" name="Shape 17"/>
-          <p:cNvSpPr/>
+          <p:cNvSpPr>
+            <a:spLocks noGrp="1" noRot="1" noChangeAspect="1"/>
+          </p:cNvSpPr>
           <p:nvPr>
             <p:ph type="sldImg"/>
           </p:nvPr>
@@ -378,14 +381,16 @@
           <a:bodyPr/>
           <a:lstStyle/>
           <a:p>
-            <a:pPr/>
+            <a:endParaRPr/>
           </a:p>
         </p:txBody>
       </p:sp>
       <p:sp>
         <p:nvSpPr>
           <p:cNvPr id="18" name="Shape 18"/>
-          <p:cNvSpPr/>
+          <p:cNvSpPr>
+            <a:spLocks noGrp="1"/>
+          </p:cNvSpPr>
           <p:nvPr>
             <p:ph type="body" sz="quarter" idx="1"/>
           </p:nvPr>
@@ -403,7 +408,7 @@
           <a:bodyPr/>
           <a:lstStyle/>
           <a:p>
-            <a:pPr/>
+            <a:endParaRPr/>
           </a:p>
         </p:txBody>
       </p:sp>
@@ -488,7 +493,7 @@
 </file>
 
 <file path=ppt/slideLayouts/slideLayout1.xml><?xml version="1.0" encoding="utf-8"?>
-<p:sldLayout xmlns:a="http://schemas.openxmlformats.org/drawingml/2006/main" xmlns:r="http://schemas.openxmlformats.org/officeDocument/2006/relationships" xmlns:p="http://schemas.openxmlformats.org/presentationml/2006/main" xmlns:m="http://schemas.openxmlformats.org/officeDocument/2006/math" xmlns:a14="http://schemas.microsoft.com/office/drawing/2010/main" type="tx" showMasterSp="1" showMasterPhAnim="1">
+<p:sldLayout xmlns:a="http://schemas.openxmlformats.org/drawingml/2006/main" xmlns:r="http://schemas.openxmlformats.org/officeDocument/2006/relationships" xmlns:p="http://schemas.openxmlformats.org/presentationml/2006/main" type="tx">
   <p:cSld name="DEFAULT">
     <p:spTree>
       <p:nvGrpSpPr>
@@ -507,7 +512,9 @@
       <p:sp>
         <p:nvSpPr>
           <p:cNvPr id="11" name="Numero diapositiva"/>
-          <p:cNvSpPr txBox="1"/>
+          <p:cNvSpPr txBox="1">
+            <a:spLocks noGrp="1"/>
+          </p:cNvSpPr>
           <p:nvPr>
             <p:ph type="sldNum" sz="quarter" idx="2"/>
           </p:nvPr>
@@ -521,8 +528,10 @@
           <a:bodyPr/>
           <a:lstStyle/>
           <a:p>
-            <a:pPr/>
-            <a:fld id="{86CB4B4D-7CA3-9044-876B-883B54F8677D}" type="slidenum"/>
+            <a:fld id="{86CB4B4D-7CA3-9044-876B-883B54F8677D}" type="slidenum">
+              <a:t>‹N›</a:t>
+            </a:fld>
+            <a:endParaRPr/>
           </a:p>
         </p:txBody>
       </p:sp>
@@ -531,18 +540,19 @@
   <p:clrMapOvr>
     <a:masterClrMapping/>
   </p:clrMapOvr>
-  <p:transition xmlns:p14="http://schemas.microsoft.com/office/powerpoint/2010/main" spd="med" advClick="1"/>
+  <p:transition spd="med"/>
 </p:sldLayout>
 </file>
 
 <file path=ppt/slideMasters/slideMaster1.xml><?xml version="1.0" encoding="utf-8"?>
-<p:sldMaster xmlns:a="http://schemas.openxmlformats.org/drawingml/2006/main" xmlns:r="http://schemas.openxmlformats.org/officeDocument/2006/relationships" xmlns:p="http://schemas.openxmlformats.org/presentationml/2006/main" xmlns:m="http://schemas.openxmlformats.org/officeDocument/2006/math" xmlns:a14="http://schemas.microsoft.com/office/drawing/2010/main">
+<p:sldMaster xmlns:a="http://schemas.openxmlformats.org/drawingml/2006/main" xmlns:r="http://schemas.openxmlformats.org/officeDocument/2006/relationships" xmlns:p="http://schemas.openxmlformats.org/presentationml/2006/main">
   <p:cSld>
     <p:bg>
       <p:bgPr>
         <a:solidFill>
           <a:srgbClr val="FFFFFF"/>
         </a:solidFill>
+        <a:effectLst/>
       </p:bgPr>
     </p:bg>
     <p:spTree>
@@ -562,7 +572,9 @@
       <p:sp>
         <p:nvSpPr>
           <p:cNvPr id="2" name="Titolo Testo"/>
-          <p:cNvSpPr txBox="1"/>
+          <p:cNvSpPr txBox="1">
+            <a:spLocks noGrp="1"/>
+          </p:cNvSpPr>
           <p:nvPr>
             <p:ph type="title"/>
           </p:nvPr>
@@ -580,7 +592,7 @@
           </a:ln>
           <a:extLst>
             <a:ext uri="{C572A759-6A51-4108-AA02-DFA0A04FC94B}">
-              <ma14:wrappingTextBoxFlag xmlns:ma14="http://schemas.microsoft.com/office/mac/drawingml/2011/main" val="1"/>
+              <ma14:wrappingTextBoxFlag xmlns:ma14="http://schemas.microsoft.com/office/mac/drawingml/2011/main" xmlns:a14="http://schemas.microsoft.com/office/drawing/2010/main" xmlns:m="http://schemas.openxmlformats.org/officeDocument/2006/math" xmlns="" val="1"/>
             </a:ext>
           </a:extLst>
         </p:spPr>
@@ -588,7 +600,6 @@
           <a:bodyPr lIns="45719" rIns="45719" anchor="ctr"/>
           <a:lstStyle/>
           <a:p>
-            <a:pPr/>
             <a:r>
               <a:t>Titolo Testo</a:t>
             </a:r>
@@ -598,7 +609,9 @@
       <p:sp>
         <p:nvSpPr>
           <p:cNvPr id="3" name="Corpo livello uno…"/>
-          <p:cNvSpPr txBox="1"/>
+          <p:cNvSpPr txBox="1">
+            <a:spLocks noGrp="1"/>
+          </p:cNvSpPr>
           <p:nvPr>
             <p:ph type="body" idx="1"/>
           </p:nvPr>
@@ -616,7 +629,7 @@
           </a:ln>
           <a:extLst>
             <a:ext uri="{C572A759-6A51-4108-AA02-DFA0A04FC94B}">
-              <ma14:wrappingTextBoxFlag xmlns:ma14="http://schemas.microsoft.com/office/mac/drawingml/2011/main" val="1"/>
+              <ma14:wrappingTextBoxFlag xmlns:ma14="http://schemas.microsoft.com/office/mac/drawingml/2011/main" xmlns:a14="http://schemas.microsoft.com/office/drawing/2010/main" xmlns:m="http://schemas.openxmlformats.org/officeDocument/2006/math" xmlns="" val="1"/>
             </a:ext>
           </a:extLst>
         </p:spPr>
@@ -624,7 +637,6 @@
           <a:bodyPr lIns="45719" rIns="45719"/>
           <a:lstStyle/>
           <a:p>
-            <a:pPr/>
             <a:r>
               <a:t>Corpo livello uno</a:t>
             </a:r>
@@ -658,7 +670,9 @@
       <p:sp>
         <p:nvSpPr>
           <p:cNvPr id="4" name="Numero diapositiva"/>
-          <p:cNvSpPr txBox="1"/>
+          <p:cNvSpPr txBox="1">
+            <a:spLocks noGrp="1"/>
+          </p:cNvSpPr>
           <p:nvPr>
             <p:ph type="sldNum" sz="quarter" idx="2"/>
           </p:nvPr>
@@ -685,8 +699,10 @@
             </a:lvl1pPr>
           </a:lstStyle>
           <a:p>
-            <a:pPr/>
-            <a:fld id="{86CB4B4D-7CA3-9044-876B-883B54F8677D}" type="slidenum"/>
+            <a:fld id="{86CB4B4D-7CA3-9044-876B-883B54F8677D}" type="slidenum">
+              <a:t>‹N›</a:t>
+            </a:fld>
+            <a:endParaRPr/>
           </a:p>
         </p:txBody>
       </p:sp>
@@ -694,9 +710,9 @@
   </p:cSld>
   <p:clrMap bg1="lt1" tx1="dk1" bg2="lt2" tx2="dk2" accent1="accent1" accent2="accent2" accent3="accent3" accent4="accent4" accent5="accent5" accent6="accent6" hlink="hlink" folHlink="folHlink"/>
   <p:sldLayoutIdLst>
-    <p:sldLayoutId id="2147483649" r:id="rId2"/>
+    <p:sldLayoutId id="2147483649" r:id="rId1"/>
   </p:sldLayoutIdLst>
-  <p:transition xmlns:p14="http://schemas.microsoft.com/office/powerpoint/2010/main" spd="med" advClick="1"/>
+  <p:transition spd="med"/>
   <p:txStyles>
     <p:titleStyle>
       <a:lvl1pPr marL="0" marR="0" indent="0" algn="ctr" defTabSz="914400" rtl="0" latinLnBrk="0">
@@ -714,7 +730,7 @@
         <a:buFontTx/>
         <a:buNone/>
         <a:tabLst/>
-        <a:defRPr b="0" baseline="0" cap="none" i="0" spc="0" strike="noStrike" sz="4400" u="none">
+        <a:defRPr sz="4400" b="0" i="0" u="none" strike="noStrike" cap="none" spc="0" baseline="0">
           <a:solidFill>
             <a:srgbClr val="000000"/>
           </a:solidFill>
@@ -740,7 +756,7 @@
         <a:buFontTx/>
         <a:buNone/>
         <a:tabLst/>
-        <a:defRPr b="0" baseline="0" cap="none" i="0" spc="0" strike="noStrike" sz="4400" u="none">
+        <a:defRPr sz="4400" b="0" i="0" u="none" strike="noStrike" cap="none" spc="0" baseline="0">
           <a:solidFill>
             <a:srgbClr val="000000"/>
           </a:solidFill>
@@ -766,7 +782,7 @@
         <a:buFontTx/>
         <a:buNone/>
         <a:tabLst/>
-        <a:defRPr b="0" baseline="0" cap="none" i="0" spc="0" strike="noStrike" sz="4400" u="none">
+        <a:defRPr sz="4400" b="0" i="0" u="none" strike="noStrike" cap="none" spc="0" baseline="0">
           <a:solidFill>
             <a:srgbClr val="000000"/>
           </a:solidFill>
@@ -792,7 +808,7 @@
         <a:buFontTx/>
         <a:buNone/>
         <a:tabLst/>
-        <a:defRPr b="0" baseline="0" cap="none" i="0" spc="0" strike="noStrike" sz="4400" u="none">
+        <a:defRPr sz="4400" b="0" i="0" u="none" strike="noStrike" cap="none" spc="0" baseline="0">
           <a:solidFill>
             <a:srgbClr val="000000"/>
           </a:solidFill>
@@ -818,7 +834,7 @@
         <a:buFontTx/>
         <a:buNone/>
         <a:tabLst/>
-        <a:defRPr b="0" baseline="0" cap="none" i="0" spc="0" strike="noStrike" sz="4400" u="none">
+        <a:defRPr sz="4400" b="0" i="0" u="none" strike="noStrike" cap="none" spc="0" baseline="0">
           <a:solidFill>
             <a:srgbClr val="000000"/>
           </a:solidFill>
@@ -844,7 +860,7 @@
         <a:buFontTx/>
         <a:buNone/>
         <a:tabLst/>
-        <a:defRPr b="0" baseline="0" cap="none" i="0" spc="0" strike="noStrike" sz="4400" u="none">
+        <a:defRPr sz="4400" b="0" i="0" u="none" strike="noStrike" cap="none" spc="0" baseline="0">
           <a:solidFill>
             <a:srgbClr val="000000"/>
           </a:solidFill>
@@ -870,7 +886,7 @@
         <a:buFontTx/>
         <a:buNone/>
         <a:tabLst/>
-        <a:defRPr b="0" baseline="0" cap="none" i="0" spc="0" strike="noStrike" sz="4400" u="none">
+        <a:defRPr sz="4400" b="0" i="0" u="none" strike="noStrike" cap="none" spc="0" baseline="0">
           <a:solidFill>
             <a:srgbClr val="000000"/>
           </a:solidFill>
@@ -896,7 +912,7 @@
         <a:buFontTx/>
         <a:buNone/>
         <a:tabLst/>
-        <a:defRPr b="0" baseline="0" cap="none" i="0" spc="0" strike="noStrike" sz="4400" u="none">
+        <a:defRPr sz="4400" b="0" i="0" u="none" strike="noStrike" cap="none" spc="0" baseline="0">
           <a:solidFill>
             <a:srgbClr val="000000"/>
           </a:solidFill>
@@ -922,7 +938,7 @@
         <a:buFontTx/>
         <a:buNone/>
         <a:tabLst/>
-        <a:defRPr b="0" baseline="0" cap="none" i="0" spc="0" strike="noStrike" sz="4400" u="none">
+        <a:defRPr sz="4400" b="0" i="0" u="none" strike="noStrike" cap="none" spc="0" baseline="0">
           <a:solidFill>
             <a:srgbClr val="000000"/>
           </a:solidFill>
@@ -950,7 +966,7 @@
         <a:buFont typeface="Arial"/>
         <a:buChar char="•"/>
         <a:tabLst/>
-        <a:defRPr b="0" baseline="0" cap="none" i="0" spc="0" strike="noStrike" sz="3200" u="none">
+        <a:defRPr sz="3200" b="0" i="0" u="none" strike="noStrike" cap="none" spc="0" baseline="0">
           <a:solidFill>
             <a:srgbClr val="000000"/>
           </a:solidFill>
@@ -976,7 +992,7 @@
         <a:buFont typeface="Arial"/>
         <a:buChar char="–"/>
         <a:tabLst/>
-        <a:defRPr b="0" baseline="0" cap="none" i="0" spc="0" strike="noStrike" sz="3200" u="none">
+        <a:defRPr sz="3200" b="0" i="0" u="none" strike="noStrike" cap="none" spc="0" baseline="0">
           <a:solidFill>
             <a:srgbClr val="000000"/>
           </a:solidFill>
@@ -1002,7 +1018,7 @@
         <a:buFont typeface="Arial"/>
         <a:buChar char="•"/>
         <a:tabLst/>
-        <a:defRPr b="0" baseline="0" cap="none" i="0" spc="0" strike="noStrike" sz="3200" u="none">
+        <a:defRPr sz="3200" b="0" i="0" u="none" strike="noStrike" cap="none" spc="0" baseline="0">
           <a:solidFill>
             <a:srgbClr val="000000"/>
           </a:solidFill>
@@ -1028,7 +1044,7 @@
         <a:buFont typeface="Arial"/>
         <a:buChar char="–"/>
         <a:tabLst/>
-        <a:defRPr b="0" baseline="0" cap="none" i="0" spc="0" strike="noStrike" sz="3200" u="none">
+        <a:defRPr sz="3200" b="0" i="0" u="none" strike="noStrike" cap="none" spc="0" baseline="0">
           <a:solidFill>
             <a:srgbClr val="000000"/>
           </a:solidFill>
@@ -1054,7 +1070,7 @@
         <a:buFont typeface="Arial"/>
         <a:buChar char="»"/>
         <a:tabLst/>
-        <a:defRPr b="0" baseline="0" cap="none" i="0" spc="0" strike="noStrike" sz="3200" u="none">
+        <a:defRPr sz="3200" b="0" i="0" u="none" strike="noStrike" cap="none" spc="0" baseline="0">
           <a:solidFill>
             <a:srgbClr val="000000"/>
           </a:solidFill>
@@ -1080,7 +1096,7 @@
         <a:buFont typeface="Arial"/>
         <a:buChar char="•"/>
         <a:tabLst/>
-        <a:defRPr b="0" baseline="0" cap="none" i="0" spc="0" strike="noStrike" sz="3200" u="none">
+        <a:defRPr sz="3200" b="0" i="0" u="none" strike="noStrike" cap="none" spc="0" baseline="0">
           <a:solidFill>
             <a:srgbClr val="000000"/>
           </a:solidFill>
@@ -1106,7 +1122,7 @@
         <a:buFont typeface="Arial"/>
         <a:buChar char="•"/>
         <a:tabLst/>
-        <a:defRPr b="0" baseline="0" cap="none" i="0" spc="0" strike="noStrike" sz="3200" u="none">
+        <a:defRPr sz="3200" b="0" i="0" u="none" strike="noStrike" cap="none" spc="0" baseline="0">
           <a:solidFill>
             <a:srgbClr val="000000"/>
           </a:solidFill>
@@ -1132,7 +1148,7 @@
         <a:buFont typeface="Arial"/>
         <a:buChar char="•"/>
         <a:tabLst/>
-        <a:defRPr b="0" baseline="0" cap="none" i="0" spc="0" strike="noStrike" sz="3200" u="none">
+        <a:defRPr sz="3200" b="0" i="0" u="none" strike="noStrike" cap="none" spc="0" baseline="0">
           <a:solidFill>
             <a:srgbClr val="000000"/>
           </a:solidFill>
@@ -1158,7 +1174,7 @@
         <a:buFont typeface="Arial"/>
         <a:buChar char="•"/>
         <a:tabLst/>
-        <a:defRPr b="0" baseline="0" cap="none" i="0" spc="0" strike="noStrike" sz="3200" u="none">
+        <a:defRPr sz="3200" b="0" i="0" u="none" strike="noStrike" cap="none" spc="0" baseline="0">
           <a:solidFill>
             <a:srgbClr val="000000"/>
           </a:solidFill>
@@ -1186,7 +1202,7 @@
         <a:buFontTx/>
         <a:buNone/>
         <a:tabLst/>
-        <a:defRPr b="0" baseline="0" cap="none" i="0" spc="0" strike="noStrike" sz="1200" u="none">
+        <a:defRPr sz="1200" b="0" i="0" u="none" strike="noStrike" cap="none" spc="0" baseline="0">
           <a:solidFill>
             <a:schemeClr val="tx1"/>
           </a:solidFill>
@@ -1212,7 +1228,7 @@
         <a:buFontTx/>
         <a:buNone/>
         <a:tabLst/>
-        <a:defRPr b="0" baseline="0" cap="none" i="0" spc="0" strike="noStrike" sz="1200" u="none">
+        <a:defRPr sz="1200" b="0" i="0" u="none" strike="noStrike" cap="none" spc="0" baseline="0">
           <a:solidFill>
             <a:schemeClr val="tx1"/>
           </a:solidFill>
@@ -1238,7 +1254,7 @@
         <a:buFontTx/>
         <a:buNone/>
         <a:tabLst/>
-        <a:defRPr b="0" baseline="0" cap="none" i="0" spc="0" strike="noStrike" sz="1200" u="none">
+        <a:defRPr sz="1200" b="0" i="0" u="none" strike="noStrike" cap="none" spc="0" baseline="0">
           <a:solidFill>
             <a:schemeClr val="tx1"/>
           </a:solidFill>
@@ -1264,7 +1280,7 @@
         <a:buFontTx/>
         <a:buNone/>
         <a:tabLst/>
-        <a:defRPr b="0" baseline="0" cap="none" i="0" spc="0" strike="noStrike" sz="1200" u="none">
+        <a:defRPr sz="1200" b="0" i="0" u="none" strike="noStrike" cap="none" spc="0" baseline="0">
           <a:solidFill>
             <a:schemeClr val="tx1"/>
           </a:solidFill>
@@ -1290,7 +1306,7 @@
         <a:buFontTx/>
         <a:buNone/>
         <a:tabLst/>
-        <a:defRPr b="0" baseline="0" cap="none" i="0" spc="0" strike="noStrike" sz="1200" u="none">
+        <a:defRPr sz="1200" b="0" i="0" u="none" strike="noStrike" cap="none" spc="0" baseline="0">
           <a:solidFill>
             <a:schemeClr val="tx1"/>
           </a:solidFill>
@@ -1316,7 +1332,7 @@
         <a:buFontTx/>
         <a:buNone/>
         <a:tabLst/>
-        <a:defRPr b="0" baseline="0" cap="none" i="0" spc="0" strike="noStrike" sz="1200" u="none">
+        <a:defRPr sz="1200" b="0" i="0" u="none" strike="noStrike" cap="none" spc="0" baseline="0">
           <a:solidFill>
             <a:schemeClr val="tx1"/>
           </a:solidFill>
@@ -1342,7 +1358,7 @@
         <a:buFontTx/>
         <a:buNone/>
         <a:tabLst/>
-        <a:defRPr b="0" baseline="0" cap="none" i="0" spc="0" strike="noStrike" sz="1200" u="none">
+        <a:defRPr sz="1200" b="0" i="0" u="none" strike="noStrike" cap="none" spc="0" baseline="0">
           <a:solidFill>
             <a:schemeClr val="tx1"/>
           </a:solidFill>
@@ -1368,7 +1384,7 @@
         <a:buFontTx/>
         <a:buNone/>
         <a:tabLst/>
-        <a:defRPr b="0" baseline="0" cap="none" i="0" spc="0" strike="noStrike" sz="1200" u="none">
+        <a:defRPr sz="1200" b="0" i="0" u="none" strike="noStrike" cap="none" spc="0" baseline="0">
           <a:solidFill>
             <a:schemeClr val="tx1"/>
           </a:solidFill>
@@ -1394,7 +1410,7 @@
         <a:buFontTx/>
         <a:buNone/>
         <a:tabLst/>
-        <a:defRPr b="0" baseline="0" cap="none" i="0" spc="0" strike="noStrike" sz="1200" u="none">
+        <a:defRPr sz="1200" b="0" i="0" u="none" strike="noStrike" cap="none" spc="0" baseline="0">
           <a:solidFill>
             <a:schemeClr val="tx1"/>
           </a:solidFill>
@@ -1411,13 +1427,14 @@
 </file>
 
 <file path=ppt/slides/slide1.xml><?xml version="1.0" encoding="utf-8"?>
-<p:sld xmlns:a="http://schemas.openxmlformats.org/drawingml/2006/main" xmlns:r="http://schemas.openxmlformats.org/officeDocument/2006/relationships" xmlns:p="http://schemas.openxmlformats.org/presentationml/2006/main" xmlns:m="http://schemas.openxmlformats.org/officeDocument/2006/math" xmlns:a14="http://schemas.microsoft.com/office/drawing/2010/main" showMasterSp="1" showMasterPhAnim="1">
+<p:sld xmlns:a="http://schemas.openxmlformats.org/drawingml/2006/main" xmlns:r="http://schemas.openxmlformats.org/officeDocument/2006/relationships" xmlns:p="http://schemas.openxmlformats.org/presentationml/2006/main">
   <p:cSld>
     <p:bg>
       <p:bgPr>
         <a:solidFill>
           <a:srgbClr val="0F0F0F"/>
         </a:solidFill>
+        <a:effectLst/>
       </p:bgPr>
     </p:bg>
     <p:spTree>
@@ -1461,7 +1478,7 @@
           <a:bodyPr lIns="45719" rIns="45719"/>
           <a:lstStyle/>
           <a:p>
-            <a:pPr/>
+            <a:endParaRPr/>
           </a:p>
         </p:txBody>
       </p:sp>
@@ -1492,7 +1509,7 @@
           <a:bodyPr lIns="45719" rIns="45719"/>
           <a:lstStyle/>
           <a:p>
-            <a:pPr/>
+            <a:endParaRPr/>
           </a:p>
         </p:txBody>
       </p:sp>
@@ -1523,7 +1540,7 @@
           <a:bodyPr lIns="45719" rIns="45719"/>
           <a:lstStyle/>
           <a:p>
-            <a:pPr/>
+            <a:endParaRPr/>
           </a:p>
         </p:txBody>
       </p:sp>
@@ -1554,7 +1571,7 @@
           <a:bodyPr lIns="45719" rIns="45719"/>
           <a:lstStyle/>
           <a:p>
-            <a:pPr/>
+            <a:endParaRPr/>
           </a:p>
         </p:txBody>
       </p:sp>
@@ -1585,7 +1602,7 @@
           <a:bodyPr lIns="45719" rIns="45719"/>
           <a:lstStyle/>
           <a:p>
-            <a:pPr/>
+            <a:endParaRPr/>
           </a:p>
         </p:txBody>
       </p:sp>
@@ -1616,7 +1633,7 @@
           <a:bodyPr lIns="45719" rIns="45719"/>
           <a:lstStyle/>
           <a:p>
-            <a:pPr/>
+            <a:endParaRPr/>
           </a:p>
         </p:txBody>
       </p:sp>
@@ -1647,7 +1664,7 @@
           <a:bodyPr lIns="45719" rIns="45719"/>
           <a:lstStyle/>
           <a:p>
-            <a:pPr/>
+            <a:endParaRPr/>
           </a:p>
         </p:txBody>
       </p:sp>
@@ -1678,7 +1695,7 @@
           <a:bodyPr lIns="45719" rIns="45719"/>
           <a:lstStyle/>
           <a:p>
-            <a:pPr/>
+            <a:endParaRPr/>
           </a:p>
         </p:txBody>
       </p:sp>
@@ -1709,7 +1726,7 @@
           <a:bodyPr lIns="45719" rIns="45719"/>
           <a:lstStyle/>
           <a:p>
-            <a:pPr/>
+            <a:endParaRPr/>
           </a:p>
         </p:txBody>
       </p:sp>
@@ -1740,7 +1757,7 @@
           <a:bodyPr lIns="45719" rIns="45719"/>
           <a:lstStyle/>
           <a:p>
-            <a:pPr/>
+            <a:endParaRPr/>
           </a:p>
         </p:txBody>
       </p:sp>
@@ -1771,7 +1788,7 @@
           <a:bodyPr lIns="45719" rIns="45719"/>
           <a:lstStyle/>
           <a:p>
-            <a:pPr/>
+            <a:endParaRPr/>
           </a:p>
         </p:txBody>
       </p:sp>
@@ -1802,7 +1819,7 @@
           <a:bodyPr lIns="45719" rIns="45719"/>
           <a:lstStyle/>
           <a:p>
-            <a:pPr/>
+            <a:endParaRPr/>
           </a:p>
         </p:txBody>
       </p:sp>
@@ -1833,7 +1850,7 @@
           <a:bodyPr lIns="45719" rIns="45719"/>
           <a:lstStyle/>
           <a:p>
-            <a:pPr/>
+            <a:endParaRPr/>
           </a:p>
         </p:txBody>
       </p:sp>
@@ -1864,7 +1881,7 @@
           <a:bodyPr lIns="45719" rIns="45719"/>
           <a:lstStyle/>
           <a:p>
-            <a:pPr/>
+            <a:endParaRPr/>
           </a:p>
         </p:txBody>
       </p:sp>
@@ -1895,7 +1912,7 @@
           <a:bodyPr lIns="45719" rIns="45719"/>
           <a:lstStyle/>
           <a:p>
-            <a:pPr/>
+            <a:endParaRPr/>
           </a:p>
         </p:txBody>
       </p:sp>
@@ -1926,7 +1943,7 @@
           <a:bodyPr lIns="45719" rIns="45719"/>
           <a:lstStyle/>
           <a:p>
-            <a:pPr/>
+            <a:endParaRPr/>
           </a:p>
         </p:txBody>
       </p:sp>
@@ -1957,7 +1974,7 @@
           <a:bodyPr lIns="45719" rIns="45719"/>
           <a:lstStyle/>
           <a:p>
-            <a:pPr/>
+            <a:endParaRPr/>
           </a:p>
         </p:txBody>
       </p:sp>
@@ -1988,7 +2005,7 @@
           <a:bodyPr lIns="45719" rIns="45719"/>
           <a:lstStyle/>
           <a:p>
-            <a:pPr/>
+            <a:endParaRPr/>
           </a:p>
         </p:txBody>
       </p:sp>
@@ -2019,7 +2036,7 @@
           <a:bodyPr lIns="45719" rIns="45719"/>
           <a:lstStyle/>
           <a:p>
-            <a:pPr/>
+            <a:endParaRPr/>
           </a:p>
         </p:txBody>
       </p:sp>
@@ -2042,7 +2059,7 @@
           </a:ln>
           <a:extLst>
             <a:ext uri="{C572A759-6A51-4108-AA02-DFA0A04FC94B}">
-              <ma14:wrappingTextBoxFlag xmlns:ma14="http://schemas.microsoft.com/office/mac/drawingml/2011/main" val="1"/>
+              <ma14:wrappingTextBoxFlag xmlns:ma14="http://schemas.microsoft.com/office/mac/drawingml/2011/main" xmlns:a14="http://schemas.microsoft.com/office/drawing/2010/main" xmlns:m="http://schemas.openxmlformats.org/officeDocument/2006/math" xmlns="" val="1"/>
             </a:ext>
           </a:extLst>
         </p:spPr>
@@ -2056,7 +2073,7 @@
               <a:lnSpc>
                 <a:spcPct val="110000"/>
               </a:lnSpc>
-              <a:defRPr b="1" sz="4000">
+              <a:defRPr sz="4000" b="1">
                 <a:solidFill>
                   <a:srgbClr val="FFFFFF"/>
                 </a:solidFill>
@@ -2075,7 +2092,7 @@
               <a:lnSpc>
                 <a:spcPct val="110000"/>
               </a:lnSpc>
-              <a:defRPr b="1" sz="4000">
+              <a:defRPr sz="4000" b="1">
                 <a:solidFill>
                   <a:srgbClr val="FFFFFF"/>
                 </a:solidFill>
@@ -2110,7 +2127,7 @@
           </a:ln>
           <a:extLst>
             <a:ext uri="{C572A759-6A51-4108-AA02-DFA0A04FC94B}">
-              <ma14:wrappingTextBoxFlag xmlns:ma14="http://schemas.microsoft.com/office/mac/drawingml/2011/main" val="1"/>
+              <ma14:wrappingTextBoxFlag xmlns:ma14="http://schemas.microsoft.com/office/mac/drawingml/2011/main" xmlns:a14="http://schemas.microsoft.com/office/drawing/2010/main" xmlns:m="http://schemas.openxmlformats.org/officeDocument/2006/math" xmlns="" val="1"/>
             </a:ext>
           </a:extLst>
         </p:spPr>
@@ -2128,7 +2145,6 @@
             </a:lvl1pPr>
           </a:lstStyle>
           <a:p>
-            <a:pPr/>
             <a:r>
               <a:t>Measuring Information, Order, and Complexity in 2D Cellular Automata</a:t>
             </a:r>
@@ -2154,7 +2170,7 @@
           </a:ln>
           <a:extLst>
             <a:ext uri="{C572A759-6A51-4108-AA02-DFA0A04FC94B}">
-              <ma14:wrappingTextBoxFlag xmlns:ma14="http://schemas.microsoft.com/office/mac/drawingml/2011/main" val="1"/>
+              <ma14:wrappingTextBoxFlag xmlns:ma14="http://schemas.microsoft.com/office/mac/drawingml/2011/main" xmlns:a14="http://schemas.microsoft.com/office/drawing/2010/main" xmlns:m="http://schemas.openxmlformats.org/officeDocument/2006/math" xmlns="" val="1"/>
             </a:ext>
           </a:extLst>
         </p:spPr>
@@ -2172,7 +2188,6 @@
             </a:lvl1pPr>
           </a:lstStyle>
           <a:p>
-            <a:pPr/>
             <a:r>
               <a:t>From Conway to LangGraph  •  Week 2</a:t>
             </a:r>
@@ -2204,7 +2219,7 @@
           <a:bodyPr lIns="45719" rIns="45719"/>
           <a:lstStyle/>
           <a:p>
-            <a:pPr/>
+            <a:endParaRPr/>
           </a:p>
         </p:txBody>
       </p:sp>
@@ -2227,7 +2242,7 @@
           </a:ln>
           <a:extLst>
             <a:ext uri="{C572A759-6A51-4108-AA02-DFA0A04FC94B}">
-              <ma14:wrappingTextBoxFlag xmlns:ma14="http://schemas.microsoft.com/office/mac/drawingml/2011/main" val="1"/>
+              <ma14:wrappingTextBoxFlag xmlns:ma14="http://schemas.microsoft.com/office/mac/drawingml/2011/main" xmlns:a14="http://schemas.microsoft.com/office/drawing/2010/main" xmlns:m="http://schemas.openxmlformats.org/officeDocument/2006/math" xmlns="" val="1"/>
             </a:ext>
           </a:extLst>
         </p:spPr>
@@ -2245,7 +2260,6 @@
             </a:lvl1pPr>
           </a:lstStyle>
           <a:p>
-            <a:pPr/>
             <a:r>
               <a:t>Prof. Mirko Degli Esposti  •  Dept. of Physics  •  University of Bologna</a:t>
             </a:r>
@@ -2257,18 +2271,19 @@
   <p:clrMapOvr>
     <a:masterClrMapping/>
   </p:clrMapOvr>
-  <p:transition xmlns:p14="http://schemas.microsoft.com/office/powerpoint/2010/main" spd="med" advClick="1"/>
+  <p:transition spd="med"/>
 </p:sld>
 </file>
 
 <file path=ppt/slides/slide10.xml><?xml version="1.0" encoding="utf-8"?>
-<p:sld xmlns:a="http://schemas.openxmlformats.org/drawingml/2006/main" xmlns:r="http://schemas.openxmlformats.org/officeDocument/2006/relationships" xmlns:p="http://schemas.openxmlformats.org/presentationml/2006/main" xmlns:m="http://schemas.openxmlformats.org/officeDocument/2006/math" xmlns:a14="http://schemas.microsoft.com/office/drawing/2010/main" showMasterSp="1" showMasterPhAnim="1">
+<p:sld xmlns:a="http://schemas.openxmlformats.org/drawingml/2006/main" xmlns:r="http://schemas.openxmlformats.org/officeDocument/2006/relationships" xmlns:p="http://schemas.openxmlformats.org/presentationml/2006/main">
   <p:cSld>
     <p:bg>
       <p:bgPr>
         <a:solidFill>
           <a:srgbClr val="1A1A1A"/>
         </a:solidFill>
+        <a:effectLst/>
       </p:bgPr>
     </p:bg>
     <p:spTree>
@@ -2310,7 +2325,7 @@
           <a:bodyPr lIns="45719" rIns="45719"/>
           <a:lstStyle/>
           <a:p>
-            <a:pPr/>
+            <a:endParaRPr/>
           </a:p>
         </p:txBody>
       </p:sp>
@@ -2333,7 +2348,7 @@
           </a:ln>
           <a:extLst>
             <a:ext uri="{C572A759-6A51-4108-AA02-DFA0A04FC94B}">
-              <ma14:wrappingTextBoxFlag xmlns:ma14="http://schemas.microsoft.com/office/mac/drawingml/2011/main" val="1"/>
+              <ma14:wrappingTextBoxFlag xmlns:ma14="http://schemas.microsoft.com/office/mac/drawingml/2011/main" xmlns:a14="http://schemas.microsoft.com/office/drawing/2010/main" xmlns:m="http://schemas.openxmlformats.org/officeDocument/2006/math" xmlns="" val="1"/>
             </a:ext>
           </a:extLst>
         </p:spPr>
@@ -2351,7 +2366,6 @@
             </a:lvl1pPr>
           </a:lstStyle>
           <a:p>
-            <a:pPr/>
             <a:r>
               <a:t>From Conway to LangGraph  •  University of Bologna  •  Dept. of Physics</a:t>
             </a:r>
@@ -2377,7 +2391,7 @@
           </a:ln>
           <a:extLst>
             <a:ext uri="{C572A759-6A51-4108-AA02-DFA0A04FC94B}">
-              <ma14:wrappingTextBoxFlag xmlns:ma14="http://schemas.microsoft.com/office/mac/drawingml/2011/main" val="1"/>
+              <ma14:wrappingTextBoxFlag xmlns:ma14="http://schemas.microsoft.com/office/mac/drawingml/2011/main" xmlns:a14="http://schemas.microsoft.com/office/drawing/2010/main" xmlns:m="http://schemas.openxmlformats.org/officeDocument/2006/math" xmlns="" val="1"/>
             </a:ext>
           </a:extLst>
         </p:spPr>
@@ -2387,7 +2401,7 @@
           </a:bodyPr>
           <a:lstStyle>
             <a:lvl1pPr>
-              <a:defRPr b="1" sz="2800">
+              <a:defRPr sz="2800" b="1">
                 <a:solidFill>
                   <a:srgbClr val="FFFFFF"/>
                 </a:solidFill>
@@ -2399,7 +2413,6 @@
             </a:lvl1pPr>
           </a:lstStyle>
           <a:p>
-            <a:pPr/>
             <a:r>
               <a:t>Anti-Entropic Behavior</a:t>
             </a:r>
@@ -2425,7 +2438,7 @@
           </a:ln>
           <a:extLst>
             <a:ext uri="{C572A759-6A51-4108-AA02-DFA0A04FC94B}">
-              <ma14:wrappingTextBoxFlag xmlns:ma14="http://schemas.microsoft.com/office/mac/drawingml/2011/main" val="1"/>
+              <ma14:wrappingTextBoxFlag xmlns:ma14="http://schemas.microsoft.com/office/mac/drawingml/2011/main" xmlns:a14="http://schemas.microsoft.com/office/drawing/2010/main" xmlns:m="http://schemas.openxmlformats.org/officeDocument/2006/math" xmlns="" val="1"/>
             </a:ext>
           </a:extLst>
         </p:spPr>
@@ -2435,7 +2448,7 @@
           </a:bodyPr>
           <a:lstStyle>
             <a:lvl1pPr>
-              <a:defRPr i="1" sz="1200">
+              <a:defRPr sz="1200" i="1">
                 <a:solidFill>
                   <a:srgbClr val="707070"/>
                 </a:solidFill>
@@ -2443,7 +2456,6 @@
             </a:lvl1pPr>
           </a:lstStyle>
           <a:p>
-            <a:pPr/>
             <a:r>
               <a:t>Why GoL is special: entropy decreases without external intervention</a:t>
             </a:r>
@@ -2475,7 +2487,7 @@
           <a:bodyPr lIns="45719" rIns="45719"/>
           <a:lstStyle/>
           <a:p>
-            <a:pPr/>
+            <a:endParaRPr/>
           </a:p>
         </p:txBody>
       </p:sp>
@@ -2504,7 +2516,7 @@
           <a:bodyPr lIns="45719" rIns="45719"/>
           <a:lstStyle/>
           <a:p>
-            <a:pPr/>
+            <a:endParaRPr/>
           </a:p>
         </p:txBody>
       </p:sp>
@@ -2527,7 +2539,7 @@
           </a:ln>
           <a:extLst>
             <a:ext uri="{C572A759-6A51-4108-AA02-DFA0A04FC94B}">
-              <ma14:wrappingTextBoxFlag xmlns:ma14="http://schemas.microsoft.com/office/mac/drawingml/2011/main" val="1"/>
+              <ma14:wrappingTextBoxFlag xmlns:ma14="http://schemas.microsoft.com/office/mac/drawingml/2011/main" xmlns:a14="http://schemas.microsoft.com/office/drawing/2010/main" xmlns:m="http://schemas.openxmlformats.org/officeDocument/2006/math" xmlns="" val="1"/>
             </a:ext>
           </a:extLst>
         </p:spPr>
@@ -2537,7 +2549,7 @@
           </a:bodyPr>
           <a:lstStyle>
             <a:lvl1pPr>
-              <a:defRPr b="1" sz="1600">
+              <a:defRPr sz="1600" b="1">
                 <a:solidFill>
                   <a:srgbClr val="CC4444"/>
                 </a:solidFill>
@@ -2549,7 +2561,6 @@
             </a:lvl1pPr>
           </a:lstStyle>
           <a:p>
-            <a:pPr/>
             <a:r>
               <a:t>The Apparent Paradox</a:t>
             </a:r>
@@ -2575,7 +2586,7 @@
           </a:ln>
           <a:extLst>
             <a:ext uri="{C572A759-6A51-4108-AA02-DFA0A04FC94B}">
-              <ma14:wrappingTextBoxFlag xmlns:ma14="http://schemas.microsoft.com/office/mac/drawingml/2011/main" val="1"/>
+              <ma14:wrappingTextBoxFlag xmlns:ma14="http://schemas.microsoft.com/office/mac/drawingml/2011/main" xmlns:a14="http://schemas.microsoft.com/office/drawing/2010/main" xmlns:m="http://schemas.openxmlformats.org/officeDocument/2006/math" xmlns="" val="1"/>
             </a:ext>
           </a:extLst>
         </p:spPr>
@@ -2612,6 +2623,7 @@
             <a:pPr>
               <a:defRPr sz="1200"/>
             </a:pPr>
+            <a:endParaRPr/>
           </a:p>
           <a:p>
             <a:pPr>
@@ -2641,6 +2653,7 @@
             <a:pPr>
               <a:defRPr sz="1200"/>
             </a:pPr>
+            <a:endParaRPr/>
           </a:p>
           <a:p>
             <a:pPr>
@@ -2682,6 +2695,7 @@
             <a:pPr>
               <a:defRPr sz="1200"/>
             </a:pPr>
+            <a:endParaRPr/>
           </a:p>
           <a:p>
             <a:pPr>
@@ -2722,7 +2736,7 @@
           <a:bodyPr lIns="45719" rIns="45719"/>
           <a:lstStyle/>
           <a:p>
-            <a:pPr/>
+            <a:endParaRPr/>
           </a:p>
         </p:txBody>
       </p:sp>
@@ -2751,7 +2765,7 @@
           <a:bodyPr lIns="45719" rIns="45719"/>
           <a:lstStyle/>
           <a:p>
-            <a:pPr/>
+            <a:endParaRPr/>
           </a:p>
         </p:txBody>
       </p:sp>
@@ -2774,7 +2788,7 @@
           </a:ln>
           <a:extLst>
             <a:ext uri="{C572A759-6A51-4108-AA02-DFA0A04FC94B}">
-              <ma14:wrappingTextBoxFlag xmlns:ma14="http://schemas.microsoft.com/office/mac/drawingml/2011/main" val="1"/>
+              <ma14:wrappingTextBoxFlag xmlns:ma14="http://schemas.microsoft.com/office/mac/drawingml/2011/main" xmlns:a14="http://schemas.microsoft.com/office/drawing/2010/main" xmlns:m="http://schemas.openxmlformats.org/officeDocument/2006/math" xmlns="" val="1"/>
             </a:ext>
           </a:extLst>
         </p:spPr>
@@ -2784,7 +2798,7 @@
           </a:bodyPr>
           <a:lstStyle>
             <a:lvl1pPr>
-              <a:defRPr b="1" sz="1600">
+              <a:defRPr sz="1600" b="1">
                 <a:solidFill>
                   <a:srgbClr val="44AA66"/>
                 </a:solidFill>
@@ -2796,7 +2810,6 @@
             </a:lvl1pPr>
           </a:lstStyle>
           <a:p>
-            <a:pPr/>
             <a:r>
               <a:t>The Resolution</a:t>
             </a:r>
@@ -2822,7 +2835,7 @@
           </a:ln>
           <a:extLst>
             <a:ext uri="{C572A759-6A51-4108-AA02-DFA0A04FC94B}">
-              <ma14:wrappingTextBoxFlag xmlns:ma14="http://schemas.microsoft.com/office/mac/drawingml/2011/main" val="1"/>
+              <ma14:wrappingTextBoxFlag xmlns:ma14="http://schemas.microsoft.com/office/mac/drawingml/2011/main" xmlns:a14="http://schemas.microsoft.com/office/drawing/2010/main" xmlns:m="http://schemas.openxmlformats.org/officeDocument/2006/math" xmlns="" val="1"/>
             </a:ext>
           </a:extLst>
         </p:spPr>
@@ -2847,6 +2860,7 @@
             <a:pPr>
               <a:defRPr sz="1200"/>
             </a:pPr>
+            <a:endParaRPr/>
           </a:p>
           <a:p>
             <a:pPr>
@@ -2876,6 +2890,7 @@
             <a:pPr>
               <a:defRPr sz="1200"/>
             </a:pPr>
+            <a:endParaRPr/>
           </a:p>
           <a:p>
             <a:pPr>
@@ -2905,6 +2920,7 @@
             <a:pPr>
               <a:defRPr sz="1200"/>
             </a:pPr>
+            <a:endParaRPr/>
           </a:p>
           <a:p>
             <a:pPr>
@@ -2946,6 +2962,7 @@
             <a:pPr>
               <a:defRPr sz="1200"/>
             </a:pPr>
+            <a:endParaRPr/>
           </a:p>
           <a:p>
             <a:pPr>
@@ -2978,18 +2995,19 @@
   <p:clrMapOvr>
     <a:masterClrMapping/>
   </p:clrMapOvr>
-  <p:transition xmlns:p14="http://schemas.microsoft.com/office/powerpoint/2010/main" spd="med" advClick="1"/>
+  <p:transition spd="med"/>
 </p:sld>
 </file>
 
 <file path=ppt/slides/slide11.xml><?xml version="1.0" encoding="utf-8"?>
-<p:sld xmlns:a="http://schemas.openxmlformats.org/drawingml/2006/main" xmlns:r="http://schemas.openxmlformats.org/officeDocument/2006/relationships" xmlns:p="http://schemas.openxmlformats.org/presentationml/2006/main" xmlns:m="http://schemas.openxmlformats.org/officeDocument/2006/math" xmlns:a14="http://schemas.microsoft.com/office/drawing/2010/main" showMasterSp="1" showMasterPhAnim="1">
+<p:sld xmlns:a="http://schemas.openxmlformats.org/drawingml/2006/main" xmlns:r="http://schemas.openxmlformats.org/officeDocument/2006/relationships" xmlns:p="http://schemas.openxmlformats.org/presentationml/2006/main">
   <p:cSld>
     <p:bg>
       <p:bgPr>
         <a:solidFill>
           <a:srgbClr val="1A1A1A"/>
         </a:solidFill>
+        <a:effectLst/>
       </p:bgPr>
     </p:bg>
     <p:spTree>
@@ -3031,7 +3049,7 @@
           <a:bodyPr lIns="45719" rIns="45719"/>
           <a:lstStyle/>
           <a:p>
-            <a:pPr/>
+            <a:endParaRPr/>
           </a:p>
         </p:txBody>
       </p:sp>
@@ -3054,7 +3072,7 @@
           </a:ln>
           <a:extLst>
             <a:ext uri="{C572A759-6A51-4108-AA02-DFA0A04FC94B}">
-              <ma14:wrappingTextBoxFlag xmlns:ma14="http://schemas.microsoft.com/office/mac/drawingml/2011/main" val="1"/>
+              <ma14:wrappingTextBoxFlag xmlns:ma14="http://schemas.microsoft.com/office/mac/drawingml/2011/main" xmlns:a14="http://schemas.microsoft.com/office/drawing/2010/main" xmlns:m="http://schemas.openxmlformats.org/officeDocument/2006/math" xmlns="" val="1"/>
             </a:ext>
           </a:extLst>
         </p:spPr>
@@ -3072,7 +3090,6 @@
             </a:lvl1pPr>
           </a:lstStyle>
           <a:p>
-            <a:pPr/>
             <a:r>
               <a:t>From Conway to LangGraph  •  University of Bologna  •  Dept. of Physics</a:t>
             </a:r>
@@ -3098,7 +3115,7 @@
           </a:ln>
           <a:extLst>
             <a:ext uri="{C572A759-6A51-4108-AA02-DFA0A04FC94B}">
-              <ma14:wrappingTextBoxFlag xmlns:ma14="http://schemas.microsoft.com/office/mac/drawingml/2011/main" val="1"/>
+              <ma14:wrappingTextBoxFlag xmlns:ma14="http://schemas.microsoft.com/office/mac/drawingml/2011/main" xmlns:a14="http://schemas.microsoft.com/office/drawing/2010/main" xmlns:m="http://schemas.openxmlformats.org/officeDocument/2006/math" xmlns="" val="1"/>
             </a:ext>
           </a:extLst>
         </p:spPr>
@@ -3108,7 +3125,7 @@
           </a:bodyPr>
           <a:lstStyle>
             <a:lvl1pPr>
-              <a:defRPr b="1" sz="2800">
+              <a:defRPr sz="2800" b="1">
                 <a:solidFill>
                   <a:srgbClr val="FFFFFF"/>
                 </a:solidFill>
@@ -3120,7 +3137,6 @@
             </a:lvl1pPr>
           </a:lstStyle>
           <a:p>
-            <a:pPr/>
             <a:r>
               <a:t>GoL as an Outlier in Rule Space</a:t>
             </a:r>
@@ -3146,7 +3162,7 @@
           </a:ln>
           <a:extLst>
             <a:ext uri="{C572A759-6A51-4108-AA02-DFA0A04FC94B}">
-              <ma14:wrappingTextBoxFlag xmlns:ma14="http://schemas.microsoft.com/office/mac/drawingml/2011/main" val="1"/>
+              <ma14:wrappingTextBoxFlag xmlns:ma14="http://schemas.microsoft.com/office/mac/drawingml/2011/main" xmlns:a14="http://schemas.microsoft.com/office/drawing/2010/main" xmlns:m="http://schemas.openxmlformats.org/officeDocument/2006/math" xmlns="" val="1"/>
             </a:ext>
           </a:extLst>
         </p:spPr>
@@ -3156,7 +3172,7 @@
           </a:bodyPr>
           <a:lstStyle>
             <a:lvl1pPr>
-              <a:defRPr i="1" sz="1200">
+              <a:defRPr sz="1200" i="1">
                 <a:solidFill>
                   <a:srgbClr val="707070"/>
                 </a:solidFill>
@@ -3164,7 +3180,6 @@
             </a:lvl1pPr>
           </a:lstStyle>
           <a:p>
-            <a:pPr/>
             <a:r>
               <a:t>Entropy signatures distinguish 'lifelike' rules (B3/S23) from the 2¹⁸ alternatives</a:t>
             </a:r>
@@ -3196,7 +3211,7 @@
           <a:bodyPr lIns="45719" rIns="45719"/>
           <a:lstStyle/>
           <a:p>
-            <a:pPr/>
+            <a:endParaRPr/>
           </a:p>
         </p:txBody>
       </p:sp>
@@ -3225,7 +3240,7 @@
           <a:bodyPr lIns="45719" rIns="45719"/>
           <a:lstStyle/>
           <a:p>
-            <a:pPr/>
+            <a:endParaRPr/>
           </a:p>
         </p:txBody>
       </p:sp>
@@ -3248,7 +3263,7 @@
           </a:ln>
           <a:extLst>
             <a:ext uri="{C572A759-6A51-4108-AA02-DFA0A04FC94B}">
-              <ma14:wrappingTextBoxFlag xmlns:ma14="http://schemas.microsoft.com/office/mac/drawingml/2011/main" val="1"/>
+              <ma14:wrappingTextBoxFlag xmlns:ma14="http://schemas.microsoft.com/office/mac/drawingml/2011/main" xmlns:a14="http://schemas.microsoft.com/office/drawing/2010/main" xmlns:m="http://schemas.openxmlformats.org/officeDocument/2006/math" xmlns="" val="1"/>
             </a:ext>
           </a:extLst>
         </p:spPr>
@@ -3258,7 +3273,7 @@
           </a:bodyPr>
           <a:lstStyle>
             <a:lvl1pPr>
-              <a:defRPr b="1" sz="1600">
+              <a:defRPr sz="1600" b="1">
                 <a:solidFill>
                   <a:srgbClr val="4A9ECC"/>
                 </a:solidFill>
@@ -3270,7 +3285,6 @@
             </a:lvl1pPr>
           </a:lstStyle>
           <a:p>
-            <a:pPr/>
             <a:r>
               <a:t>Criticality</a:t>
             </a:r>
@@ -3296,7 +3310,7 @@
           </a:ln>
           <a:extLst>
             <a:ext uri="{C572A759-6A51-4108-AA02-DFA0A04FC94B}">
-              <ma14:wrappingTextBoxFlag xmlns:ma14="http://schemas.microsoft.com/office/mac/drawingml/2011/main" val="1"/>
+              <ma14:wrappingTextBoxFlag xmlns:ma14="http://schemas.microsoft.com/office/mac/drawingml/2011/main" xmlns:a14="http://schemas.microsoft.com/office/drawing/2010/main" xmlns:m="http://schemas.openxmlformats.org/officeDocument/2006/math" xmlns="" val="1"/>
             </a:ext>
           </a:extLst>
         </p:spPr>
@@ -3314,7 +3328,6 @@
             </a:lvl1pPr>
           </a:lstStyle>
           <a:p>
-            <a:pPr/>
             <a:r>
               <a:t>GoL operates near a critical point between ordered (Class I/II) and chaotic (Class III) regimes. Langton's λ ≈ 0.273 for B3/S23 places it in the 'edge of chaos' region.</a:t>
             </a:r>
@@ -3346,7 +3359,7 @@
           <a:bodyPr lIns="45719" rIns="45719"/>
           <a:lstStyle/>
           <a:p>
-            <a:pPr/>
+            <a:endParaRPr/>
           </a:p>
         </p:txBody>
       </p:sp>
@@ -3375,7 +3388,7 @@
           <a:bodyPr lIns="45719" rIns="45719"/>
           <a:lstStyle/>
           <a:p>
-            <a:pPr/>
+            <a:endParaRPr/>
           </a:p>
         </p:txBody>
       </p:sp>
@@ -3398,7 +3411,7 @@
           </a:ln>
           <a:extLst>
             <a:ext uri="{C572A759-6A51-4108-AA02-DFA0A04FC94B}">
-              <ma14:wrappingTextBoxFlag xmlns:ma14="http://schemas.microsoft.com/office/mac/drawingml/2011/main" val="1"/>
+              <ma14:wrappingTextBoxFlag xmlns:ma14="http://schemas.microsoft.com/office/mac/drawingml/2011/main" xmlns:a14="http://schemas.microsoft.com/office/drawing/2010/main" xmlns:m="http://schemas.openxmlformats.org/officeDocument/2006/math" xmlns="" val="1"/>
             </a:ext>
           </a:extLst>
         </p:spPr>
@@ -3408,7 +3421,7 @@
           </a:bodyPr>
           <a:lstStyle>
             <a:lvl1pPr>
-              <a:defRPr b="1" sz="1600">
+              <a:defRPr sz="1600" b="1">
                 <a:solidFill>
                   <a:srgbClr val="E8B931"/>
                 </a:solidFill>
@@ -3420,7 +3433,6 @@
             </a:lvl1pPr>
           </a:lstStyle>
           <a:p>
-            <a:pPr/>
             <a:r>
               <a:t>Anti-Entropy</a:t>
             </a:r>
@@ -3446,7 +3458,7 @@
           </a:ln>
           <a:extLst>
             <a:ext uri="{C572A759-6A51-4108-AA02-DFA0A04FC94B}">
-              <ma14:wrappingTextBoxFlag xmlns:ma14="http://schemas.microsoft.com/office/mac/drawingml/2011/main" val="1"/>
+              <ma14:wrappingTextBoxFlag xmlns:ma14="http://schemas.microsoft.com/office/mac/drawingml/2011/main" xmlns:a14="http://schemas.microsoft.com/office/drawing/2010/main" xmlns:m="http://schemas.openxmlformats.org/officeDocument/2006/math" xmlns="" val="1"/>
             </a:ext>
           </a:extLst>
         </p:spPr>
@@ -3464,7 +3476,6 @@
             </a:lvl1pPr>
           </a:lstStyle>
           <a:p>
-            <a:pPr/>
             <a:r>
               <a:t>Starting from random soups, GoL exhibits a stronger entropy decrease than almost all other life-like rules. Most rules either die out completely or remain chaotic.</a:t>
             </a:r>
@@ -3496,7 +3507,7 @@
           <a:bodyPr lIns="45719" rIns="45719"/>
           <a:lstStyle/>
           <a:p>
-            <a:pPr/>
+            <a:endParaRPr/>
           </a:p>
         </p:txBody>
       </p:sp>
@@ -3525,7 +3536,7 @@
           <a:bodyPr lIns="45719" rIns="45719"/>
           <a:lstStyle/>
           <a:p>
-            <a:pPr/>
+            <a:endParaRPr/>
           </a:p>
         </p:txBody>
       </p:sp>
@@ -3548,7 +3559,7 @@
           </a:ln>
           <a:extLst>
             <a:ext uri="{C572A759-6A51-4108-AA02-DFA0A04FC94B}">
-              <ma14:wrappingTextBoxFlag xmlns:ma14="http://schemas.microsoft.com/office/mac/drawingml/2011/main" val="1"/>
+              <ma14:wrappingTextBoxFlag xmlns:ma14="http://schemas.microsoft.com/office/mac/drawingml/2011/main" xmlns:a14="http://schemas.microsoft.com/office/drawing/2010/main" xmlns:m="http://schemas.openxmlformats.org/officeDocument/2006/math" xmlns="" val="1"/>
             </a:ext>
           </a:extLst>
         </p:spPr>
@@ -3558,7 +3569,7 @@
           </a:bodyPr>
           <a:lstStyle>
             <a:lvl1pPr>
-              <a:defRPr b="1" sz="1600">
+              <a:defRPr sz="1600" b="1">
                 <a:solidFill>
                   <a:srgbClr val="44AA66"/>
                 </a:solidFill>
@@ -3570,7 +3581,6 @@
             </a:lvl1pPr>
           </a:lstStyle>
           <a:p>
-            <a:pPr/>
             <a:r>
               <a:t>Integration</a:t>
             </a:r>
@@ -3596,7 +3606,7 @@
           </a:ln>
           <a:extLst>
             <a:ext uri="{C572A759-6A51-4108-AA02-DFA0A04FC94B}">
-              <ma14:wrappingTextBoxFlag xmlns:ma14="http://schemas.microsoft.com/office/mac/drawingml/2011/main" val="1"/>
+              <ma14:wrappingTextBoxFlag xmlns:ma14="http://schemas.microsoft.com/office/mac/drawingml/2011/main" xmlns:a14="http://schemas.microsoft.com/office/drawing/2010/main" xmlns:m="http://schemas.openxmlformats.org/officeDocument/2006/math" xmlns="" val="1"/>
             </a:ext>
           </a:extLst>
         </p:spPr>
@@ -3614,7 +3624,6 @@
             </a:lvl1pPr>
           </a:lstStyle>
           <a:p>
-            <a:pPr/>
             <a:r>
               <a:t>GoL configurations show high integrated information (Φ): local structures are correlated across the grid. This is a hallmark of complex, 'lifelike' systems.</a:t>
             </a:r>
@@ -3640,7 +3649,7 @@
           </a:ln>
           <a:extLst>
             <a:ext uri="{C572A759-6A51-4108-AA02-DFA0A04FC94B}">
-              <ma14:wrappingTextBoxFlag xmlns:ma14="http://schemas.microsoft.com/office/mac/drawingml/2011/main" val="1"/>
+              <ma14:wrappingTextBoxFlag xmlns:ma14="http://schemas.microsoft.com/office/mac/drawingml/2011/main" xmlns:a14="http://schemas.microsoft.com/office/drawing/2010/main" xmlns:m="http://schemas.openxmlformats.org/officeDocument/2006/math" xmlns="" val="1"/>
             </a:ext>
           </a:extLst>
         </p:spPr>
@@ -3650,7 +3659,7 @@
           </a:bodyPr>
           <a:lstStyle>
             <a:lvl1pPr>
-              <a:defRPr i="1" sz="900">
+              <a:defRPr sz="900" i="1">
                 <a:solidFill>
                   <a:srgbClr val="707070"/>
                 </a:solidFill>
@@ -3658,7 +3667,6 @@
             </a:lvl1pPr>
           </a:lstStyle>
           <a:p>
-            <a:pPr/>
             <a:r>
               <a:t>Ref: arxiv:2410.22389 — 'Conway's Game of Life as an Analogue to a Habitable World' (2024)</a:t>
             </a:r>
@@ -3670,18 +3678,19 @@
   <p:clrMapOvr>
     <a:masterClrMapping/>
   </p:clrMapOvr>
-  <p:transition xmlns:p14="http://schemas.microsoft.com/office/powerpoint/2010/main" spd="med" advClick="1"/>
+  <p:transition spd="med"/>
 </p:sld>
 </file>
 
 <file path=ppt/slides/slide12.xml><?xml version="1.0" encoding="utf-8"?>
-<p:sld xmlns:a="http://schemas.openxmlformats.org/drawingml/2006/main" xmlns:r="http://schemas.openxmlformats.org/officeDocument/2006/relationships" xmlns:p="http://schemas.openxmlformats.org/presentationml/2006/main" xmlns:m="http://schemas.openxmlformats.org/officeDocument/2006/math" xmlns:a14="http://schemas.microsoft.com/office/drawing/2010/main" showMasterSp="1" showMasterPhAnim="1">
+<p:sld xmlns:a="http://schemas.openxmlformats.org/drawingml/2006/main" xmlns:r="http://schemas.openxmlformats.org/officeDocument/2006/relationships" xmlns:p="http://schemas.openxmlformats.org/presentationml/2006/main">
   <p:cSld>
     <p:bg>
       <p:bgPr>
         <a:solidFill>
           <a:srgbClr val="111111"/>
         </a:solidFill>
+        <a:effectLst/>
       </p:bgPr>
     </p:bg>
     <p:spTree>
@@ -3723,7 +3732,7 @@
           <a:bodyPr lIns="45719" rIns="45719"/>
           <a:lstStyle/>
           <a:p>
-            <a:pPr/>
+            <a:endParaRPr/>
           </a:p>
         </p:txBody>
       </p:sp>
@@ -3746,7 +3755,7 @@
           </a:ln>
           <a:extLst>
             <a:ext uri="{C572A759-6A51-4108-AA02-DFA0A04FC94B}">
-              <ma14:wrappingTextBoxFlag xmlns:ma14="http://schemas.microsoft.com/office/mac/drawingml/2011/main" val="1"/>
+              <ma14:wrappingTextBoxFlag xmlns:ma14="http://schemas.microsoft.com/office/mac/drawingml/2011/main" xmlns:a14="http://schemas.microsoft.com/office/drawing/2010/main" xmlns:m="http://schemas.openxmlformats.org/officeDocument/2006/math" xmlns="" val="1"/>
             </a:ext>
           </a:extLst>
         </p:spPr>
@@ -3756,7 +3765,7 @@
           </a:bodyPr>
           <a:lstStyle>
             <a:lvl1pPr>
-              <a:defRPr b="1" sz="3600">
+              <a:defRPr sz="3600" b="1">
                 <a:solidFill>
                   <a:srgbClr val="FFFFFF"/>
                 </a:solidFill>
@@ -3768,7 +3777,6 @@
             </a:lvl1pPr>
           </a:lstStyle>
           <a:p>
-            <a:pPr/>
             <a:r>
               <a:t>Part II: Implementation</a:t>
             </a:r>
@@ -3794,7 +3802,7 @@
           </a:ln>
           <a:extLst>
             <a:ext uri="{C572A759-6A51-4108-AA02-DFA0A04FC94B}">
-              <ma14:wrappingTextBoxFlag xmlns:ma14="http://schemas.microsoft.com/office/mac/drawingml/2011/main" val="1"/>
+              <ma14:wrappingTextBoxFlag xmlns:ma14="http://schemas.microsoft.com/office/mac/drawingml/2011/main" xmlns:a14="http://schemas.microsoft.com/office/drawing/2010/main" xmlns:m="http://schemas.openxmlformats.org/officeDocument/2006/math" xmlns="" val="1"/>
             </a:ext>
           </a:extLst>
         </p:spPr>
@@ -3812,7 +3820,6 @@
             </a:lvl1pPr>
           </a:lstStyle>
           <a:p>
-            <a:pPr/>
             <a:r>
               <a:t>NumPy-vectorized entropy computations for your notebooks</a:t>
             </a:r>
@@ -3824,18 +3831,19 @@
   <p:clrMapOvr>
     <a:masterClrMapping/>
   </p:clrMapOvr>
-  <p:transition xmlns:p14="http://schemas.microsoft.com/office/powerpoint/2010/main" spd="med" advClick="1"/>
+  <p:transition spd="med"/>
 </p:sld>
 </file>
 
 <file path=ppt/slides/slide13.xml><?xml version="1.0" encoding="utf-8"?>
-<p:sld xmlns:a="http://schemas.openxmlformats.org/drawingml/2006/main" xmlns:r="http://schemas.openxmlformats.org/officeDocument/2006/relationships" xmlns:p="http://schemas.openxmlformats.org/presentationml/2006/main" xmlns:m="http://schemas.openxmlformats.org/officeDocument/2006/math" xmlns:a14="http://schemas.microsoft.com/office/drawing/2010/main" showMasterSp="1" showMasterPhAnim="1">
+<p:sld xmlns:a="http://schemas.openxmlformats.org/drawingml/2006/main" xmlns:r="http://schemas.openxmlformats.org/officeDocument/2006/relationships" xmlns:p="http://schemas.openxmlformats.org/presentationml/2006/main">
   <p:cSld>
     <p:bg>
       <p:bgPr>
         <a:solidFill>
           <a:srgbClr val="1A1A1A"/>
         </a:solidFill>
+        <a:effectLst/>
       </p:bgPr>
     </p:bg>
     <p:spTree>
@@ -3877,7 +3885,7 @@
           <a:bodyPr lIns="45719" rIns="45719"/>
           <a:lstStyle/>
           <a:p>
-            <a:pPr/>
+            <a:endParaRPr/>
           </a:p>
         </p:txBody>
       </p:sp>
@@ -3900,7 +3908,7 @@
           </a:ln>
           <a:extLst>
             <a:ext uri="{C572A759-6A51-4108-AA02-DFA0A04FC94B}">
-              <ma14:wrappingTextBoxFlag xmlns:ma14="http://schemas.microsoft.com/office/mac/drawingml/2011/main" val="1"/>
+              <ma14:wrappingTextBoxFlag xmlns:ma14="http://schemas.microsoft.com/office/mac/drawingml/2011/main" xmlns:a14="http://schemas.microsoft.com/office/drawing/2010/main" xmlns:m="http://schemas.openxmlformats.org/officeDocument/2006/math" xmlns="" val="1"/>
             </a:ext>
           </a:extLst>
         </p:spPr>
@@ -3918,7 +3926,6 @@
             </a:lvl1pPr>
           </a:lstStyle>
           <a:p>
-            <a:pPr/>
             <a:r>
               <a:t>From Conway to LangGraph  •  University of Bologna  •  Dept. of Physics</a:t>
             </a:r>
@@ -3944,7 +3951,7 @@
           </a:ln>
           <a:extLst>
             <a:ext uri="{C572A759-6A51-4108-AA02-DFA0A04FC94B}">
-              <ma14:wrappingTextBoxFlag xmlns:ma14="http://schemas.microsoft.com/office/mac/drawingml/2011/main" val="1"/>
+              <ma14:wrappingTextBoxFlag xmlns:ma14="http://schemas.microsoft.com/office/mac/drawingml/2011/main" xmlns:a14="http://schemas.microsoft.com/office/drawing/2010/main" xmlns:m="http://schemas.openxmlformats.org/officeDocument/2006/math" xmlns="" val="1"/>
             </a:ext>
           </a:extLst>
         </p:spPr>
@@ -3954,7 +3961,7 @@
           </a:bodyPr>
           <a:lstStyle>
             <a:lvl1pPr>
-              <a:defRPr b="1" sz="2800">
+              <a:defRPr sz="2800" b="1">
                 <a:solidFill>
                   <a:srgbClr val="FFFFFF"/>
                 </a:solidFill>
@@ -3966,7 +3973,6 @@
             </a:lvl1pPr>
           </a:lstStyle>
           <a:p>
-            <a:pPr/>
             <a:r>
               <a:t>GoL Engine (Recap)</a:t>
             </a:r>
@@ -3992,7 +3998,7 @@
           </a:ln>
           <a:extLst>
             <a:ext uri="{C572A759-6A51-4108-AA02-DFA0A04FC94B}">
-              <ma14:wrappingTextBoxFlag xmlns:ma14="http://schemas.microsoft.com/office/mac/drawingml/2011/main" val="1"/>
+              <ma14:wrappingTextBoxFlag xmlns:ma14="http://schemas.microsoft.com/office/mac/drawingml/2011/main" xmlns:a14="http://schemas.microsoft.com/office/drawing/2010/main" xmlns:m="http://schemas.openxmlformats.org/officeDocument/2006/math" xmlns="" val="1"/>
             </a:ext>
           </a:extLst>
         </p:spPr>
@@ -4002,7 +4008,7 @@
           </a:bodyPr>
           <a:lstStyle>
             <a:lvl1pPr>
-              <a:defRPr i="1" sz="1200">
+              <a:defRPr sz="1200" i="1">
                 <a:solidFill>
                   <a:srgbClr val="707070"/>
                 </a:solidFill>
@@ -4010,7 +4016,6 @@
             </a:lvl1pPr>
           </a:lstStyle>
           <a:p>
-            <a:pPr/>
             <a:r>
               <a:t>Convolution-based update — fully vectorized</a:t>
             </a:r>
@@ -4044,7 +4049,7 @@
           <a:bodyPr lIns="45719" rIns="45719"/>
           <a:lstStyle/>
           <a:p>
-            <a:pPr/>
+            <a:endParaRPr/>
           </a:p>
         </p:txBody>
       </p:sp>
@@ -4067,7 +4072,7 @@
           </a:ln>
           <a:extLst>
             <a:ext uri="{C572A759-6A51-4108-AA02-DFA0A04FC94B}">
-              <ma14:wrappingTextBoxFlag xmlns:ma14="http://schemas.microsoft.com/office/mac/drawingml/2011/main" val="1"/>
+              <ma14:wrappingTextBoxFlag xmlns:ma14="http://schemas.microsoft.com/office/mac/drawingml/2011/main" xmlns:a14="http://schemas.microsoft.com/office/drawing/2010/main" xmlns:m="http://schemas.openxmlformats.org/officeDocument/2006/math" xmlns="" val="1"/>
             </a:ext>
           </a:extLst>
         </p:spPr>
@@ -4112,6 +4117,7 @@
             <a:pPr>
               <a:defRPr sz="1100"/>
             </a:pPr>
+            <a:endParaRPr/>
           </a:p>
           <a:p>
             <a:pPr>
@@ -4165,6 +4171,7 @@
             <a:pPr>
               <a:defRPr sz="1100"/>
             </a:pPr>
+            <a:endParaRPr/>
           </a:p>
           <a:p>
             <a:pPr>
@@ -4266,6 +4273,7 @@
             <a:pPr>
               <a:defRPr sz="1100"/>
             </a:pPr>
+            <a:endParaRPr/>
           </a:p>
           <a:p>
             <a:pPr>
@@ -4406,7 +4414,7 @@
           <a:bodyPr lIns="45719" rIns="45719"/>
           <a:lstStyle/>
           <a:p>
-            <a:pPr/>
+            <a:endParaRPr/>
           </a:p>
         </p:txBody>
       </p:sp>
@@ -4429,7 +4437,7 @@
           </a:ln>
           <a:extLst>
             <a:ext uri="{C572A759-6A51-4108-AA02-DFA0A04FC94B}">
-              <ma14:wrappingTextBoxFlag xmlns:ma14="http://schemas.microsoft.com/office/mac/drawingml/2011/main" val="1"/>
+              <ma14:wrappingTextBoxFlag xmlns:ma14="http://schemas.microsoft.com/office/mac/drawingml/2011/main" xmlns:a14="http://schemas.microsoft.com/office/drawing/2010/main" xmlns:m="http://schemas.openxmlformats.org/officeDocument/2006/math" xmlns="" val="1"/>
             </a:ext>
           </a:extLst>
         </p:spPr>
@@ -4439,7 +4447,7 @@
           </a:bodyPr>
           <a:lstStyle>
             <a:lvl1pPr>
-              <a:defRPr b="1" sz="1400">
+              <a:defRPr sz="1400" b="1">
                 <a:solidFill>
                   <a:srgbClr val="4A9ECC"/>
                 </a:solidFill>
@@ -4451,7 +4459,6 @@
             </a:lvl1pPr>
           </a:lstStyle>
           <a:p>
-            <a:pPr/>
             <a:r>
               <a:t>Notes</a:t>
             </a:r>
@@ -4477,7 +4484,7 @@
           </a:ln>
           <a:extLst>
             <a:ext uri="{C572A759-6A51-4108-AA02-DFA0A04FC94B}">
-              <ma14:wrappingTextBoxFlag xmlns:ma14="http://schemas.microsoft.com/office/mac/drawingml/2011/main" val="1"/>
+              <ma14:wrappingTextBoxFlag xmlns:ma14="http://schemas.microsoft.com/office/mac/drawingml/2011/main" xmlns:a14="http://schemas.microsoft.com/office/drawing/2010/main" xmlns:m="http://schemas.openxmlformats.org/officeDocument/2006/math" xmlns="" val="1"/>
             </a:ext>
           </a:extLst>
         </p:spPr>
@@ -4502,6 +4509,7 @@
             <a:pPr>
               <a:defRPr sz="1100"/>
             </a:pPr>
+            <a:endParaRPr/>
           </a:p>
           <a:p>
             <a:pPr>
@@ -4531,6 +4539,7 @@
             <a:pPr>
               <a:defRPr sz="1100"/>
             </a:pPr>
+            <a:endParaRPr/>
           </a:p>
           <a:p>
             <a:pPr>
@@ -4560,6 +4569,7 @@
             <a:pPr>
               <a:defRPr sz="1100"/>
             </a:pPr>
+            <a:endParaRPr/>
           </a:p>
           <a:p>
             <a:pPr>
@@ -4601,6 +4611,7 @@
             <a:pPr>
               <a:defRPr sz="1100"/>
             </a:pPr>
+            <a:endParaRPr/>
           </a:p>
           <a:p>
             <a:pPr>
@@ -4633,18 +4644,19 @@
   <p:clrMapOvr>
     <a:masterClrMapping/>
   </p:clrMapOvr>
-  <p:transition xmlns:p14="http://schemas.microsoft.com/office/powerpoint/2010/main" spd="med" advClick="1"/>
+  <p:transition spd="med"/>
 </p:sld>
 </file>
 
 <file path=ppt/slides/slide14.xml><?xml version="1.0" encoding="utf-8"?>
-<p:sld xmlns:a="http://schemas.openxmlformats.org/drawingml/2006/main" xmlns:r="http://schemas.openxmlformats.org/officeDocument/2006/relationships" xmlns:p="http://schemas.openxmlformats.org/presentationml/2006/main" xmlns:m="http://schemas.openxmlformats.org/officeDocument/2006/math" xmlns:a14="http://schemas.microsoft.com/office/drawing/2010/main" showMasterSp="1" showMasterPhAnim="1">
+<p:sld xmlns:a="http://schemas.openxmlformats.org/drawingml/2006/main" xmlns:r="http://schemas.openxmlformats.org/officeDocument/2006/relationships" xmlns:p="http://schemas.openxmlformats.org/presentationml/2006/main">
   <p:cSld>
     <p:bg>
       <p:bgPr>
         <a:solidFill>
           <a:srgbClr val="1A1A1A"/>
         </a:solidFill>
+        <a:effectLst/>
       </p:bgPr>
     </p:bg>
     <p:spTree>
@@ -4686,7 +4698,7 @@
           <a:bodyPr lIns="45719" rIns="45719"/>
           <a:lstStyle/>
           <a:p>
-            <a:pPr/>
+            <a:endParaRPr/>
           </a:p>
         </p:txBody>
       </p:sp>
@@ -4709,7 +4721,7 @@
           </a:ln>
           <a:extLst>
             <a:ext uri="{C572A759-6A51-4108-AA02-DFA0A04FC94B}">
-              <ma14:wrappingTextBoxFlag xmlns:ma14="http://schemas.microsoft.com/office/mac/drawingml/2011/main" val="1"/>
+              <ma14:wrappingTextBoxFlag xmlns:ma14="http://schemas.microsoft.com/office/mac/drawingml/2011/main" xmlns:a14="http://schemas.microsoft.com/office/drawing/2010/main" xmlns:m="http://schemas.openxmlformats.org/officeDocument/2006/math" xmlns="" val="1"/>
             </a:ext>
           </a:extLst>
         </p:spPr>
@@ -4727,7 +4739,6 @@
             </a:lvl1pPr>
           </a:lstStyle>
           <a:p>
-            <a:pPr/>
             <a:r>
               <a:t>From Conway to LangGraph  •  University of Bologna  •  Dept. of Physics</a:t>
             </a:r>
@@ -4753,7 +4764,7 @@
           </a:ln>
           <a:extLst>
             <a:ext uri="{C572A759-6A51-4108-AA02-DFA0A04FC94B}">
-              <ma14:wrappingTextBoxFlag xmlns:ma14="http://schemas.microsoft.com/office/mac/drawingml/2011/main" val="1"/>
+              <ma14:wrappingTextBoxFlag xmlns:ma14="http://schemas.microsoft.com/office/mac/drawingml/2011/main" xmlns:a14="http://schemas.microsoft.com/office/drawing/2010/main" xmlns:m="http://schemas.openxmlformats.org/officeDocument/2006/math" xmlns="" val="1"/>
             </a:ext>
           </a:extLst>
         </p:spPr>
@@ -4763,7 +4774,7 @@
           </a:bodyPr>
           <a:lstStyle>
             <a:lvl1pPr>
-              <a:defRPr b="1" sz="2800">
+              <a:defRPr sz="2800" b="1">
                 <a:solidFill>
                   <a:srgbClr val="FFFFFF"/>
                 </a:solidFill>
@@ -4775,7 +4786,6 @@
             </a:lvl1pPr>
           </a:lstStyle>
           <a:p>
-            <a:pPr/>
             <a:r>
               <a:t>Implementing Density Entropy</a:t>
             </a:r>
@@ -4809,7 +4819,7 @@
           <a:bodyPr lIns="45719" rIns="45719"/>
           <a:lstStyle/>
           <a:p>
-            <a:pPr/>
+            <a:endParaRPr/>
           </a:p>
         </p:txBody>
       </p:sp>
@@ -4832,7 +4842,7 @@
           </a:ln>
           <a:extLst>
             <a:ext uri="{C572A759-6A51-4108-AA02-DFA0A04FC94B}">
-              <ma14:wrappingTextBoxFlag xmlns:ma14="http://schemas.microsoft.com/office/mac/drawingml/2011/main" val="1"/>
+              <ma14:wrappingTextBoxFlag xmlns:ma14="http://schemas.microsoft.com/office/mac/drawingml/2011/main" xmlns:a14="http://schemas.microsoft.com/office/drawing/2010/main" xmlns:m="http://schemas.openxmlformats.org/officeDocument/2006/math" xmlns="" val="1"/>
             </a:ext>
           </a:extLst>
         </p:spPr>
@@ -4941,6 +4951,7 @@
             <a:pPr>
               <a:defRPr sz="1000"/>
             </a:pPr>
+            <a:endParaRPr/>
           </a:p>
           <a:p>
             <a:pPr>
@@ -4994,6 +5005,7 @@
             <a:pPr>
               <a:defRPr sz="1000"/>
             </a:pPr>
+            <a:endParaRPr/>
           </a:p>
           <a:p>
             <a:pPr>
@@ -5063,6 +5075,7 @@
             <a:pPr>
               <a:defRPr sz="1000"/>
             </a:pPr>
+            <a:endParaRPr/>
           </a:p>
           <a:p>
             <a:pPr>
@@ -5235,7 +5248,7 @@
           <a:bodyPr lIns="45719" rIns="45719"/>
           <a:lstStyle/>
           <a:p>
-            <a:pPr/>
+            <a:endParaRPr/>
           </a:p>
         </p:txBody>
       </p:sp>
@@ -5258,7 +5271,7 @@
           </a:ln>
           <a:extLst>
             <a:ext uri="{C572A759-6A51-4108-AA02-DFA0A04FC94B}">
-              <ma14:wrappingTextBoxFlag xmlns:ma14="http://schemas.microsoft.com/office/mac/drawingml/2011/main" val="1"/>
+              <ma14:wrappingTextBoxFlag xmlns:ma14="http://schemas.microsoft.com/office/mac/drawingml/2011/main" xmlns:a14="http://schemas.microsoft.com/office/drawing/2010/main" xmlns:m="http://schemas.openxmlformats.org/officeDocument/2006/math" xmlns="" val="1"/>
             </a:ext>
           </a:extLst>
         </p:spPr>
@@ -5268,7 +5281,7 @@
           </a:bodyPr>
           <a:lstStyle>
             <a:lvl1pPr>
-              <a:defRPr b="1" sz="1400">
+              <a:defRPr sz="1400" b="1">
                 <a:solidFill>
                   <a:srgbClr val="E8B931"/>
                 </a:solidFill>
@@ -5280,7 +5293,6 @@
             </a:lvl1pPr>
           </a:lstStyle>
           <a:p>
-            <a:pPr/>
             <a:r>
               <a:t>Expected Output</a:t>
             </a:r>
@@ -5296,7 +5308,7 @@
         <p:spPr>
           <a:xfrm>
             <a:off x="6492240" y="1508760"/>
-            <a:ext cx="2103121" cy="2387601"/>
+            <a:ext cx="2103121" cy="2616101"/>
           </a:xfrm>
           <a:prstGeom prst="rect">
             <a:avLst/>
@@ -5306,7 +5318,7 @@
           </a:ln>
           <a:extLst>
             <a:ext uri="{C572A759-6A51-4108-AA02-DFA0A04FC94B}">
-              <ma14:wrappingTextBoxFlag xmlns:ma14="http://schemas.microsoft.com/office/mac/drawingml/2011/main" val="1"/>
+              <ma14:wrappingTextBoxFlag xmlns:ma14="http://schemas.microsoft.com/office/mac/drawingml/2011/main" xmlns:a14="http://schemas.microsoft.com/office/drawing/2010/main" xmlns:m="http://schemas.openxmlformats.org/officeDocument/2006/math" xmlns="" val="1"/>
             </a:ext>
           </a:extLst>
         </p:spPr>
@@ -5328,6 +5340,7 @@
               </a:defRPr>
             </a:pPr>
             <a:r>
+              <a:rPr dirty="0"/>
               <a:t>Characteristic curve:</a:t>
             </a:r>
           </a:p>
@@ -5335,6 +5348,7 @@
             <a:pPr>
               <a:defRPr sz="1000"/>
             </a:pPr>
+            <a:endParaRPr dirty="0"/>
           </a:p>
           <a:p>
             <a:pPr>
@@ -5349,6 +5363,7 @@
               </a:defRPr>
             </a:pPr>
             <a:r>
+              <a:rPr dirty="0"/>
               <a:t>┌─────────────────┐</a:t>
             </a:r>
           </a:p>
@@ -5365,8 +5380,10 @@
               </a:defRPr>
             </a:pPr>
             <a:r>
-              <a:t>│ 1.0 ┐            │</a:t>
-            </a:r>
+              <a:rPr dirty="0"/>
+              <a:t>│ 1.0 </a:t>
+            </a:r>
+            <a:endParaRPr lang="it-IT" dirty="0"/>
           </a:p>
           <a:p>
             <a:pPr>
@@ -5380,9 +5397,7 @@
                 <a:sym typeface="Consolas"/>
               </a:defRPr>
             </a:pPr>
-            <a:r>
-              <a:t>│     └╲           │</a:t>
-            </a:r>
+            <a:endParaRPr lang="it-IT" dirty="0"/>
           </a:p>
           <a:p>
             <a:pPr>
@@ -5396,9 +5411,7 @@
                 <a:sym typeface="Consolas"/>
               </a:defRPr>
             </a:pPr>
-            <a:r>
-              <a:t>│       ╲          │</a:t>
-            </a:r>
+            <a:endParaRPr lang="it-IT" dirty="0"/>
           </a:p>
           <a:p>
             <a:pPr>
@@ -5413,7 +5426,12 @@
               </a:defRPr>
             </a:pPr>
             <a:r>
-              <a:t>│        ╲         │</a:t>
+              <a:rPr lang="it-IT" dirty="0" err="1"/>
+              <a:t>Exercise</a:t>
+            </a:r>
+            <a:r>
+              <a:rPr lang="it-IT" dirty="0"/>
+              <a:t>------</a:t>
             </a:r>
           </a:p>
           <a:p>
@@ -5428,9 +5446,7 @@
                 <a:sym typeface="Consolas"/>
               </a:defRPr>
             </a:pPr>
-            <a:r>
-              <a:t>│         ╲────── │</a:t>
-            </a:r>
+            <a:endParaRPr lang="it-IT" dirty="0"/>
           </a:p>
           <a:p>
             <a:pPr>
@@ -5445,6 +5461,24 @@
               </a:defRPr>
             </a:pPr>
             <a:r>
+              <a:rPr dirty="0"/>
+              <a:t>│</a:t>
+            </a:r>
+          </a:p>
+          <a:p>
+            <a:pPr>
+              <a:defRPr sz="1000">
+                <a:solidFill>
+                  <a:srgbClr val="A0A0A0"/>
+                </a:solidFill>
+                <a:latin typeface="Consolas"/>
+                <a:ea typeface="Consolas"/>
+                <a:cs typeface="Consolas"/>
+                <a:sym typeface="Consolas"/>
+              </a:defRPr>
+            </a:pPr>
+            <a:r>
+              <a:rPr dirty="0"/>
               <a:t>│ 0.2              │</a:t>
             </a:r>
           </a:p>
@@ -5461,6 +5495,7 @@
               </a:defRPr>
             </a:pPr>
             <a:r>
+              <a:rPr dirty="0"/>
               <a:t>└─────────────────┘</a:t>
             </a:r>
           </a:p>
@@ -5477,6 +5512,7 @@
               </a:defRPr>
             </a:pPr>
             <a:r>
+              <a:rPr dirty="0"/>
               <a:t>  0     t →    500</a:t>
             </a:r>
           </a:p>
@@ -5484,6 +5520,7 @@
             <a:pPr>
               <a:defRPr sz="1000"/>
             </a:pPr>
+            <a:endParaRPr dirty="0"/>
           </a:p>
           <a:p>
             <a:pPr>
@@ -5498,6 +5535,7 @@
               </a:defRPr>
             </a:pPr>
             <a:r>
+              <a:rPr dirty="0"/>
               <a:t>Sharp drop in first</a:t>
             </a:r>
           </a:p>
@@ -5514,6 +5552,7 @@
               </a:defRPr>
             </a:pPr>
             <a:r>
+              <a:rPr dirty="0"/>
               <a:t>~50 generations, then</a:t>
             </a:r>
           </a:p>
@@ -5530,6 +5569,7 @@
               </a:defRPr>
             </a:pPr>
             <a:r>
+              <a:rPr dirty="0"/>
               <a:t>slow convergence to</a:t>
             </a:r>
           </a:p>
@@ -5546,7 +5586,12 @@
               </a:defRPr>
             </a:pPr>
             <a:r>
-              <a:t>H_eq ≈ 0.20 bits</a:t>
+              <a:rPr dirty="0" err="1"/>
+              <a:t>H_eq</a:t>
+            </a:r>
+            <a:r>
+              <a:rPr dirty="0"/>
+              <a:t> ≈ 0.20 bits</a:t>
             </a:r>
           </a:p>
         </p:txBody>
@@ -5556,18 +5601,19 @@
   <p:clrMapOvr>
     <a:masterClrMapping/>
   </p:clrMapOvr>
-  <p:transition xmlns:p14="http://schemas.microsoft.com/office/powerpoint/2010/main" spd="med" advClick="1"/>
+  <p:transition spd="med"/>
 </p:sld>
 </file>
 
 <file path=ppt/slides/slide15.xml><?xml version="1.0" encoding="utf-8"?>
-<p:sld xmlns:a="http://schemas.openxmlformats.org/drawingml/2006/main" xmlns:r="http://schemas.openxmlformats.org/officeDocument/2006/relationships" xmlns:p="http://schemas.openxmlformats.org/presentationml/2006/main" xmlns:m="http://schemas.openxmlformats.org/officeDocument/2006/math" xmlns:a14="http://schemas.microsoft.com/office/drawing/2010/main" showMasterSp="1" showMasterPhAnim="1">
+<p:sld xmlns:a="http://schemas.openxmlformats.org/drawingml/2006/main" xmlns:r="http://schemas.openxmlformats.org/officeDocument/2006/relationships" xmlns:p="http://schemas.openxmlformats.org/presentationml/2006/main">
   <p:cSld>
     <p:bg>
       <p:bgPr>
         <a:solidFill>
           <a:srgbClr val="1A1A1A"/>
         </a:solidFill>
+        <a:effectLst/>
       </p:bgPr>
     </p:bg>
     <p:spTree>
@@ -5609,7 +5655,7 @@
           <a:bodyPr lIns="45719" rIns="45719"/>
           <a:lstStyle/>
           <a:p>
-            <a:pPr/>
+            <a:endParaRPr/>
           </a:p>
         </p:txBody>
       </p:sp>
@@ -5632,7 +5678,7 @@
           </a:ln>
           <a:extLst>
             <a:ext uri="{C572A759-6A51-4108-AA02-DFA0A04FC94B}">
-              <ma14:wrappingTextBoxFlag xmlns:ma14="http://schemas.microsoft.com/office/mac/drawingml/2011/main" val="1"/>
+              <ma14:wrappingTextBoxFlag xmlns:ma14="http://schemas.microsoft.com/office/mac/drawingml/2011/main" xmlns:a14="http://schemas.microsoft.com/office/drawing/2010/main" xmlns:m="http://schemas.openxmlformats.org/officeDocument/2006/math" xmlns="" val="1"/>
             </a:ext>
           </a:extLst>
         </p:spPr>
@@ -5650,7 +5696,6 @@
             </a:lvl1pPr>
           </a:lstStyle>
           <a:p>
-            <a:pPr/>
             <a:r>
               <a:t>From Conway to LangGraph  •  University of Bologna  •  Dept. of Physics</a:t>
             </a:r>
@@ -5676,7 +5721,7 @@
           </a:ln>
           <a:extLst>
             <a:ext uri="{C572A759-6A51-4108-AA02-DFA0A04FC94B}">
-              <ma14:wrappingTextBoxFlag xmlns:ma14="http://schemas.microsoft.com/office/mac/drawingml/2011/main" val="1"/>
+              <ma14:wrappingTextBoxFlag xmlns:ma14="http://schemas.microsoft.com/office/mac/drawingml/2011/main" xmlns:a14="http://schemas.microsoft.com/office/drawing/2010/main" xmlns:m="http://schemas.openxmlformats.org/officeDocument/2006/math" xmlns="" val="1"/>
             </a:ext>
           </a:extLst>
         </p:spPr>
@@ -5686,7 +5731,7 @@
           </a:bodyPr>
           <a:lstStyle>
             <a:lvl1pPr>
-              <a:defRPr b="1" sz="2800">
+              <a:defRPr sz="2800" b="1">
                 <a:solidFill>
                   <a:srgbClr val="FFFFFF"/>
                 </a:solidFill>
@@ -5698,7 +5743,6 @@
             </a:lvl1pPr>
           </a:lstStyle>
           <a:p>
-            <a:pPr/>
             <a:r>
               <a:t>Implementing 2D Block Entropy</a:t>
             </a:r>
@@ -5732,7 +5776,7 @@
           <a:bodyPr lIns="45719" rIns="45719"/>
           <a:lstStyle/>
           <a:p>
-            <a:pPr/>
+            <a:endParaRPr/>
           </a:p>
         </p:txBody>
       </p:sp>
@@ -5755,7 +5799,7 @@
           </a:ln>
           <a:extLst>
             <a:ext uri="{C572A759-6A51-4108-AA02-DFA0A04FC94B}">
-              <ma14:wrappingTextBoxFlag xmlns:ma14="http://schemas.microsoft.com/office/mac/drawingml/2011/main" val="1"/>
+              <ma14:wrappingTextBoxFlag xmlns:ma14="http://schemas.microsoft.com/office/mac/drawingml/2011/main" xmlns:a14="http://schemas.microsoft.com/office/drawing/2010/main" xmlns:m="http://schemas.openxmlformats.org/officeDocument/2006/math" xmlns="" val="1"/>
             </a:ext>
           </a:extLst>
         </p:spPr>
@@ -6040,6 +6084,7 @@
             <a:pPr>
               <a:defRPr sz="1000"/>
             </a:pPr>
+            <a:endParaRPr/>
           </a:p>
           <a:p>
             <a:pPr>
@@ -6148,7 +6193,7 @@
           <a:bodyPr lIns="45719" rIns="45719"/>
           <a:lstStyle/>
           <a:p>
-            <a:pPr/>
+            <a:endParaRPr/>
           </a:p>
         </p:txBody>
       </p:sp>
@@ -6171,7 +6216,7 @@
           </a:ln>
           <a:extLst>
             <a:ext uri="{C572A759-6A51-4108-AA02-DFA0A04FC94B}">
-              <ma14:wrappingTextBoxFlag xmlns:ma14="http://schemas.microsoft.com/office/mac/drawingml/2011/main" val="1"/>
+              <ma14:wrappingTextBoxFlag xmlns:ma14="http://schemas.microsoft.com/office/mac/drawingml/2011/main" xmlns:a14="http://schemas.microsoft.com/office/drawing/2010/main" xmlns:m="http://schemas.openxmlformats.org/officeDocument/2006/math" xmlns="" val="1"/>
             </a:ext>
           </a:extLst>
         </p:spPr>
@@ -6181,7 +6226,7 @@
           </a:bodyPr>
           <a:lstStyle>
             <a:lvl1pPr>
-              <a:defRPr b="1" sz="1300">
+              <a:defRPr sz="1300" b="1">
                 <a:solidFill>
                   <a:srgbClr val="44AA66"/>
                 </a:solidFill>
@@ -6193,7 +6238,6 @@
             </a:lvl1pPr>
           </a:lstStyle>
           <a:p>
-            <a:pPr/>
             <a:r>
               <a:t>Key Insight</a:t>
             </a:r>
@@ -6209,7 +6253,7 @@
         <p:spPr>
           <a:xfrm>
             <a:off x="6812280" y="1417319"/>
-            <a:ext cx="1828801" cy="2571107"/>
+            <a:ext cx="1828801" cy="2154436"/>
           </a:xfrm>
           <a:prstGeom prst="rect">
             <a:avLst/>
@@ -6219,7 +6263,7 @@
           </a:ln>
           <a:extLst>
             <a:ext uri="{C572A759-6A51-4108-AA02-DFA0A04FC94B}">
-              <ma14:wrappingTextBoxFlag xmlns:ma14="http://schemas.microsoft.com/office/mac/drawingml/2011/main" val="1"/>
+              <ma14:wrappingTextBoxFlag xmlns:ma14="http://schemas.microsoft.com/office/mac/drawingml/2011/main" xmlns:a14="http://schemas.microsoft.com/office/drawing/2010/main" xmlns:m="http://schemas.openxmlformats.org/officeDocument/2006/math" xmlns="" val="1"/>
             </a:ext>
           </a:extLst>
         </p:spPr>
@@ -6237,8 +6281,14 @@
               </a:defRPr>
             </a:pPr>
             <a:r>
-              <a:t>The stride_tricks</a:t>
-            </a:r>
+              <a:rPr dirty="0"/>
+              <a:t>The </a:t>
+            </a:r>
+            <a:r>
+              <a:rPr dirty="0" err="1"/>
+              <a:t>stride_tricks</a:t>
+            </a:r>
+            <a:endParaRPr dirty="0"/>
           </a:p>
           <a:p>
             <a:pPr>
@@ -6249,6 +6299,7 @@
               </a:defRPr>
             </a:pPr>
             <a:r>
+              <a:rPr dirty="0"/>
               <a:t>approach avoids</a:t>
             </a:r>
           </a:p>
@@ -6261,6 +6312,7 @@
               </a:defRPr>
             </a:pPr>
             <a:r>
+              <a:rPr dirty="0"/>
               <a:t>explicit loops —</a:t>
             </a:r>
           </a:p>
@@ -6273,6 +6325,7 @@
               </a:defRPr>
             </a:pPr>
             <a:r>
+              <a:rPr dirty="0"/>
               <a:t>crucial for large</a:t>
             </a:r>
           </a:p>
@@ -6285,6 +6338,7 @@
               </a:defRPr>
             </a:pPr>
             <a:r>
+              <a:rPr dirty="0"/>
               <a:t>grids.</a:t>
             </a:r>
           </a:p>
@@ -6292,6 +6346,7 @@
             <a:pPr>
               <a:defRPr sz="1000"/>
             </a:pPr>
+            <a:endParaRPr dirty="0"/>
           </a:p>
           <a:p>
             <a:pPr>
@@ -6302,6 +6357,7 @@
               </a:defRPr>
             </a:pPr>
             <a:r>
+              <a:rPr dirty="0"/>
               <a:t>Binary encoding</a:t>
             </a:r>
           </a:p>
@@ -6314,6 +6370,7 @@
               </a:defRPr>
             </a:pPr>
             <a:r>
+              <a:rPr dirty="0"/>
               <a:t>(base-2 → integer)</a:t>
             </a:r>
           </a:p>
@@ -6326,6 +6383,7 @@
               </a:defRPr>
             </a:pPr>
             <a:r>
+              <a:rPr dirty="0"/>
               <a:t>makes hashing</a:t>
             </a:r>
           </a:p>
@@ -6338,13 +6396,29 @@
               </a:defRPr>
             </a:pPr>
             <a:r>
-              <a:t>O(1) via bincount.</a:t>
+              <a:rPr dirty="0"/>
+              <a:t>O(1) via </a:t>
+            </a:r>
+            <a:r>
+              <a:rPr dirty="0" err="1"/>
+              <a:t>bincount</a:t>
+            </a:r>
+            <a:r>
+              <a:rPr dirty="0"/>
+              <a:t>.</a:t>
             </a:r>
           </a:p>
           <a:p>
             <a:pPr>
               <a:defRPr sz="1000"/>
             </a:pPr>
+            <a:endParaRPr dirty="0"/>
+          </a:p>
+          <a:p>
+            <a:pPr>
+              <a:defRPr sz="1000"/>
+            </a:pPr>
+            <a:endParaRPr dirty="0"/>
           </a:p>
           <a:p>
             <a:pPr>
@@ -6355,7 +6429,8 @@
               </a:defRPr>
             </a:pPr>
             <a:r>
-              <a:t>Expected output:</a:t>
+              <a:rPr dirty="0"/>
+              <a:t>Larger blocks capture</a:t>
             </a:r>
           </a:p>
           <a:p>
@@ -6367,59 +6442,7 @@
               </a:defRPr>
             </a:pPr>
             <a:r>
-              <a:t>k=2: ~4.0 → ~2.1</a:t>
-            </a:r>
-          </a:p>
-          <a:p>
-            <a:pPr>
-              <a:defRPr sz="1000">
-                <a:solidFill>
-                  <a:srgbClr val="A0A0A0"/>
-                </a:solidFill>
-              </a:defRPr>
-            </a:pPr>
-            <a:r>
-              <a:t>k=3: ~9.0 → ~3.5</a:t>
-            </a:r>
-          </a:p>
-          <a:p>
-            <a:pPr>
-              <a:defRPr sz="1000">
-                <a:solidFill>
-                  <a:srgbClr val="A0A0A0"/>
-                </a:solidFill>
-              </a:defRPr>
-            </a:pPr>
-            <a:r>
-              <a:t>k=4: ~16  → ~5.2</a:t>
-            </a:r>
-          </a:p>
-          <a:p>
-            <a:pPr>
-              <a:defRPr sz="1000"/>
-            </a:pPr>
-          </a:p>
-          <a:p>
-            <a:pPr>
-              <a:defRPr sz="1000">
-                <a:solidFill>
-                  <a:srgbClr val="A0A0A0"/>
-                </a:solidFill>
-              </a:defRPr>
-            </a:pPr>
-            <a:r>
-              <a:t>Larger blocks capture</a:t>
-            </a:r>
-          </a:p>
-          <a:p>
-            <a:pPr>
-              <a:defRPr sz="1000">
-                <a:solidFill>
-                  <a:srgbClr val="A0A0A0"/>
-                </a:solidFill>
-              </a:defRPr>
-            </a:pPr>
-            <a:r>
+              <a:rPr dirty="0"/>
               <a:t>more spatial structure.</a:t>
             </a:r>
           </a:p>
@@ -6430,18 +6453,19 @@
   <p:clrMapOvr>
     <a:masterClrMapping/>
   </p:clrMapOvr>
-  <p:transition xmlns:p14="http://schemas.microsoft.com/office/powerpoint/2010/main" spd="med" advClick="1"/>
+  <p:transition spd="med"/>
 </p:sld>
 </file>
 
 <file path=ppt/slides/slide16.xml><?xml version="1.0" encoding="utf-8"?>
-<p:sld xmlns:a="http://schemas.openxmlformats.org/drawingml/2006/main" xmlns:r="http://schemas.openxmlformats.org/officeDocument/2006/relationships" xmlns:p="http://schemas.openxmlformats.org/presentationml/2006/main" xmlns:m="http://schemas.openxmlformats.org/officeDocument/2006/math" xmlns:a14="http://schemas.microsoft.com/office/drawing/2010/main" showMasterSp="1" showMasterPhAnim="1">
+<p:sld xmlns:a="http://schemas.openxmlformats.org/drawingml/2006/main" xmlns:r="http://schemas.openxmlformats.org/officeDocument/2006/relationships" xmlns:p="http://schemas.openxmlformats.org/presentationml/2006/main">
   <p:cSld>
     <p:bg>
       <p:bgPr>
         <a:solidFill>
           <a:srgbClr val="1A1A1A"/>
         </a:solidFill>
+        <a:effectLst/>
       </p:bgPr>
     </p:bg>
     <p:spTree>
@@ -6483,7 +6507,7 @@
           <a:bodyPr lIns="45719" rIns="45719"/>
           <a:lstStyle/>
           <a:p>
-            <a:pPr/>
+            <a:endParaRPr/>
           </a:p>
         </p:txBody>
       </p:sp>
@@ -6506,7 +6530,7 @@
           </a:ln>
           <a:extLst>
             <a:ext uri="{C572A759-6A51-4108-AA02-DFA0A04FC94B}">
-              <ma14:wrappingTextBoxFlag xmlns:ma14="http://schemas.microsoft.com/office/mac/drawingml/2011/main" val="1"/>
+              <ma14:wrappingTextBoxFlag xmlns:ma14="http://schemas.microsoft.com/office/mac/drawingml/2011/main" xmlns:a14="http://schemas.microsoft.com/office/drawing/2010/main" xmlns:m="http://schemas.openxmlformats.org/officeDocument/2006/math" xmlns="" val="1"/>
             </a:ext>
           </a:extLst>
         </p:spPr>
@@ -6524,7 +6548,6 @@
             </a:lvl1pPr>
           </a:lstStyle>
           <a:p>
-            <a:pPr/>
             <a:r>
               <a:t>From Conway to LangGraph  •  University of Bologna  •  Dept. of Physics</a:t>
             </a:r>
@@ -6550,7 +6573,7 @@
           </a:ln>
           <a:extLst>
             <a:ext uri="{C572A759-6A51-4108-AA02-DFA0A04FC94B}">
-              <ma14:wrappingTextBoxFlag xmlns:ma14="http://schemas.microsoft.com/office/mac/drawingml/2011/main" val="1"/>
+              <ma14:wrappingTextBoxFlag xmlns:ma14="http://schemas.microsoft.com/office/mac/drawingml/2011/main" xmlns:a14="http://schemas.microsoft.com/office/drawing/2010/main" xmlns:m="http://schemas.openxmlformats.org/officeDocument/2006/math" xmlns="" val="1"/>
             </a:ext>
           </a:extLst>
         </p:spPr>
@@ -6560,7 +6583,7 @@
           </a:bodyPr>
           <a:lstStyle>
             <a:lvl1pPr>
-              <a:defRPr b="1" sz="2800">
+              <a:defRPr sz="2800" b="1">
                 <a:solidFill>
                   <a:srgbClr val="FFFFFF"/>
                 </a:solidFill>
@@ -6572,7 +6595,6 @@
             </a:lvl1pPr>
           </a:lstStyle>
           <a:p>
-            <a:pPr/>
             <a:r>
               <a:t>Implementing Neighborhood Entropy</a:t>
             </a:r>
@@ -6606,7 +6628,7 @@
           <a:bodyPr lIns="45719" rIns="45719"/>
           <a:lstStyle/>
           <a:p>
-            <a:pPr/>
+            <a:endParaRPr/>
           </a:p>
         </p:txBody>
       </p:sp>
@@ -6629,7 +6651,7 @@
           </a:ln>
           <a:extLst>
             <a:ext uri="{C572A759-6A51-4108-AA02-DFA0A04FC94B}">
-              <ma14:wrappingTextBoxFlag xmlns:ma14="http://schemas.microsoft.com/office/mac/drawingml/2011/main" val="1"/>
+              <ma14:wrappingTextBoxFlag xmlns:ma14="http://schemas.microsoft.com/office/mac/drawingml/2011/main" xmlns:a14="http://schemas.microsoft.com/office/drawing/2010/main" xmlns:m="http://schemas.openxmlformats.org/officeDocument/2006/math" xmlns="" val="1"/>
             </a:ext>
           </a:extLst>
         </p:spPr>
@@ -7065,7 +7087,7 @@
           <a:bodyPr lIns="45719" rIns="45719"/>
           <a:lstStyle/>
           <a:p>
-            <a:pPr/>
+            <a:endParaRPr/>
           </a:p>
         </p:txBody>
       </p:sp>
@@ -7088,7 +7110,7 @@
           </a:ln>
           <a:extLst>
             <a:ext uri="{C572A759-6A51-4108-AA02-DFA0A04FC94B}">
-              <ma14:wrappingTextBoxFlag xmlns:ma14="http://schemas.microsoft.com/office/mac/drawingml/2011/main" val="1"/>
+              <ma14:wrappingTextBoxFlag xmlns:ma14="http://schemas.microsoft.com/office/mac/drawingml/2011/main" xmlns:a14="http://schemas.microsoft.com/office/drawing/2010/main" xmlns:m="http://schemas.openxmlformats.org/officeDocument/2006/math" xmlns="" val="1"/>
             </a:ext>
           </a:extLst>
         </p:spPr>
@@ -7099,7 +7121,7 @@
           <a:lstStyle/>
           <a:p>
             <a:pPr>
-              <a:defRPr b="1" sz="1000">
+              <a:defRPr sz="1000" b="1">
                 <a:solidFill>
                   <a:srgbClr val="4A9ECC"/>
                 </a:solidFill>
@@ -7124,18 +7146,19 @@
   <p:clrMapOvr>
     <a:masterClrMapping/>
   </p:clrMapOvr>
-  <p:transition xmlns:p14="http://schemas.microsoft.com/office/powerpoint/2010/main" spd="med" advClick="1"/>
+  <p:transition spd="med"/>
 </p:sld>
 </file>
 
 <file path=ppt/slides/slide17.xml><?xml version="1.0" encoding="utf-8"?>
-<p:sld xmlns:a="http://schemas.openxmlformats.org/drawingml/2006/main" xmlns:r="http://schemas.openxmlformats.org/officeDocument/2006/relationships" xmlns:p="http://schemas.openxmlformats.org/presentationml/2006/main" xmlns:m="http://schemas.openxmlformats.org/officeDocument/2006/math" xmlns:a14="http://schemas.microsoft.com/office/drawing/2010/main" showMasterSp="1" showMasterPhAnim="1">
+<p:sld xmlns:a="http://schemas.openxmlformats.org/drawingml/2006/main" xmlns:r="http://schemas.openxmlformats.org/officeDocument/2006/relationships" xmlns:p="http://schemas.openxmlformats.org/presentationml/2006/main">
   <p:cSld>
     <p:bg>
       <p:bgPr>
         <a:solidFill>
           <a:srgbClr val="1A1A1A"/>
         </a:solidFill>
+        <a:effectLst/>
       </p:bgPr>
     </p:bg>
     <p:spTree>
@@ -7177,7 +7200,7 @@
           <a:bodyPr lIns="45719" rIns="45719"/>
           <a:lstStyle/>
           <a:p>
-            <a:pPr/>
+            <a:endParaRPr/>
           </a:p>
         </p:txBody>
       </p:sp>
@@ -7200,7 +7223,7 @@
           </a:ln>
           <a:extLst>
             <a:ext uri="{C572A759-6A51-4108-AA02-DFA0A04FC94B}">
-              <ma14:wrappingTextBoxFlag xmlns:ma14="http://schemas.microsoft.com/office/mac/drawingml/2011/main" val="1"/>
+              <ma14:wrappingTextBoxFlag xmlns:ma14="http://schemas.microsoft.com/office/mac/drawingml/2011/main" xmlns:a14="http://schemas.microsoft.com/office/drawing/2010/main" xmlns:m="http://schemas.openxmlformats.org/officeDocument/2006/math" xmlns="" val="1"/>
             </a:ext>
           </a:extLst>
         </p:spPr>
@@ -7218,7 +7241,6 @@
             </a:lvl1pPr>
           </a:lstStyle>
           <a:p>
-            <a:pPr/>
             <a:r>
               <a:t>From Conway to LangGraph  •  University of Bologna  •  Dept. of Physics</a:t>
             </a:r>
@@ -7244,7 +7266,7 @@
           </a:ln>
           <a:extLst>
             <a:ext uri="{C572A759-6A51-4108-AA02-DFA0A04FC94B}">
-              <ma14:wrappingTextBoxFlag xmlns:ma14="http://schemas.microsoft.com/office/mac/drawingml/2011/main" val="1"/>
+              <ma14:wrappingTextBoxFlag xmlns:ma14="http://schemas.microsoft.com/office/mac/drawingml/2011/main" xmlns:a14="http://schemas.microsoft.com/office/drawing/2010/main" xmlns:m="http://schemas.openxmlformats.org/officeDocument/2006/math" xmlns="" val="1"/>
             </a:ext>
           </a:extLst>
         </p:spPr>
@@ -7254,7 +7276,7 @@
           </a:bodyPr>
           <a:lstStyle>
             <a:lvl1pPr>
-              <a:defRPr b="1" sz="2800">
+              <a:defRPr sz="2800" b="1">
                 <a:solidFill>
                   <a:srgbClr val="FFFFFF"/>
                 </a:solidFill>
@@ -7266,7 +7288,6 @@
             </a:lvl1pPr>
           </a:lstStyle>
           <a:p>
-            <a:pPr/>
             <a:r>
               <a:t>Implementing Temporal Entropy</a:t>
             </a:r>
@@ -7300,7 +7321,7 @@
           <a:bodyPr lIns="45719" rIns="45719"/>
           <a:lstStyle/>
           <a:p>
-            <a:pPr/>
+            <a:endParaRPr/>
           </a:p>
         </p:txBody>
       </p:sp>
@@ -7323,7 +7344,7 @@
           </a:ln>
           <a:extLst>
             <a:ext uri="{C572A759-6A51-4108-AA02-DFA0A04FC94B}">
-              <ma14:wrappingTextBoxFlag xmlns:ma14="http://schemas.microsoft.com/office/mac/drawingml/2011/main" val="1"/>
+              <ma14:wrappingTextBoxFlag xmlns:ma14="http://schemas.microsoft.com/office/mac/drawingml/2011/main" xmlns:a14="http://schemas.microsoft.com/office/drawing/2010/main" xmlns:m="http://schemas.openxmlformats.org/officeDocument/2006/math" xmlns="" val="1"/>
             </a:ext>
           </a:extLst>
         </p:spPr>
@@ -7576,6 +7597,7 @@
             <a:pPr>
               <a:defRPr sz="1000"/>
             </a:pPr>
+            <a:endParaRPr/>
           </a:p>
           <a:p>
             <a:pPr>
@@ -7629,6 +7651,7 @@
             <a:pPr>
               <a:defRPr sz="1000"/>
             </a:pPr>
+            <a:endParaRPr/>
           </a:p>
           <a:p>
             <a:pPr>
@@ -7666,6 +7689,7 @@
             <a:pPr>
               <a:defRPr sz="1000"/>
             </a:pPr>
+            <a:endParaRPr/>
           </a:p>
           <a:p>
             <a:pPr>
@@ -7802,18 +7826,19 @@
   <p:clrMapOvr>
     <a:masterClrMapping/>
   </p:clrMapOvr>
-  <p:transition xmlns:p14="http://schemas.microsoft.com/office/powerpoint/2010/main" spd="med" advClick="1"/>
+  <p:transition spd="med"/>
 </p:sld>
 </file>
 
 <file path=ppt/slides/slide18.xml><?xml version="1.0" encoding="utf-8"?>
-<p:sld xmlns:a="http://schemas.openxmlformats.org/drawingml/2006/main" xmlns:r="http://schemas.openxmlformats.org/officeDocument/2006/relationships" xmlns:p="http://schemas.openxmlformats.org/presentationml/2006/main" xmlns:m="http://schemas.openxmlformats.org/officeDocument/2006/math" xmlns:a14="http://schemas.microsoft.com/office/drawing/2010/main" showMasterSp="1" showMasterPhAnim="1">
+<p:sld xmlns:a="http://schemas.openxmlformats.org/drawingml/2006/main" xmlns:r="http://schemas.openxmlformats.org/officeDocument/2006/relationships" xmlns:p="http://schemas.openxmlformats.org/presentationml/2006/main">
   <p:cSld>
     <p:bg>
       <p:bgPr>
         <a:solidFill>
           <a:srgbClr val="1A1A1A"/>
         </a:solidFill>
+        <a:effectLst/>
       </p:bgPr>
     </p:bg>
     <p:spTree>
@@ -7855,7 +7880,7 @@
           <a:bodyPr lIns="45719" rIns="45719"/>
           <a:lstStyle/>
           <a:p>
-            <a:pPr/>
+            <a:endParaRPr/>
           </a:p>
         </p:txBody>
       </p:sp>
@@ -7878,7 +7903,7 @@
           </a:ln>
           <a:extLst>
             <a:ext uri="{C572A759-6A51-4108-AA02-DFA0A04FC94B}">
-              <ma14:wrappingTextBoxFlag xmlns:ma14="http://schemas.microsoft.com/office/mac/drawingml/2011/main" val="1"/>
+              <ma14:wrappingTextBoxFlag xmlns:ma14="http://schemas.microsoft.com/office/mac/drawingml/2011/main" xmlns:a14="http://schemas.microsoft.com/office/drawing/2010/main" xmlns:m="http://schemas.openxmlformats.org/officeDocument/2006/math" xmlns="" val="1"/>
             </a:ext>
           </a:extLst>
         </p:spPr>
@@ -7896,7 +7921,6 @@
             </a:lvl1pPr>
           </a:lstStyle>
           <a:p>
-            <a:pPr/>
             <a:r>
               <a:t>From Conway to LangGraph  •  University of Bologna  •  Dept. of Physics</a:t>
             </a:r>
@@ -7922,7 +7946,7 @@
           </a:ln>
           <a:extLst>
             <a:ext uri="{C572A759-6A51-4108-AA02-DFA0A04FC94B}">
-              <ma14:wrappingTextBoxFlag xmlns:ma14="http://schemas.microsoft.com/office/mac/drawingml/2011/main" val="1"/>
+              <ma14:wrappingTextBoxFlag xmlns:ma14="http://schemas.microsoft.com/office/mac/drawingml/2011/main" xmlns:a14="http://schemas.microsoft.com/office/drawing/2010/main" xmlns:m="http://schemas.openxmlformats.org/officeDocument/2006/math" xmlns="" val="1"/>
             </a:ext>
           </a:extLst>
         </p:spPr>
@@ -7932,7 +7956,7 @@
           </a:bodyPr>
           <a:lstStyle>
             <a:lvl1pPr>
-              <a:defRPr b="1" sz="2800">
+              <a:defRPr sz="2800" b="1">
                 <a:solidFill>
                   <a:srgbClr val="FFFFFF"/>
                 </a:solidFill>
@@ -7944,7 +7968,6 @@
             </a:lvl1pPr>
           </a:lstStyle>
           <a:p>
-            <a:pPr/>
             <a:r>
               <a:t>Comparative Entropy Analysis</a:t>
             </a:r>
@@ -7970,7 +7993,7 @@
           </a:ln>
           <a:extLst>
             <a:ext uri="{C572A759-6A51-4108-AA02-DFA0A04FC94B}">
-              <ma14:wrappingTextBoxFlag xmlns:ma14="http://schemas.microsoft.com/office/mac/drawingml/2011/main" val="1"/>
+              <ma14:wrappingTextBoxFlag xmlns:ma14="http://schemas.microsoft.com/office/mac/drawingml/2011/main" xmlns:a14="http://schemas.microsoft.com/office/drawing/2010/main" xmlns:m="http://schemas.openxmlformats.org/officeDocument/2006/math" xmlns="" val="1"/>
             </a:ext>
           </a:extLst>
         </p:spPr>
@@ -7980,7 +8003,7 @@
           </a:bodyPr>
           <a:lstStyle>
             <a:lvl1pPr>
-              <a:defRPr i="1" sz="1200">
+              <a:defRPr sz="1200" i="1">
                 <a:solidFill>
                   <a:srgbClr val="707070"/>
                 </a:solidFill>
@@ -7988,7 +8011,6 @@
             </a:lvl1pPr>
           </a:lstStyle>
           <a:p>
-            <a:pPr/>
             <a:r>
               <a:t>Different initial conditions → different entropy trajectories</a:t>
             </a:r>
@@ -8022,7 +8044,7 @@
           <a:bodyPr lIns="45719" rIns="45719"/>
           <a:lstStyle/>
           <a:p>
-            <a:pPr/>
+            <a:endParaRPr/>
           </a:p>
         </p:txBody>
       </p:sp>
@@ -8045,7 +8067,7 @@
           </a:ln>
           <a:extLst>
             <a:ext uri="{C572A759-6A51-4108-AA02-DFA0A04FC94B}">
-              <ma14:wrappingTextBoxFlag xmlns:ma14="http://schemas.microsoft.com/office/mac/drawingml/2011/main" val="1"/>
+              <ma14:wrappingTextBoxFlag xmlns:ma14="http://schemas.microsoft.com/office/mac/drawingml/2011/main" xmlns:a14="http://schemas.microsoft.com/office/drawing/2010/main" xmlns:m="http://schemas.openxmlformats.org/officeDocument/2006/math" xmlns="" val="1"/>
             </a:ext>
           </a:extLst>
         </p:spPr>
@@ -8513,7 +8535,7 @@
           <a:bodyPr lIns="45719" rIns="45719"/>
           <a:lstStyle/>
           <a:p>
-            <a:pPr/>
+            <a:endParaRPr/>
           </a:p>
         </p:txBody>
       </p:sp>
@@ -8536,7 +8558,7 @@
           </a:ln>
           <a:extLst>
             <a:ext uri="{C572A759-6A51-4108-AA02-DFA0A04FC94B}">
-              <ma14:wrappingTextBoxFlag xmlns:ma14="http://schemas.microsoft.com/office/mac/drawingml/2011/main" val="1"/>
+              <ma14:wrappingTextBoxFlag xmlns:ma14="http://schemas.microsoft.com/office/mac/drawingml/2011/main" xmlns:a14="http://schemas.microsoft.com/office/drawing/2010/main" xmlns:m="http://schemas.openxmlformats.org/officeDocument/2006/math" xmlns="" val="1"/>
             </a:ext>
           </a:extLst>
         </p:spPr>
@@ -8554,7 +8576,6 @@
             </a:lvl1pPr>
           </a:lstStyle>
           <a:p>
-            <a:pPr/>
             <a:r>
               <a:t>Try: random soups (various ρ₀), Gosper gun, R-pentomino, block field, single glider</a:t>
             </a:r>
@@ -8566,18 +8587,19 @@
   <p:clrMapOvr>
     <a:masterClrMapping/>
   </p:clrMapOvr>
-  <p:transition xmlns:p14="http://schemas.microsoft.com/office/powerpoint/2010/main" spd="med" advClick="1"/>
+  <p:transition spd="med"/>
 </p:sld>
 </file>
 
 <file path=ppt/slides/slide19.xml><?xml version="1.0" encoding="utf-8"?>
-<p:sld xmlns:a="http://schemas.openxmlformats.org/drawingml/2006/main" xmlns:r="http://schemas.openxmlformats.org/officeDocument/2006/relationships" xmlns:p="http://schemas.openxmlformats.org/presentationml/2006/main" xmlns:m="http://schemas.openxmlformats.org/officeDocument/2006/math" xmlns:a14="http://schemas.microsoft.com/office/drawing/2010/main" showMasterSp="1" showMasterPhAnim="1">
+<p:sld xmlns:a="http://schemas.openxmlformats.org/drawingml/2006/main" xmlns:r="http://schemas.openxmlformats.org/officeDocument/2006/relationships" xmlns:p="http://schemas.openxmlformats.org/presentationml/2006/main">
   <p:cSld>
     <p:bg>
       <p:bgPr>
         <a:solidFill>
           <a:srgbClr val="1A1A1A"/>
         </a:solidFill>
+        <a:effectLst/>
       </p:bgPr>
     </p:bg>
     <p:spTree>
@@ -8619,7 +8641,7 @@
           <a:bodyPr lIns="45719" rIns="45719"/>
           <a:lstStyle/>
           <a:p>
-            <a:pPr/>
+            <a:endParaRPr/>
           </a:p>
         </p:txBody>
       </p:sp>
@@ -8642,7 +8664,7 @@
           </a:ln>
           <a:extLst>
             <a:ext uri="{C572A759-6A51-4108-AA02-DFA0A04FC94B}">
-              <ma14:wrappingTextBoxFlag xmlns:ma14="http://schemas.microsoft.com/office/mac/drawingml/2011/main" val="1"/>
+              <ma14:wrappingTextBoxFlag xmlns:ma14="http://schemas.microsoft.com/office/mac/drawingml/2011/main" xmlns:a14="http://schemas.microsoft.com/office/drawing/2010/main" xmlns:m="http://schemas.openxmlformats.org/officeDocument/2006/math" xmlns="" val="1"/>
             </a:ext>
           </a:extLst>
         </p:spPr>
@@ -8660,7 +8682,6 @@
             </a:lvl1pPr>
           </a:lstStyle>
           <a:p>
-            <a:pPr/>
             <a:r>
               <a:t>From Conway to LangGraph  •  University of Bologna  •  Dept. of Physics</a:t>
             </a:r>
@@ -8686,7 +8707,7 @@
           </a:ln>
           <a:extLst>
             <a:ext uri="{C572A759-6A51-4108-AA02-DFA0A04FC94B}">
-              <ma14:wrappingTextBoxFlag xmlns:ma14="http://schemas.microsoft.com/office/mac/drawingml/2011/main" val="1"/>
+              <ma14:wrappingTextBoxFlag xmlns:ma14="http://schemas.microsoft.com/office/mac/drawingml/2011/main" xmlns:a14="http://schemas.microsoft.com/office/drawing/2010/main" xmlns:m="http://schemas.openxmlformats.org/officeDocument/2006/math" xmlns="" val="1"/>
             </a:ext>
           </a:extLst>
         </p:spPr>
@@ -8696,7 +8717,7 @@
           </a:bodyPr>
           <a:lstStyle>
             <a:lvl1pPr>
-              <a:defRPr b="1" sz="2800">
+              <a:defRPr sz="2800" b="1">
                 <a:solidFill>
                   <a:srgbClr val="FFFFFF"/>
                 </a:solidFill>
@@ -8708,7 +8729,6 @@
             </a:lvl1pPr>
           </a:lstStyle>
           <a:p>
-            <a:pPr/>
             <a:r>
               <a:t>Entropy Rate &amp; Mutual Information</a:t>
             </a:r>
@@ -8734,7 +8754,7 @@
           </a:ln>
           <a:extLst>
             <a:ext uri="{C572A759-6A51-4108-AA02-DFA0A04FC94B}">
-              <ma14:wrappingTextBoxFlag xmlns:ma14="http://schemas.microsoft.com/office/mac/drawingml/2011/main" val="1"/>
+              <ma14:wrappingTextBoxFlag xmlns:ma14="http://schemas.microsoft.com/office/mac/drawingml/2011/main" xmlns:a14="http://schemas.microsoft.com/office/drawing/2010/main" xmlns:m="http://schemas.openxmlformats.org/officeDocument/2006/math" xmlns="" val="1"/>
             </a:ext>
           </a:extLst>
         </p:spPr>
@@ -8744,7 +8764,7 @@
           </a:bodyPr>
           <a:lstStyle>
             <a:lvl1pPr>
-              <a:defRPr i="1" sz="1200">
+              <a:defRPr sz="1200" i="1">
                 <a:solidFill>
                   <a:srgbClr val="707070"/>
                 </a:solidFill>
@@ -8752,7 +8772,6 @@
             </a:lvl1pPr>
           </a:lstStyle>
           <a:p>
-            <a:pPr/>
             <a:r>
               <a:t>Advanced measures: temporal correlations and information flow</a:t>
             </a:r>
@@ -8784,7 +8803,7 @@
           <a:bodyPr lIns="45719" rIns="45719"/>
           <a:lstStyle/>
           <a:p>
-            <a:pPr/>
+            <a:endParaRPr/>
           </a:p>
         </p:txBody>
       </p:sp>
@@ -8813,7 +8832,7 @@
           <a:bodyPr lIns="45719" rIns="45719"/>
           <a:lstStyle/>
           <a:p>
-            <a:pPr/>
+            <a:endParaRPr/>
           </a:p>
         </p:txBody>
       </p:sp>
@@ -8836,7 +8855,7 @@
           </a:ln>
           <a:extLst>
             <a:ext uri="{C572A759-6A51-4108-AA02-DFA0A04FC94B}">
-              <ma14:wrappingTextBoxFlag xmlns:ma14="http://schemas.microsoft.com/office/mac/drawingml/2011/main" val="1"/>
+              <ma14:wrappingTextBoxFlag xmlns:ma14="http://schemas.microsoft.com/office/mac/drawingml/2011/main" xmlns:a14="http://schemas.microsoft.com/office/drawing/2010/main" xmlns:m="http://schemas.openxmlformats.org/officeDocument/2006/math" xmlns="" val="1"/>
             </a:ext>
           </a:extLst>
         </p:spPr>
@@ -8846,7 +8865,7 @@
           </a:bodyPr>
           <a:lstStyle>
             <a:lvl1pPr>
-              <a:defRPr b="1" sz="1600">
+              <a:defRPr sz="1600" b="1">
                 <a:solidFill>
                   <a:srgbClr val="4A9ECC"/>
                 </a:solidFill>
@@ -8858,7 +8877,6 @@
             </a:lvl1pPr>
           </a:lstStyle>
           <a:p>
-            <a:pPr/>
             <a:r>
               <a:t>Entropy Rate</a:t>
             </a:r>
@@ -8884,7 +8902,7 @@
           </a:ln>
           <a:extLst>
             <a:ext uri="{C572A759-6A51-4108-AA02-DFA0A04FC94B}">
-              <ma14:wrappingTextBoxFlag xmlns:ma14="http://schemas.microsoft.com/office/mac/drawingml/2011/main" val="1"/>
+              <ma14:wrappingTextBoxFlag xmlns:ma14="http://schemas.microsoft.com/office/mac/drawingml/2011/main" xmlns:a14="http://schemas.microsoft.com/office/drawing/2010/main" xmlns:m="http://schemas.openxmlformats.org/officeDocument/2006/math" xmlns="" val="1"/>
             </a:ext>
           </a:extLst>
         </p:spPr>
@@ -8909,6 +8927,7 @@
             <a:pPr>
               <a:defRPr sz="1200"/>
             </a:pPr>
+            <a:endParaRPr/>
           </a:p>
           <a:p>
             <a:pPr>
@@ -8938,6 +8957,7 @@
             <a:pPr>
               <a:defRPr sz="1200"/>
             </a:pPr>
+            <a:endParaRPr/>
           </a:p>
           <a:p>
             <a:pPr>
@@ -8990,7 +9010,7 @@
           <a:bodyPr lIns="45719" rIns="45719"/>
           <a:lstStyle/>
           <a:p>
-            <a:pPr/>
+            <a:endParaRPr/>
           </a:p>
         </p:txBody>
       </p:sp>
@@ -9019,7 +9039,7 @@
           <a:bodyPr lIns="45719" rIns="45719"/>
           <a:lstStyle/>
           <a:p>
-            <a:pPr/>
+            <a:endParaRPr/>
           </a:p>
         </p:txBody>
       </p:sp>
@@ -9042,7 +9062,7 @@
           </a:ln>
           <a:extLst>
             <a:ext uri="{C572A759-6A51-4108-AA02-DFA0A04FC94B}">
-              <ma14:wrappingTextBoxFlag xmlns:ma14="http://schemas.microsoft.com/office/mac/drawingml/2011/main" val="1"/>
+              <ma14:wrappingTextBoxFlag xmlns:ma14="http://schemas.microsoft.com/office/mac/drawingml/2011/main" xmlns:a14="http://schemas.microsoft.com/office/drawing/2010/main" xmlns:m="http://schemas.openxmlformats.org/officeDocument/2006/math" xmlns="" val="1"/>
             </a:ext>
           </a:extLst>
         </p:spPr>
@@ -9052,7 +9072,7 @@
           </a:bodyPr>
           <a:lstStyle>
             <a:lvl1pPr>
-              <a:defRPr b="1" sz="1600">
+              <a:defRPr sz="1600" b="1">
                 <a:solidFill>
                   <a:srgbClr val="E8B931"/>
                 </a:solidFill>
@@ -9064,7 +9084,6 @@
             </a:lvl1pPr>
           </a:lstStyle>
           <a:p>
-            <a:pPr/>
             <a:r>
               <a:t>Mutual Information</a:t>
             </a:r>
@@ -9090,7 +9109,7 @@
           </a:ln>
           <a:extLst>
             <a:ext uri="{C572A759-6A51-4108-AA02-DFA0A04FC94B}">
-              <ma14:wrappingTextBoxFlag xmlns:ma14="http://schemas.microsoft.com/office/mac/drawingml/2011/main" val="1"/>
+              <ma14:wrappingTextBoxFlag xmlns:ma14="http://schemas.microsoft.com/office/mac/drawingml/2011/main" xmlns:a14="http://schemas.microsoft.com/office/drawing/2010/main" xmlns:m="http://schemas.openxmlformats.org/officeDocument/2006/math" xmlns="" val="1"/>
             </a:ext>
           </a:extLst>
         </p:spPr>
@@ -9127,6 +9146,7 @@
             <a:pPr>
               <a:defRPr sz="1200"/>
             </a:pPr>
+            <a:endParaRPr/>
           </a:p>
           <a:p>
             <a:pPr>
@@ -9193,7 +9213,7 @@
           <a:bodyPr lIns="45719" rIns="45719"/>
           <a:lstStyle/>
           <a:p>
-            <a:pPr/>
+            <a:endParaRPr/>
           </a:p>
         </p:txBody>
       </p:sp>
@@ -9216,7 +9236,7 @@
           </a:ln>
           <a:extLst>
             <a:ext uri="{C572A759-6A51-4108-AA02-DFA0A04FC94B}">
-              <ma14:wrappingTextBoxFlag xmlns:ma14="http://schemas.microsoft.com/office/mac/drawingml/2011/main" val="1"/>
+              <ma14:wrappingTextBoxFlag xmlns:ma14="http://schemas.microsoft.com/office/mac/drawingml/2011/main" xmlns:a14="http://schemas.microsoft.com/office/drawing/2010/main" xmlns:m="http://schemas.openxmlformats.org/officeDocument/2006/math" xmlns="" val="1"/>
             </a:ext>
           </a:extLst>
         </p:spPr>
@@ -9568,18 +9588,19 @@
   <p:clrMapOvr>
     <a:masterClrMapping/>
   </p:clrMapOvr>
-  <p:transition xmlns:p14="http://schemas.microsoft.com/office/powerpoint/2010/main" spd="med" advClick="1"/>
+  <p:transition spd="med"/>
 </p:sld>
 </file>
 
 <file path=ppt/slides/slide2.xml><?xml version="1.0" encoding="utf-8"?>
-<p:sld xmlns:a="http://schemas.openxmlformats.org/drawingml/2006/main" xmlns:r="http://schemas.openxmlformats.org/officeDocument/2006/relationships" xmlns:p="http://schemas.openxmlformats.org/presentationml/2006/main" xmlns:m="http://schemas.openxmlformats.org/officeDocument/2006/math" xmlns:a14="http://schemas.microsoft.com/office/drawing/2010/main" showMasterSp="1" showMasterPhAnim="1">
+<p:sld xmlns:a="http://schemas.openxmlformats.org/drawingml/2006/main" xmlns:r="http://schemas.openxmlformats.org/officeDocument/2006/relationships" xmlns:p="http://schemas.openxmlformats.org/presentationml/2006/main">
   <p:cSld>
     <p:bg>
       <p:bgPr>
         <a:solidFill>
           <a:srgbClr val="1A1A1A"/>
         </a:solidFill>
+        <a:effectLst/>
       </p:bgPr>
     </p:bg>
     <p:spTree>
@@ -9621,7 +9642,7 @@
           <a:bodyPr lIns="45719" rIns="45719"/>
           <a:lstStyle/>
           <a:p>
-            <a:pPr/>
+            <a:endParaRPr/>
           </a:p>
         </p:txBody>
       </p:sp>
@@ -9644,7 +9665,7 @@
           </a:ln>
           <a:extLst>
             <a:ext uri="{C572A759-6A51-4108-AA02-DFA0A04FC94B}">
-              <ma14:wrappingTextBoxFlag xmlns:ma14="http://schemas.microsoft.com/office/mac/drawingml/2011/main" val="1"/>
+              <ma14:wrappingTextBoxFlag xmlns:ma14="http://schemas.microsoft.com/office/mac/drawingml/2011/main" xmlns:a14="http://schemas.microsoft.com/office/drawing/2010/main" xmlns:m="http://schemas.openxmlformats.org/officeDocument/2006/math" xmlns="" val="1"/>
             </a:ext>
           </a:extLst>
         </p:spPr>
@@ -9662,7 +9683,6 @@
             </a:lvl1pPr>
           </a:lstStyle>
           <a:p>
-            <a:pPr/>
             <a:r>
               <a:t>From Conway to LangGraph  •  University of Bologna  •  Dept. of Physics</a:t>
             </a:r>
@@ -9688,7 +9708,7 @@
           </a:ln>
           <a:extLst>
             <a:ext uri="{C572A759-6A51-4108-AA02-DFA0A04FC94B}">
-              <ma14:wrappingTextBoxFlag xmlns:ma14="http://schemas.microsoft.com/office/mac/drawingml/2011/main" val="1"/>
+              <ma14:wrappingTextBoxFlag xmlns:ma14="http://schemas.microsoft.com/office/mac/drawingml/2011/main" xmlns:a14="http://schemas.microsoft.com/office/drawing/2010/main" xmlns:m="http://schemas.openxmlformats.org/officeDocument/2006/math" xmlns="" val="1"/>
             </a:ext>
           </a:extLst>
         </p:spPr>
@@ -9698,7 +9718,7 @@
           </a:bodyPr>
           <a:lstStyle>
             <a:lvl1pPr>
-              <a:defRPr b="1" sz="2800">
+              <a:defRPr sz="2800" b="1">
                 <a:solidFill>
                   <a:srgbClr val="FFFFFF"/>
                 </a:solidFill>
@@ -9710,7 +9730,6 @@
             </a:lvl1pPr>
           </a:lstStyle>
           <a:p>
-            <a:pPr/>
             <a:r>
               <a:t>Why Entropy for the Game of Life?</a:t>
             </a:r>
@@ -9742,7 +9761,7 @@
           <a:bodyPr lIns="45719" rIns="45719"/>
           <a:lstStyle/>
           <a:p>
-            <a:pPr/>
+            <a:endParaRPr/>
           </a:p>
         </p:txBody>
       </p:sp>
@@ -9771,7 +9790,7 @@
           <a:bodyPr lIns="45719" rIns="45719"/>
           <a:lstStyle/>
           <a:p>
-            <a:pPr/>
+            <a:endParaRPr/>
           </a:p>
         </p:txBody>
       </p:sp>
@@ -9794,7 +9813,7 @@
           </a:ln>
           <a:extLst>
             <a:ext uri="{C572A759-6A51-4108-AA02-DFA0A04FC94B}">
-              <ma14:wrappingTextBoxFlag xmlns:ma14="http://schemas.microsoft.com/office/mac/drawingml/2011/main" val="1"/>
+              <ma14:wrappingTextBoxFlag xmlns:ma14="http://schemas.microsoft.com/office/mac/drawingml/2011/main" xmlns:a14="http://schemas.microsoft.com/office/drawing/2010/main" xmlns:m="http://schemas.openxmlformats.org/officeDocument/2006/math" xmlns="" val="1"/>
             </a:ext>
           </a:extLst>
         </p:spPr>
@@ -9804,7 +9823,7 @@
           </a:bodyPr>
           <a:lstStyle>
             <a:lvl1pPr>
-              <a:defRPr b="1" sz="1600">
+              <a:defRPr sz="1600" b="1">
                 <a:solidFill>
                   <a:srgbClr val="4A9ECC"/>
                 </a:solidFill>
@@ -9816,7 +9835,6 @@
             </a:lvl1pPr>
           </a:lstStyle>
           <a:p>
-            <a:pPr/>
             <a:r>
               <a:t>The Question</a:t>
             </a:r>
@@ -9842,7 +9860,7 @@
           </a:ln>
           <a:extLst>
             <a:ext uri="{C572A759-6A51-4108-AA02-DFA0A04FC94B}">
-              <ma14:wrappingTextBoxFlag xmlns:ma14="http://schemas.microsoft.com/office/mac/drawingml/2011/main" val="1"/>
+              <ma14:wrappingTextBoxFlag xmlns:ma14="http://schemas.microsoft.com/office/mac/drawingml/2011/main" xmlns:a14="http://schemas.microsoft.com/office/drawing/2010/main" xmlns:m="http://schemas.openxmlformats.org/officeDocument/2006/math" xmlns="" val="1"/>
             </a:ext>
           </a:extLst>
         </p:spPr>
@@ -9867,6 +9885,7 @@
             <a:pPr>
               <a:defRPr sz="1300"/>
             </a:pPr>
+            <a:endParaRPr/>
           </a:p>
           <a:p>
             <a:pPr>
@@ -9907,7 +9926,7 @@
           <a:bodyPr lIns="45719" rIns="45719"/>
           <a:lstStyle/>
           <a:p>
-            <a:pPr/>
+            <a:endParaRPr/>
           </a:p>
         </p:txBody>
       </p:sp>
@@ -9936,7 +9955,7 @@
           <a:bodyPr lIns="45719" rIns="45719"/>
           <a:lstStyle/>
           <a:p>
-            <a:pPr/>
+            <a:endParaRPr/>
           </a:p>
         </p:txBody>
       </p:sp>
@@ -9959,7 +9978,7 @@
           </a:ln>
           <a:extLst>
             <a:ext uri="{C572A759-6A51-4108-AA02-DFA0A04FC94B}">
-              <ma14:wrappingTextBoxFlag xmlns:ma14="http://schemas.microsoft.com/office/mac/drawingml/2011/main" val="1"/>
+              <ma14:wrappingTextBoxFlag xmlns:ma14="http://schemas.microsoft.com/office/mac/drawingml/2011/main" xmlns:a14="http://schemas.microsoft.com/office/drawing/2010/main" xmlns:m="http://schemas.openxmlformats.org/officeDocument/2006/math" xmlns="" val="1"/>
             </a:ext>
           </a:extLst>
         </p:spPr>
@@ -9969,7 +9988,7 @@
           </a:bodyPr>
           <a:lstStyle>
             <a:lvl1pPr>
-              <a:defRPr b="1" sz="1600">
+              <a:defRPr sz="1600" b="1">
                 <a:solidFill>
                   <a:srgbClr val="E8B931"/>
                 </a:solidFill>
@@ -9981,7 +10000,6 @@
             </a:lvl1pPr>
           </a:lstStyle>
           <a:p>
-            <a:pPr/>
             <a:r>
               <a:t>What Entropy Reveals</a:t>
             </a:r>
@@ -10007,7 +10025,7 @@
           </a:ln>
           <a:extLst>
             <a:ext uri="{C572A759-6A51-4108-AA02-DFA0A04FC94B}">
-              <ma14:wrappingTextBoxFlag xmlns:ma14="http://schemas.microsoft.com/office/mac/drawingml/2011/main" val="1"/>
+              <ma14:wrappingTextBoxFlag xmlns:ma14="http://schemas.microsoft.com/office/mac/drawingml/2011/main" xmlns:a14="http://schemas.microsoft.com/office/drawing/2010/main" xmlns:m="http://schemas.openxmlformats.org/officeDocument/2006/math" xmlns="" val="1"/>
             </a:ext>
           </a:extLst>
         </p:spPr>
@@ -10021,7 +10039,7 @@
               <a:spcBef>
                 <a:spcPts val="200"/>
               </a:spcBef>
-              <a:defRPr b="1" sz="1200">
+              <a:defRPr sz="1200" b="1">
                 <a:solidFill>
                   <a:srgbClr val="FFFFFF"/>
                 </a:solidFill>
@@ -10046,6 +10064,11 @@
               </a:spcBef>
               <a:defRPr sz="600"/>
             </a:pPr>
+            <a:endParaRPr b="0">
+              <a:solidFill>
+                <a:srgbClr val="A0A0A0"/>
+              </a:solidFill>
+            </a:endParaRPr>
           </a:p>
           <a:p>
             <a:pPr>
@@ -10061,7 +10084,7 @@
               <a:spcBef>
                 <a:spcPts val="200"/>
               </a:spcBef>
-              <a:defRPr b="1" sz="1200">
+              <a:defRPr sz="1200" b="1">
                 <a:solidFill>
                   <a:srgbClr val="FFFFFF"/>
                 </a:solidFill>
@@ -10086,6 +10109,11 @@
               </a:spcBef>
               <a:defRPr sz="600"/>
             </a:pPr>
+            <a:endParaRPr b="0">
+              <a:solidFill>
+                <a:srgbClr val="A0A0A0"/>
+              </a:solidFill>
+            </a:endParaRPr>
           </a:p>
           <a:p>
             <a:pPr>
@@ -10101,7 +10129,7 @@
               <a:spcBef>
                 <a:spcPts val="200"/>
               </a:spcBef>
-              <a:defRPr b="1" sz="1200">
+              <a:defRPr sz="1200" b="1">
                 <a:solidFill>
                   <a:srgbClr val="FFFFFF"/>
                 </a:solidFill>
@@ -10126,6 +10154,11 @@
               </a:spcBef>
               <a:defRPr sz="600"/>
             </a:pPr>
+            <a:endParaRPr b="0">
+              <a:solidFill>
+                <a:srgbClr val="A0A0A0"/>
+              </a:solidFill>
+            </a:endParaRPr>
           </a:p>
           <a:p>
             <a:pPr>
@@ -10141,7 +10174,7 @@
               <a:spcBef>
                 <a:spcPts val="200"/>
               </a:spcBef>
-              <a:defRPr b="1" sz="1200">
+              <a:defRPr sz="1200" b="1">
                 <a:solidFill>
                   <a:srgbClr val="FFFFFF"/>
                 </a:solidFill>
@@ -10166,18 +10199,19 @@
   <p:clrMapOvr>
     <a:masterClrMapping/>
   </p:clrMapOvr>
-  <p:transition xmlns:p14="http://schemas.microsoft.com/office/powerpoint/2010/main" spd="med" advClick="1"/>
+  <p:transition spd="med"/>
 </p:sld>
 </file>
 
 <file path=ppt/slides/slide20.xml><?xml version="1.0" encoding="utf-8"?>
-<p:sld xmlns:a="http://schemas.openxmlformats.org/drawingml/2006/main" xmlns:r="http://schemas.openxmlformats.org/officeDocument/2006/relationships" xmlns:p="http://schemas.openxmlformats.org/presentationml/2006/main" xmlns:m="http://schemas.openxmlformats.org/officeDocument/2006/math" xmlns:a14="http://schemas.microsoft.com/office/drawing/2010/main" showMasterSp="1" showMasterPhAnim="1">
+<p:sld xmlns:a="http://schemas.openxmlformats.org/drawingml/2006/main" xmlns:r="http://schemas.openxmlformats.org/officeDocument/2006/relationships" xmlns:p="http://schemas.openxmlformats.org/presentationml/2006/main">
   <p:cSld>
     <p:bg>
       <p:bgPr>
         <a:solidFill>
           <a:srgbClr val="1A1A1A"/>
         </a:solidFill>
+        <a:effectLst/>
       </p:bgPr>
     </p:bg>
     <p:spTree>
@@ -10219,7 +10253,7 @@
           <a:bodyPr lIns="45719" rIns="45719"/>
           <a:lstStyle/>
           <a:p>
-            <a:pPr/>
+            <a:endParaRPr/>
           </a:p>
         </p:txBody>
       </p:sp>
@@ -10242,7 +10276,7 @@
           </a:ln>
           <a:extLst>
             <a:ext uri="{C572A759-6A51-4108-AA02-DFA0A04FC94B}">
-              <ma14:wrappingTextBoxFlag xmlns:ma14="http://schemas.microsoft.com/office/mac/drawingml/2011/main" val="1"/>
+              <ma14:wrappingTextBoxFlag xmlns:ma14="http://schemas.microsoft.com/office/mac/drawingml/2011/main" xmlns:a14="http://schemas.microsoft.com/office/drawing/2010/main" xmlns:m="http://schemas.openxmlformats.org/officeDocument/2006/math" xmlns="" val="1"/>
             </a:ext>
           </a:extLst>
         </p:spPr>
@@ -10260,7 +10294,6 @@
             </a:lvl1pPr>
           </a:lstStyle>
           <a:p>
-            <a:pPr/>
             <a:r>
               <a:t>From Conway to LangGraph  •  University of Bologna  •  Dept. of Physics</a:t>
             </a:r>
@@ -10286,7 +10319,7 @@
           </a:ln>
           <a:extLst>
             <a:ext uri="{C572A759-6A51-4108-AA02-DFA0A04FC94B}">
-              <ma14:wrappingTextBoxFlag xmlns:ma14="http://schemas.microsoft.com/office/mac/drawingml/2011/main" val="1"/>
+              <ma14:wrappingTextBoxFlag xmlns:ma14="http://schemas.microsoft.com/office/mac/drawingml/2011/main" xmlns:a14="http://schemas.microsoft.com/office/drawing/2010/main" xmlns:m="http://schemas.openxmlformats.org/officeDocument/2006/math" xmlns="" val="1"/>
             </a:ext>
           </a:extLst>
         </p:spPr>
@@ -10296,7 +10329,7 @@
           </a:bodyPr>
           <a:lstStyle>
             <a:lvl1pPr>
-              <a:defRPr b="1" sz="2800">
+              <a:defRPr sz="2800" b="1">
                 <a:solidFill>
                   <a:srgbClr val="FFFFFF"/>
                 </a:solidFill>
@@ -10308,7 +10341,6 @@
             </a:lvl1pPr>
           </a:lstStyle>
           <a:p>
-            <a:pPr/>
             <a:r>
               <a:t>Putting It All Together</a:t>
             </a:r>
@@ -10334,7 +10366,7 @@
           </a:ln>
           <a:extLst>
             <a:ext uri="{C572A759-6A51-4108-AA02-DFA0A04FC94B}">
-              <ma14:wrappingTextBoxFlag xmlns:ma14="http://schemas.microsoft.com/office/mac/drawingml/2011/main" val="1"/>
+              <ma14:wrappingTextBoxFlag xmlns:ma14="http://schemas.microsoft.com/office/mac/drawingml/2011/main" xmlns:a14="http://schemas.microsoft.com/office/drawing/2010/main" xmlns:m="http://schemas.openxmlformats.org/officeDocument/2006/math" xmlns="" val="1"/>
             </a:ext>
           </a:extLst>
         </p:spPr>
@@ -10344,7 +10376,7 @@
           </a:bodyPr>
           <a:lstStyle>
             <a:lvl1pPr>
-              <a:defRPr i="1" sz="1200">
+              <a:defRPr sz="1200" i="1">
                 <a:solidFill>
                   <a:srgbClr val="707070"/>
                 </a:solidFill>
@@ -10352,7 +10384,6 @@
             </a:lvl1pPr>
           </a:lstStyle>
           <a:p>
-            <a:pPr/>
             <a:r>
               <a:t>A complete entropy analysis pipeline for GoL</a:t>
             </a:r>
@@ -10386,7 +10417,7 @@
           <a:bodyPr lIns="45719" rIns="45719"/>
           <a:lstStyle/>
           <a:p>
-            <a:pPr/>
+            <a:endParaRPr/>
           </a:p>
         </p:txBody>
       </p:sp>
@@ -10409,7 +10440,7 @@
           </a:ln>
           <a:extLst>
             <a:ext uri="{C572A759-6A51-4108-AA02-DFA0A04FC94B}">
-              <ma14:wrappingTextBoxFlag xmlns:ma14="http://schemas.microsoft.com/office/mac/drawingml/2011/main" val="1"/>
+              <ma14:wrappingTextBoxFlag xmlns:ma14="http://schemas.microsoft.com/office/mac/drawingml/2011/main" xmlns:a14="http://schemas.microsoft.com/office/drawing/2010/main" xmlns:m="http://schemas.openxmlformats.org/officeDocument/2006/math" xmlns="" val="1"/>
             </a:ext>
           </a:extLst>
         </p:spPr>
@@ -10662,6 +10693,7 @@
             <a:pPr>
               <a:defRPr sz="1000"/>
             </a:pPr>
+            <a:endParaRPr/>
           </a:p>
           <a:p>
             <a:pPr>
@@ -10715,6 +10747,7 @@
             <a:pPr>
               <a:defRPr sz="1000"/>
             </a:pPr>
+            <a:endParaRPr/>
           </a:p>
           <a:p>
             <a:pPr>
@@ -10819,18 +10852,19 @@
   <p:clrMapOvr>
     <a:masterClrMapping/>
   </p:clrMapOvr>
-  <p:transition xmlns:p14="http://schemas.microsoft.com/office/powerpoint/2010/main" spd="med" advClick="1"/>
+  <p:transition spd="med"/>
 </p:sld>
 </file>
 
 <file path=ppt/slides/slide21.xml><?xml version="1.0" encoding="utf-8"?>
-<p:sld xmlns:a="http://schemas.openxmlformats.org/drawingml/2006/main" xmlns:r="http://schemas.openxmlformats.org/officeDocument/2006/relationships" xmlns:p="http://schemas.openxmlformats.org/presentationml/2006/main" xmlns:m="http://schemas.openxmlformats.org/officeDocument/2006/math" xmlns:a14="http://schemas.microsoft.com/office/drawing/2010/main" showMasterSp="1" showMasterPhAnim="1">
+<p:sld xmlns:a="http://schemas.openxmlformats.org/drawingml/2006/main" xmlns:r="http://schemas.openxmlformats.org/officeDocument/2006/relationships" xmlns:p="http://schemas.openxmlformats.org/presentationml/2006/main">
   <p:cSld>
     <p:bg>
       <p:bgPr>
         <a:solidFill>
           <a:srgbClr val="1A1A1A"/>
         </a:solidFill>
+        <a:effectLst/>
       </p:bgPr>
     </p:bg>
     <p:spTree>
@@ -10872,7 +10906,7 @@
           <a:bodyPr lIns="45719" rIns="45719"/>
           <a:lstStyle/>
           <a:p>
-            <a:pPr/>
+            <a:endParaRPr/>
           </a:p>
         </p:txBody>
       </p:sp>
@@ -10895,7 +10929,7 @@
           </a:ln>
           <a:extLst>
             <a:ext uri="{C572A759-6A51-4108-AA02-DFA0A04FC94B}">
-              <ma14:wrappingTextBoxFlag xmlns:ma14="http://schemas.microsoft.com/office/mac/drawingml/2011/main" val="1"/>
+              <ma14:wrappingTextBoxFlag xmlns:ma14="http://schemas.microsoft.com/office/mac/drawingml/2011/main" xmlns:a14="http://schemas.microsoft.com/office/drawing/2010/main" xmlns:m="http://schemas.openxmlformats.org/officeDocument/2006/math" xmlns="" val="1"/>
             </a:ext>
           </a:extLst>
         </p:spPr>
@@ -10913,7 +10947,6 @@
             </a:lvl1pPr>
           </a:lstStyle>
           <a:p>
-            <a:pPr/>
             <a:r>
               <a:t>From Conway to LangGraph  •  University of Bologna  •  Dept. of Physics</a:t>
             </a:r>
@@ -10939,7 +10972,7 @@
           </a:ln>
           <a:extLst>
             <a:ext uri="{C572A759-6A51-4108-AA02-DFA0A04FC94B}">
-              <ma14:wrappingTextBoxFlag xmlns:ma14="http://schemas.microsoft.com/office/mac/drawingml/2011/main" val="1"/>
+              <ma14:wrappingTextBoxFlag xmlns:ma14="http://schemas.microsoft.com/office/mac/drawingml/2011/main" xmlns:a14="http://schemas.microsoft.com/office/drawing/2010/main" xmlns:m="http://schemas.openxmlformats.org/officeDocument/2006/math" xmlns="" val="1"/>
             </a:ext>
           </a:extLst>
         </p:spPr>
@@ -10949,7 +10982,7 @@
           </a:bodyPr>
           <a:lstStyle>
             <a:lvl1pPr>
-              <a:defRPr b="1" sz="2800">
+              <a:defRPr sz="2800" b="1">
                 <a:solidFill>
                   <a:srgbClr val="FFFFFF"/>
                 </a:solidFill>
@@ -10961,7 +10994,6 @@
             </a:lvl1pPr>
           </a:lstStyle>
           <a:p>
-            <a:pPr/>
             <a:r>
               <a:t>Exercises</a:t>
             </a:r>
@@ -10993,7 +11025,7 @@
           <a:bodyPr lIns="45719" rIns="45719"/>
           <a:lstStyle/>
           <a:p>
-            <a:pPr/>
+            <a:endParaRPr/>
           </a:p>
         </p:txBody>
       </p:sp>
@@ -11022,7 +11054,7 @@
           <a:bodyPr lIns="45719" rIns="45719"/>
           <a:lstStyle/>
           <a:p>
-            <a:pPr/>
+            <a:endParaRPr/>
           </a:p>
         </p:txBody>
       </p:sp>
@@ -11045,7 +11077,7 @@
           </a:ln>
           <a:extLst>
             <a:ext uri="{C572A759-6A51-4108-AA02-DFA0A04FC94B}">
-              <ma14:wrappingTextBoxFlag xmlns:ma14="http://schemas.microsoft.com/office/mac/drawingml/2011/main" val="1"/>
+              <ma14:wrappingTextBoxFlag xmlns:ma14="http://schemas.microsoft.com/office/mac/drawingml/2011/main" xmlns:a14="http://schemas.microsoft.com/office/drawing/2010/main" xmlns:m="http://schemas.openxmlformats.org/officeDocument/2006/math" xmlns="" val="1"/>
             </a:ext>
           </a:extLst>
         </p:spPr>
@@ -11055,7 +11087,7 @@
           </a:bodyPr>
           <a:lstStyle>
             <a:lvl1pPr>
-              <a:defRPr b="1" sz="2000">
+              <a:defRPr sz="2000" b="1">
                 <a:solidFill>
                   <a:srgbClr val="4A9ECC"/>
                 </a:solidFill>
@@ -11067,7 +11099,6 @@
             </a:lvl1pPr>
           </a:lstStyle>
           <a:p>
-            <a:pPr/>
             <a:r>
               <a:t>1</a:t>
             </a:r>
@@ -11093,7 +11124,7 @@
           </a:ln>
           <a:extLst>
             <a:ext uri="{C572A759-6A51-4108-AA02-DFA0A04FC94B}">
-              <ma14:wrappingTextBoxFlag xmlns:ma14="http://schemas.microsoft.com/office/mac/drawingml/2011/main" val="1"/>
+              <ma14:wrappingTextBoxFlag xmlns:ma14="http://schemas.microsoft.com/office/mac/drawingml/2011/main" xmlns:a14="http://schemas.microsoft.com/office/drawing/2010/main" xmlns:m="http://schemas.openxmlformats.org/officeDocument/2006/math" xmlns="" val="1"/>
             </a:ext>
           </a:extLst>
         </p:spPr>
@@ -11103,7 +11134,7 @@
           </a:bodyPr>
           <a:lstStyle>
             <a:lvl1pPr>
-              <a:defRPr b="1" sz="1300">
+              <a:defRPr sz="1300" b="1">
                 <a:solidFill>
                   <a:srgbClr val="FFFFFF"/>
                 </a:solidFill>
@@ -11115,7 +11146,6 @@
             </a:lvl1pPr>
           </a:lstStyle>
           <a:p>
-            <a:pPr/>
             <a:r>
               <a:t>Entropy vs. Initial Density</a:t>
             </a:r>
@@ -11141,7 +11171,7 @@
           </a:ln>
           <a:extLst>
             <a:ext uri="{C572A759-6A51-4108-AA02-DFA0A04FC94B}">
-              <ma14:wrappingTextBoxFlag xmlns:ma14="http://schemas.microsoft.com/office/mac/drawingml/2011/main" val="1"/>
+              <ma14:wrappingTextBoxFlag xmlns:ma14="http://schemas.microsoft.com/office/mac/drawingml/2011/main" xmlns:a14="http://schemas.microsoft.com/office/drawing/2010/main" xmlns:m="http://schemas.openxmlformats.org/officeDocument/2006/math" xmlns="" val="1"/>
             </a:ext>
           </a:extLst>
         </p:spPr>
@@ -11163,7 +11193,6 @@
             </a:lvl1pPr>
           </a:lstStyle>
           <a:p>
-            <a:pPr/>
             <a:r>
               <a:t>30 min</a:t>
             </a:r>
@@ -11189,7 +11218,7 @@
           </a:ln>
           <a:extLst>
             <a:ext uri="{C572A759-6A51-4108-AA02-DFA0A04FC94B}">
-              <ma14:wrappingTextBoxFlag xmlns:ma14="http://schemas.microsoft.com/office/mac/drawingml/2011/main" val="1"/>
+              <ma14:wrappingTextBoxFlag xmlns:ma14="http://schemas.microsoft.com/office/mac/drawingml/2011/main" xmlns:a14="http://schemas.microsoft.com/office/drawing/2010/main" xmlns:m="http://schemas.openxmlformats.org/officeDocument/2006/math" xmlns="" val="1"/>
             </a:ext>
           </a:extLst>
         </p:spPr>
@@ -11207,7 +11236,6 @@
             </a:lvl1pPr>
           </a:lstStyle>
           <a:p>
-            <a:pPr/>
             <a:r>
               <a:t>Run GoL from random soups with ρ₀ ∈ {0.1, 0.2, ..., 0.9}. Plot H_density(t) for each. At what ρ₀ does entropy decrease most? Does the equilibrium density always converge to Flammenkamp's constant?</a:t>
             </a:r>
@@ -11239,7 +11267,7 @@
           <a:bodyPr lIns="45719" rIns="45719"/>
           <a:lstStyle/>
           <a:p>
-            <a:pPr/>
+            <a:endParaRPr/>
           </a:p>
         </p:txBody>
       </p:sp>
@@ -11268,7 +11296,7 @@
           <a:bodyPr lIns="45719" rIns="45719"/>
           <a:lstStyle/>
           <a:p>
-            <a:pPr/>
+            <a:endParaRPr/>
           </a:p>
         </p:txBody>
       </p:sp>
@@ -11291,7 +11319,7 @@
           </a:ln>
           <a:extLst>
             <a:ext uri="{C572A759-6A51-4108-AA02-DFA0A04FC94B}">
-              <ma14:wrappingTextBoxFlag xmlns:ma14="http://schemas.microsoft.com/office/mac/drawingml/2011/main" val="1"/>
+              <ma14:wrappingTextBoxFlag xmlns:ma14="http://schemas.microsoft.com/office/mac/drawingml/2011/main" xmlns:a14="http://schemas.microsoft.com/office/drawing/2010/main" xmlns:m="http://schemas.openxmlformats.org/officeDocument/2006/math" xmlns="" val="1"/>
             </a:ext>
           </a:extLst>
         </p:spPr>
@@ -11301,7 +11329,7 @@
           </a:bodyPr>
           <a:lstStyle>
             <a:lvl1pPr>
-              <a:defRPr b="1" sz="2000">
+              <a:defRPr sz="2000" b="1">
                 <a:solidFill>
                   <a:srgbClr val="E8B931"/>
                 </a:solidFill>
@@ -11313,7 +11341,6 @@
             </a:lvl1pPr>
           </a:lstStyle>
           <a:p>
-            <a:pPr/>
             <a:r>
               <a:t>2</a:t>
             </a:r>
@@ -11339,7 +11366,7 @@
           </a:ln>
           <a:extLst>
             <a:ext uri="{C572A759-6A51-4108-AA02-DFA0A04FC94B}">
-              <ma14:wrappingTextBoxFlag xmlns:ma14="http://schemas.microsoft.com/office/mac/drawingml/2011/main" val="1"/>
+              <ma14:wrappingTextBoxFlag xmlns:ma14="http://schemas.microsoft.com/office/mac/drawingml/2011/main" xmlns:a14="http://schemas.microsoft.com/office/drawing/2010/main" xmlns:m="http://schemas.openxmlformats.org/officeDocument/2006/math" xmlns="" val="1"/>
             </a:ext>
           </a:extLst>
         </p:spPr>
@@ -11349,7 +11376,7 @@
           </a:bodyPr>
           <a:lstStyle>
             <a:lvl1pPr>
-              <a:defRPr b="1" sz="1300">
+              <a:defRPr sz="1300" b="1">
                 <a:solidFill>
                   <a:srgbClr val="FFFFFF"/>
                 </a:solidFill>
@@ -11361,7 +11388,6 @@
             </a:lvl1pPr>
           </a:lstStyle>
           <a:p>
-            <a:pPr/>
             <a:r>
               <a:t>Block Entropy Scaling</a:t>
             </a:r>
@@ -11387,7 +11413,7 @@
           </a:ln>
           <a:extLst>
             <a:ext uri="{C572A759-6A51-4108-AA02-DFA0A04FC94B}">
-              <ma14:wrappingTextBoxFlag xmlns:ma14="http://schemas.microsoft.com/office/mac/drawingml/2011/main" val="1"/>
+              <ma14:wrappingTextBoxFlag xmlns:ma14="http://schemas.microsoft.com/office/mac/drawingml/2011/main" xmlns:a14="http://schemas.microsoft.com/office/drawing/2010/main" xmlns:m="http://schemas.openxmlformats.org/officeDocument/2006/math" xmlns="" val="1"/>
             </a:ext>
           </a:extLst>
         </p:spPr>
@@ -11409,7 +11435,6 @@
             </a:lvl1pPr>
           </a:lstStyle>
           <a:p>
-            <a:pPr/>
             <a:r>
               <a:t>45 min</a:t>
             </a:r>
@@ -11435,7 +11460,7 @@
           </a:ln>
           <a:extLst>
             <a:ext uri="{C572A759-6A51-4108-AA02-DFA0A04FC94B}">
-              <ma14:wrappingTextBoxFlag xmlns:ma14="http://schemas.microsoft.com/office/mac/drawingml/2011/main" val="1"/>
+              <ma14:wrappingTextBoxFlag xmlns:ma14="http://schemas.microsoft.com/office/mac/drawingml/2011/main" xmlns:a14="http://schemas.microsoft.com/office/drawing/2010/main" xmlns:m="http://schemas.openxmlformats.org/officeDocument/2006/math" xmlns="" val="1"/>
             </a:ext>
           </a:extLst>
         </p:spPr>
@@ -11453,7 +11478,6 @@
             </a:lvl1pPr>
           </a:lstStyle>
           <a:p>
-            <a:pPr/>
             <a:r>
               <a:t>For the settled configuration of a random 200×200 soup, compute H_k for k = 1, 2, 3, 4, 5. Plot H_k / k² vs. k. Does it converge? Compare with a purely random grid of the same density.</a:t>
             </a:r>
@@ -11485,7 +11509,7 @@
           <a:bodyPr lIns="45719" rIns="45719"/>
           <a:lstStyle/>
           <a:p>
-            <a:pPr/>
+            <a:endParaRPr/>
           </a:p>
         </p:txBody>
       </p:sp>
@@ -11514,7 +11538,7 @@
           <a:bodyPr lIns="45719" rIns="45719"/>
           <a:lstStyle/>
           <a:p>
-            <a:pPr/>
+            <a:endParaRPr/>
           </a:p>
         </p:txBody>
       </p:sp>
@@ -11537,7 +11561,7 @@
           </a:ln>
           <a:extLst>
             <a:ext uri="{C572A759-6A51-4108-AA02-DFA0A04FC94B}">
-              <ma14:wrappingTextBoxFlag xmlns:ma14="http://schemas.microsoft.com/office/mac/drawingml/2011/main" val="1"/>
+              <ma14:wrappingTextBoxFlag xmlns:ma14="http://schemas.microsoft.com/office/mac/drawingml/2011/main" xmlns:a14="http://schemas.microsoft.com/office/drawing/2010/main" xmlns:m="http://schemas.openxmlformats.org/officeDocument/2006/math" xmlns="" val="1"/>
             </a:ext>
           </a:extLst>
         </p:spPr>
@@ -11547,7 +11571,7 @@
           </a:bodyPr>
           <a:lstStyle>
             <a:lvl1pPr>
-              <a:defRPr b="1" sz="2000">
+              <a:defRPr sz="2000" b="1">
                 <a:solidFill>
                   <a:srgbClr val="44AA66"/>
                 </a:solidFill>
@@ -11559,7 +11583,6 @@
             </a:lvl1pPr>
           </a:lstStyle>
           <a:p>
-            <a:pPr/>
             <a:r>
               <a:t>3</a:t>
             </a:r>
@@ -11585,7 +11608,7 @@
           </a:ln>
           <a:extLst>
             <a:ext uri="{C572A759-6A51-4108-AA02-DFA0A04FC94B}">
-              <ma14:wrappingTextBoxFlag xmlns:ma14="http://schemas.microsoft.com/office/mac/drawingml/2011/main" val="1"/>
+              <ma14:wrappingTextBoxFlag xmlns:ma14="http://schemas.microsoft.com/office/mac/drawingml/2011/main" xmlns:a14="http://schemas.microsoft.com/office/drawing/2010/main" xmlns:m="http://schemas.openxmlformats.org/officeDocument/2006/math" xmlns="" val="1"/>
             </a:ext>
           </a:extLst>
         </p:spPr>
@@ -11595,7 +11618,7 @@
           </a:bodyPr>
           <a:lstStyle>
             <a:lvl1pPr>
-              <a:defRPr b="1" sz="1300">
+              <a:defRPr sz="1300" b="1">
                 <a:solidFill>
                   <a:srgbClr val="FFFFFF"/>
                 </a:solidFill>
@@ -11607,7 +11630,6 @@
             </a:lvl1pPr>
           </a:lstStyle>
           <a:p>
-            <a:pPr/>
             <a:r>
               <a:t>Temporal Entropy Maps</a:t>
             </a:r>
@@ -11633,7 +11655,7 @@
           </a:ln>
           <a:extLst>
             <a:ext uri="{C572A759-6A51-4108-AA02-DFA0A04FC94B}">
-              <ma14:wrappingTextBoxFlag xmlns:ma14="http://schemas.microsoft.com/office/mac/drawingml/2011/main" val="1"/>
+              <ma14:wrappingTextBoxFlag xmlns:ma14="http://schemas.microsoft.com/office/mac/drawingml/2011/main" xmlns:a14="http://schemas.microsoft.com/office/drawing/2010/main" xmlns:m="http://schemas.openxmlformats.org/officeDocument/2006/math" xmlns="" val="1"/>
             </a:ext>
           </a:extLst>
         </p:spPr>
@@ -11655,7 +11677,6 @@
             </a:lvl1pPr>
           </a:lstStyle>
           <a:p>
-            <a:pPr/>
             <a:r>
               <a:t>45 min</a:t>
             </a:r>
@@ -11681,7 +11702,7 @@
           </a:ln>
           <a:extLst>
             <a:ext uri="{C572A759-6A51-4108-AA02-DFA0A04FC94B}">
-              <ma14:wrappingTextBoxFlag xmlns:ma14="http://schemas.microsoft.com/office/mac/drawingml/2011/main" val="1"/>
+              <ma14:wrappingTextBoxFlag xmlns:ma14="http://schemas.microsoft.com/office/mac/drawingml/2011/main" xmlns:a14="http://schemas.microsoft.com/office/drawing/2010/main" xmlns:m="http://schemas.openxmlformats.org/officeDocument/2006/math" xmlns="" val="1"/>
             </a:ext>
           </a:extLst>
         </p:spPr>
@@ -11699,7 +11720,6 @@
             </a:lvl1pPr>
           </a:lstStyle>
           <a:p>
-            <a:pPr/>
             <a:r>
               <a:t>Evolve a Gosper glider gun for 300 steps. Compute the temporal entropy map. Identify the gun mechanism, glider tracks, and dead zones from the heatmap alone. What is the average temporal entropy of the gun vs. a random soup?</a:t>
             </a:r>
@@ -11731,7 +11751,7 @@
           <a:bodyPr lIns="45719" rIns="45719"/>
           <a:lstStyle/>
           <a:p>
-            <a:pPr/>
+            <a:endParaRPr/>
           </a:p>
         </p:txBody>
       </p:sp>
@@ -11760,7 +11780,7 @@
           <a:bodyPr lIns="45719" rIns="45719"/>
           <a:lstStyle/>
           <a:p>
-            <a:pPr/>
+            <a:endParaRPr/>
           </a:p>
         </p:txBody>
       </p:sp>
@@ -11783,7 +11803,7 @@
           </a:ln>
           <a:extLst>
             <a:ext uri="{C572A759-6A51-4108-AA02-DFA0A04FC94B}">
-              <ma14:wrappingTextBoxFlag xmlns:ma14="http://schemas.microsoft.com/office/mac/drawingml/2011/main" val="1"/>
+              <ma14:wrappingTextBoxFlag xmlns:ma14="http://schemas.microsoft.com/office/mac/drawingml/2011/main" xmlns:a14="http://schemas.microsoft.com/office/drawing/2010/main" xmlns:m="http://schemas.openxmlformats.org/officeDocument/2006/math" xmlns="" val="1"/>
             </a:ext>
           </a:extLst>
         </p:spPr>
@@ -11793,7 +11813,7 @@
           </a:bodyPr>
           <a:lstStyle>
             <a:lvl1pPr>
-              <a:defRPr b="1" sz="2000">
+              <a:defRPr sz="2000" b="1">
                 <a:solidFill>
                   <a:srgbClr val="D4853B"/>
                 </a:solidFill>
@@ -11805,7 +11825,6 @@
             </a:lvl1pPr>
           </a:lstStyle>
           <a:p>
-            <a:pPr/>
             <a:r>
               <a:t>★</a:t>
             </a:r>
@@ -11831,7 +11850,7 @@
           </a:ln>
           <a:extLst>
             <a:ext uri="{C572A759-6A51-4108-AA02-DFA0A04FC94B}">
-              <ma14:wrappingTextBoxFlag xmlns:ma14="http://schemas.microsoft.com/office/mac/drawingml/2011/main" val="1"/>
+              <ma14:wrappingTextBoxFlag xmlns:ma14="http://schemas.microsoft.com/office/mac/drawingml/2011/main" xmlns:a14="http://schemas.microsoft.com/office/drawing/2010/main" xmlns:m="http://schemas.openxmlformats.org/officeDocument/2006/math" xmlns="" val="1"/>
             </a:ext>
           </a:extLst>
         </p:spPr>
@@ -11841,7 +11860,7 @@
           </a:bodyPr>
           <a:lstStyle>
             <a:lvl1pPr>
-              <a:defRPr b="1" sz="1300">
+              <a:defRPr sz="1300" b="1">
                 <a:solidFill>
                   <a:srgbClr val="FFFFFF"/>
                 </a:solidFill>
@@ -11853,7 +11872,6 @@
             </a:lvl1pPr>
           </a:lstStyle>
           <a:p>
-            <a:pPr/>
             <a:r>
               <a:t>Entropy Across Life-like Rules</a:t>
             </a:r>
@@ -11879,7 +11897,7 @@
           </a:ln>
           <a:extLst>
             <a:ext uri="{C572A759-6A51-4108-AA02-DFA0A04FC94B}">
-              <ma14:wrappingTextBoxFlag xmlns:ma14="http://schemas.microsoft.com/office/mac/drawingml/2011/main" val="1"/>
+              <ma14:wrappingTextBoxFlag xmlns:ma14="http://schemas.microsoft.com/office/mac/drawingml/2011/main" xmlns:a14="http://schemas.microsoft.com/office/drawing/2010/main" xmlns:m="http://schemas.openxmlformats.org/officeDocument/2006/math" xmlns="" val="1"/>
             </a:ext>
           </a:extLst>
         </p:spPr>
@@ -11901,7 +11919,6 @@
             </a:lvl1pPr>
           </a:lstStyle>
           <a:p>
-            <a:pPr/>
             <a:r>
               <a:t>60+ min</a:t>
             </a:r>
@@ -11927,7 +11944,7 @@
           </a:ln>
           <a:extLst>
             <a:ext uri="{C572A759-6A51-4108-AA02-DFA0A04FC94B}">
-              <ma14:wrappingTextBoxFlag xmlns:ma14="http://schemas.microsoft.com/office/mac/drawingml/2011/main" val="1"/>
+              <ma14:wrappingTextBoxFlag xmlns:ma14="http://schemas.microsoft.com/office/mac/drawingml/2011/main" xmlns:a14="http://schemas.microsoft.com/office/drawing/2010/main" xmlns:m="http://schemas.openxmlformats.org/officeDocument/2006/math" xmlns="" val="1"/>
             </a:ext>
           </a:extLst>
         </p:spPr>
@@ -11945,7 +11962,6 @@
             </a:lvl1pPr>
           </a:lstStyle>
           <a:p>
-            <a:pPr/>
             <a:r>
               <a:t>Choose 5 other life-like rules (e.g., HighLife B36/S23, Seeds B2/S, Day &amp; Night B3678/S34678). Compare entropy trajectories from random soups. Which rules show anti-entropic behavior? Can you identify the 'edge of chaos' from entropy alone?</a:t>
             </a:r>
@@ -11957,18 +11973,19 @@
   <p:clrMapOvr>
     <a:masterClrMapping/>
   </p:clrMapOvr>
-  <p:transition xmlns:p14="http://schemas.microsoft.com/office/powerpoint/2010/main" spd="med" advClick="1"/>
+  <p:transition spd="med"/>
 </p:sld>
 </file>
 
 <file path=ppt/slides/slide22.xml><?xml version="1.0" encoding="utf-8"?>
-<p:sld xmlns:a="http://schemas.openxmlformats.org/drawingml/2006/main" xmlns:r="http://schemas.openxmlformats.org/officeDocument/2006/relationships" xmlns:p="http://schemas.openxmlformats.org/presentationml/2006/main" xmlns:m="http://schemas.openxmlformats.org/officeDocument/2006/math" xmlns:a14="http://schemas.microsoft.com/office/drawing/2010/main" showMasterSp="1" showMasterPhAnim="1">
+<p:sld xmlns:a="http://schemas.openxmlformats.org/drawingml/2006/main" xmlns:r="http://schemas.openxmlformats.org/officeDocument/2006/relationships" xmlns:p="http://schemas.openxmlformats.org/presentationml/2006/main">
   <p:cSld>
     <p:bg>
       <p:bgPr>
         <a:solidFill>
           <a:srgbClr val="1A1A1A"/>
         </a:solidFill>
+        <a:effectLst/>
       </p:bgPr>
     </p:bg>
     <p:spTree>
@@ -12010,7 +12027,7 @@
           <a:bodyPr lIns="45719" rIns="45719"/>
           <a:lstStyle/>
           <a:p>
-            <a:pPr/>
+            <a:endParaRPr/>
           </a:p>
         </p:txBody>
       </p:sp>
@@ -12033,7 +12050,7 @@
           </a:ln>
           <a:extLst>
             <a:ext uri="{C572A759-6A51-4108-AA02-DFA0A04FC94B}">
-              <ma14:wrappingTextBoxFlag xmlns:ma14="http://schemas.microsoft.com/office/mac/drawingml/2011/main" val="1"/>
+              <ma14:wrappingTextBoxFlag xmlns:ma14="http://schemas.microsoft.com/office/mac/drawingml/2011/main" xmlns:a14="http://schemas.microsoft.com/office/drawing/2010/main" xmlns:m="http://schemas.openxmlformats.org/officeDocument/2006/math" xmlns="" val="1"/>
             </a:ext>
           </a:extLst>
         </p:spPr>
@@ -12051,7 +12068,6 @@
             </a:lvl1pPr>
           </a:lstStyle>
           <a:p>
-            <a:pPr/>
             <a:r>
               <a:t>From Conway to LangGraph  •  University of Bologna  •  Dept. of Physics</a:t>
             </a:r>
@@ -12077,7 +12093,7 @@
           </a:ln>
           <a:extLst>
             <a:ext uri="{C572A759-6A51-4108-AA02-DFA0A04FC94B}">
-              <ma14:wrappingTextBoxFlag xmlns:ma14="http://schemas.microsoft.com/office/mac/drawingml/2011/main" val="1"/>
+              <ma14:wrappingTextBoxFlag xmlns:ma14="http://schemas.microsoft.com/office/mac/drawingml/2011/main" xmlns:a14="http://schemas.microsoft.com/office/drawing/2010/main" xmlns:m="http://schemas.openxmlformats.org/officeDocument/2006/math" xmlns="" val="1"/>
             </a:ext>
           </a:extLst>
         </p:spPr>
@@ -12087,7 +12103,7 @@
           </a:bodyPr>
           <a:lstStyle>
             <a:lvl1pPr>
-              <a:defRPr b="1" sz="2800">
+              <a:defRPr sz="2800" b="1">
                 <a:solidFill>
                   <a:srgbClr val="FFFFFF"/>
                 </a:solidFill>
@@ -12099,7 +12115,6 @@
             </a:lvl1pPr>
           </a:lstStyle>
           <a:p>
-            <a:pPr/>
             <a:r>
               <a:t>Key Takeaways</a:t>
             </a:r>
@@ -12131,7 +12146,7 @@
           <a:bodyPr lIns="45719" rIns="45719"/>
           <a:lstStyle/>
           <a:p>
-            <a:pPr/>
+            <a:endParaRPr/>
           </a:p>
         </p:txBody>
       </p:sp>
@@ -12154,7 +12169,7 @@
           </a:ln>
           <a:extLst>
             <a:ext uri="{C572A759-6A51-4108-AA02-DFA0A04FC94B}">
-              <ma14:wrappingTextBoxFlag xmlns:ma14="http://schemas.microsoft.com/office/mac/drawingml/2011/main" val="1"/>
+              <ma14:wrappingTextBoxFlag xmlns:ma14="http://schemas.microsoft.com/office/mac/drawingml/2011/main" xmlns:a14="http://schemas.microsoft.com/office/drawing/2010/main" xmlns:m="http://schemas.openxmlformats.org/officeDocument/2006/math" xmlns="" val="1"/>
             </a:ext>
           </a:extLst>
         </p:spPr>
@@ -12164,7 +12179,7 @@
           </a:bodyPr>
           <a:lstStyle>
             <a:lvl1pPr algn="ctr">
-              <a:defRPr b="1" sz="1400">
+              <a:defRPr sz="1400" b="1">
                 <a:solidFill>
                   <a:srgbClr val="1A1A1A"/>
                 </a:solidFill>
@@ -12176,7 +12191,6 @@
             </a:lvl1pPr>
           </a:lstStyle>
           <a:p>
-            <a:pPr/>
             <a:r>
               <a:t>1</a:t>
             </a:r>
@@ -12202,7 +12216,7 @@
           </a:ln>
           <a:extLst>
             <a:ext uri="{C572A759-6A51-4108-AA02-DFA0A04FC94B}">
-              <ma14:wrappingTextBoxFlag xmlns:ma14="http://schemas.microsoft.com/office/mac/drawingml/2011/main" val="1"/>
+              <ma14:wrappingTextBoxFlag xmlns:ma14="http://schemas.microsoft.com/office/mac/drawingml/2011/main" xmlns:a14="http://schemas.microsoft.com/office/drawing/2010/main" xmlns:m="http://schemas.openxmlformats.org/officeDocument/2006/math" xmlns="" val="1"/>
             </a:ext>
           </a:extLst>
         </p:spPr>
@@ -12220,7 +12234,6 @@
             </a:lvl1pPr>
           </a:lstStyle>
           <a:p>
-            <a:pPr/>
             <a:r>
               <a:t>Density entropy is the simplest measure but misses spatial structure entirely.</a:t>
             </a:r>
@@ -12252,7 +12265,7 @@
           <a:bodyPr lIns="45719" rIns="45719"/>
           <a:lstStyle/>
           <a:p>
-            <a:pPr/>
+            <a:endParaRPr/>
           </a:p>
         </p:txBody>
       </p:sp>
@@ -12275,7 +12288,7 @@
           </a:ln>
           <a:extLst>
             <a:ext uri="{C572A759-6A51-4108-AA02-DFA0A04FC94B}">
-              <ma14:wrappingTextBoxFlag xmlns:ma14="http://schemas.microsoft.com/office/mac/drawingml/2011/main" val="1"/>
+              <ma14:wrappingTextBoxFlag xmlns:ma14="http://schemas.microsoft.com/office/mac/drawingml/2011/main" xmlns:a14="http://schemas.microsoft.com/office/drawing/2010/main" xmlns:m="http://schemas.openxmlformats.org/officeDocument/2006/math" xmlns="" val="1"/>
             </a:ext>
           </a:extLst>
         </p:spPr>
@@ -12285,7 +12298,7 @@
           </a:bodyPr>
           <a:lstStyle>
             <a:lvl1pPr algn="ctr">
-              <a:defRPr b="1" sz="1400">
+              <a:defRPr sz="1400" b="1">
                 <a:solidFill>
                   <a:srgbClr val="1A1A1A"/>
                 </a:solidFill>
@@ -12297,7 +12310,6 @@
             </a:lvl1pPr>
           </a:lstStyle>
           <a:p>
-            <a:pPr/>
             <a:r>
               <a:t>2</a:t>
             </a:r>
@@ -12323,7 +12335,7 @@
           </a:ln>
           <a:extLst>
             <a:ext uri="{C572A759-6A51-4108-AA02-DFA0A04FC94B}">
-              <ma14:wrappingTextBoxFlag xmlns:ma14="http://schemas.microsoft.com/office/mac/drawingml/2011/main" val="1"/>
+              <ma14:wrappingTextBoxFlag xmlns:ma14="http://schemas.microsoft.com/office/mac/drawingml/2011/main" xmlns:a14="http://schemas.microsoft.com/office/drawing/2010/main" xmlns:m="http://schemas.openxmlformats.org/officeDocument/2006/math" xmlns="" val="1"/>
             </a:ext>
           </a:extLst>
         </p:spPr>
@@ -12341,7 +12353,6 @@
             </a:lvl1pPr>
           </a:lstStyle>
           <a:p>
-            <a:pPr/>
             <a:r>
               <a:t>2D block entropy (H_k) captures local correlations; larger k → more information about spatial order.</a:t>
             </a:r>
@@ -12373,7 +12384,7 @@
           <a:bodyPr lIns="45719" rIns="45719"/>
           <a:lstStyle/>
           <a:p>
-            <a:pPr/>
+            <a:endParaRPr/>
           </a:p>
         </p:txBody>
       </p:sp>
@@ -12396,7 +12407,7 @@
           </a:ln>
           <a:extLst>
             <a:ext uri="{C572A759-6A51-4108-AA02-DFA0A04FC94B}">
-              <ma14:wrappingTextBoxFlag xmlns:ma14="http://schemas.microsoft.com/office/mac/drawingml/2011/main" val="1"/>
+              <ma14:wrappingTextBoxFlag xmlns:ma14="http://schemas.microsoft.com/office/mac/drawingml/2011/main" xmlns:a14="http://schemas.microsoft.com/office/drawing/2010/main" xmlns:m="http://schemas.openxmlformats.org/officeDocument/2006/math" xmlns="" val="1"/>
             </a:ext>
           </a:extLst>
         </p:spPr>
@@ -12406,7 +12417,7 @@
           </a:bodyPr>
           <a:lstStyle>
             <a:lvl1pPr algn="ctr">
-              <a:defRPr b="1" sz="1400">
+              <a:defRPr sz="1400" b="1">
                 <a:solidFill>
                   <a:srgbClr val="1A1A1A"/>
                 </a:solidFill>
@@ -12418,7 +12429,6 @@
             </a:lvl1pPr>
           </a:lstStyle>
           <a:p>
-            <a:pPr/>
             <a:r>
               <a:t>3</a:t>
             </a:r>
@@ -12444,7 +12454,7 @@
           </a:ln>
           <a:extLst>
             <a:ext uri="{C572A759-6A51-4108-AA02-DFA0A04FC94B}">
-              <ma14:wrappingTextBoxFlag xmlns:ma14="http://schemas.microsoft.com/office/mac/drawingml/2011/main" val="1"/>
+              <ma14:wrappingTextBoxFlag xmlns:ma14="http://schemas.microsoft.com/office/mac/drawingml/2011/main" xmlns:a14="http://schemas.microsoft.com/office/drawing/2010/main" xmlns:m="http://schemas.openxmlformats.org/officeDocument/2006/math" xmlns="" val="1"/>
             </a:ext>
           </a:extLst>
         </p:spPr>
@@ -12462,7 +12472,6 @@
             </a:lvl1pPr>
           </a:lstStyle>
           <a:p>
-            <a:pPr/>
             <a:r>
               <a:t>Temporal entropy maps reveal the 'activity skeleton' of GoL — still lifes, oscillators, and glider tracks.</a:t>
             </a:r>
@@ -12494,7 +12503,7 @@
           <a:bodyPr lIns="45719" rIns="45719"/>
           <a:lstStyle/>
           <a:p>
-            <a:pPr/>
+            <a:endParaRPr/>
           </a:p>
         </p:txBody>
       </p:sp>
@@ -12517,7 +12526,7 @@
           </a:ln>
           <a:extLst>
             <a:ext uri="{C572A759-6A51-4108-AA02-DFA0A04FC94B}">
-              <ma14:wrappingTextBoxFlag xmlns:ma14="http://schemas.microsoft.com/office/mac/drawingml/2011/main" val="1"/>
+              <ma14:wrappingTextBoxFlag xmlns:ma14="http://schemas.microsoft.com/office/mac/drawingml/2011/main" xmlns:a14="http://schemas.microsoft.com/office/drawing/2010/main" xmlns:m="http://schemas.openxmlformats.org/officeDocument/2006/math" xmlns="" val="1"/>
             </a:ext>
           </a:extLst>
         </p:spPr>
@@ -12527,7 +12536,7 @@
           </a:bodyPr>
           <a:lstStyle>
             <a:lvl1pPr algn="ctr">
-              <a:defRPr b="1" sz="1400">
+              <a:defRPr sz="1400" b="1">
                 <a:solidFill>
                   <a:srgbClr val="1A1A1A"/>
                 </a:solidFill>
@@ -12539,7 +12548,6 @@
             </a:lvl1pPr>
           </a:lstStyle>
           <a:p>
-            <a:pPr/>
             <a:r>
               <a:t>4</a:t>
             </a:r>
@@ -12565,7 +12573,7 @@
           </a:ln>
           <a:extLst>
             <a:ext uri="{C572A759-6A51-4108-AA02-DFA0A04FC94B}">
-              <ma14:wrappingTextBoxFlag xmlns:ma14="http://schemas.microsoft.com/office/mac/drawingml/2011/main" val="1"/>
+              <ma14:wrappingTextBoxFlag xmlns:ma14="http://schemas.microsoft.com/office/mac/drawingml/2011/main" xmlns:a14="http://schemas.microsoft.com/office/drawing/2010/main" xmlns:m="http://schemas.openxmlformats.org/officeDocument/2006/math" xmlns="" val="1"/>
             </a:ext>
           </a:extLst>
         </p:spPr>
@@ -12583,7 +12591,6 @@
             </a:lvl1pPr>
           </a:lstStyle>
           <a:p>
-            <a:pPr/>
             <a:r>
               <a:t>GoL exhibits anti-entropic behavior: entropy spontaneously decreases from random initial conditions. This is possible because the dynamics are non-reversible (dissipative).</a:t>
             </a:r>
@@ -12615,7 +12622,7 @@
           <a:bodyPr lIns="45719" rIns="45719"/>
           <a:lstStyle/>
           <a:p>
-            <a:pPr/>
+            <a:endParaRPr/>
           </a:p>
         </p:txBody>
       </p:sp>
@@ -12638,7 +12645,7 @@
           </a:ln>
           <a:extLst>
             <a:ext uri="{C572A759-6A51-4108-AA02-DFA0A04FC94B}">
-              <ma14:wrappingTextBoxFlag xmlns:ma14="http://schemas.microsoft.com/office/mac/drawingml/2011/main" val="1"/>
+              <ma14:wrappingTextBoxFlag xmlns:ma14="http://schemas.microsoft.com/office/mac/drawingml/2011/main" xmlns:a14="http://schemas.microsoft.com/office/drawing/2010/main" xmlns:m="http://schemas.openxmlformats.org/officeDocument/2006/math" xmlns="" val="1"/>
             </a:ext>
           </a:extLst>
         </p:spPr>
@@ -12648,7 +12655,7 @@
           </a:bodyPr>
           <a:lstStyle>
             <a:lvl1pPr algn="ctr">
-              <a:defRPr b="1" sz="1400">
+              <a:defRPr sz="1400" b="1">
                 <a:solidFill>
                   <a:srgbClr val="1A1A1A"/>
                 </a:solidFill>
@@ -12660,7 +12667,6 @@
             </a:lvl1pPr>
           </a:lstStyle>
           <a:p>
-            <a:pPr/>
             <a:r>
               <a:t>5</a:t>
             </a:r>
@@ -12686,7 +12692,7 @@
           </a:ln>
           <a:extLst>
             <a:ext uri="{C572A759-6A51-4108-AA02-DFA0A04FC94B}">
-              <ma14:wrappingTextBoxFlag xmlns:ma14="http://schemas.microsoft.com/office/mac/drawingml/2011/main" val="1"/>
+              <ma14:wrappingTextBoxFlag xmlns:ma14="http://schemas.microsoft.com/office/mac/drawingml/2011/main" xmlns:a14="http://schemas.microsoft.com/office/drawing/2010/main" xmlns:m="http://schemas.openxmlformats.org/officeDocument/2006/math" xmlns="" val="1"/>
             </a:ext>
           </a:extLst>
         </p:spPr>
@@ -12704,7 +12710,6 @@
             </a:lvl1pPr>
           </a:lstStyle>
           <a:p>
-            <a:pPr/>
             <a:r>
               <a:t>Entropy signatures place GoL at the 'edge of chaos' — a special point in rule space that maximizes complexity.</a:t>
             </a:r>
@@ -12716,18 +12721,19 @@
   <p:clrMapOvr>
     <a:masterClrMapping/>
   </p:clrMapOvr>
-  <p:transition xmlns:p14="http://schemas.microsoft.com/office/powerpoint/2010/main" spd="med" advClick="1"/>
+  <p:transition spd="med"/>
 </p:sld>
 </file>
 
 <file path=ppt/slides/slide23.xml><?xml version="1.0" encoding="utf-8"?>
-<p:sld xmlns:a="http://schemas.openxmlformats.org/drawingml/2006/main" xmlns:r="http://schemas.openxmlformats.org/officeDocument/2006/relationships" xmlns:p="http://schemas.openxmlformats.org/presentationml/2006/main" xmlns:m="http://schemas.openxmlformats.org/officeDocument/2006/math" xmlns:a14="http://schemas.microsoft.com/office/drawing/2010/main" showMasterSp="1" showMasterPhAnim="1">
+<p:sld xmlns:a="http://schemas.openxmlformats.org/drawingml/2006/main" xmlns:r="http://schemas.openxmlformats.org/officeDocument/2006/relationships" xmlns:p="http://schemas.openxmlformats.org/presentationml/2006/main">
   <p:cSld>
     <p:bg>
       <p:bgPr>
         <a:solidFill>
           <a:srgbClr val="1A1A1A"/>
         </a:solidFill>
+        <a:effectLst/>
       </p:bgPr>
     </p:bg>
     <p:spTree>
@@ -12769,7 +12775,7 @@
           <a:bodyPr lIns="45719" rIns="45719"/>
           <a:lstStyle/>
           <a:p>
-            <a:pPr/>
+            <a:endParaRPr/>
           </a:p>
         </p:txBody>
       </p:sp>
@@ -12792,7 +12798,7 @@
           </a:ln>
           <a:extLst>
             <a:ext uri="{C572A759-6A51-4108-AA02-DFA0A04FC94B}">
-              <ma14:wrappingTextBoxFlag xmlns:ma14="http://schemas.microsoft.com/office/mac/drawingml/2011/main" val="1"/>
+              <ma14:wrappingTextBoxFlag xmlns:ma14="http://schemas.microsoft.com/office/mac/drawingml/2011/main" xmlns:a14="http://schemas.microsoft.com/office/drawing/2010/main" xmlns:m="http://schemas.openxmlformats.org/officeDocument/2006/math" xmlns="" val="1"/>
             </a:ext>
           </a:extLst>
         </p:spPr>
@@ -12810,7 +12816,6 @@
             </a:lvl1pPr>
           </a:lstStyle>
           <a:p>
-            <a:pPr/>
             <a:r>
               <a:t>From Conway to LangGraph  •  University of Bologna  •  Dept. of Physics</a:t>
             </a:r>
@@ -12836,7 +12841,7 @@
           </a:ln>
           <a:extLst>
             <a:ext uri="{C572A759-6A51-4108-AA02-DFA0A04FC94B}">
-              <ma14:wrappingTextBoxFlag xmlns:ma14="http://schemas.microsoft.com/office/mac/drawingml/2011/main" val="1"/>
+              <ma14:wrappingTextBoxFlag xmlns:ma14="http://schemas.microsoft.com/office/mac/drawingml/2011/main" xmlns:a14="http://schemas.microsoft.com/office/drawing/2010/main" xmlns:m="http://schemas.openxmlformats.org/officeDocument/2006/math" xmlns="" val="1"/>
             </a:ext>
           </a:extLst>
         </p:spPr>
@@ -12846,7 +12851,7 @@
           </a:bodyPr>
           <a:lstStyle>
             <a:lvl1pPr>
-              <a:defRPr b="1" sz="2800">
+              <a:defRPr sz="2800" b="1">
                 <a:solidFill>
                   <a:srgbClr val="FFFFFF"/>
                 </a:solidFill>
@@ -12858,7 +12863,6 @@
             </a:lvl1pPr>
           </a:lstStyle>
           <a:p>
-            <a:pPr/>
             <a:r>
               <a:t>References</a:t>
             </a:r>
@@ -12873,7 +12877,7 @@
         </p:nvSpPr>
         <p:spPr>
           <a:xfrm>
-            <a:off x="548640" y="1005839"/>
+            <a:off x="365759" y="764541"/>
             <a:ext cx="8046719" cy="3383281"/>
           </a:xfrm>
           <a:prstGeom prst="rect">
@@ -12890,7 +12894,7 @@
           <a:bodyPr lIns="45719" rIns="45719"/>
           <a:lstStyle/>
           <a:p>
-            <a:pPr/>
+            <a:endParaRPr dirty="0"/>
           </a:p>
         </p:txBody>
       </p:sp>
@@ -12902,8 +12906,8 @@
         </p:nvSpPr>
         <p:spPr>
           <a:xfrm>
-            <a:off x="777240" y="1097280"/>
-            <a:ext cx="7589519" cy="3797301"/>
+            <a:off x="548640" y="861062"/>
+            <a:ext cx="7589519" cy="3126497"/>
           </a:xfrm>
           <a:prstGeom prst="rect">
             <a:avLst/>
@@ -12913,7 +12917,7 @@
           </a:ln>
           <a:extLst>
             <a:ext uri="{C572A759-6A51-4108-AA02-DFA0A04FC94B}">
-              <ma14:wrappingTextBoxFlag xmlns:ma14="http://schemas.microsoft.com/office/mac/drawingml/2011/main" val="1"/>
+              <ma14:wrappingTextBoxFlag xmlns:ma14="http://schemas.microsoft.com/office/mac/drawingml/2011/main" xmlns:a14="http://schemas.microsoft.com/office/drawing/2010/main" xmlns:m="http://schemas.openxmlformats.org/officeDocument/2006/math" xmlns="" val="1"/>
             </a:ext>
           </a:extLst>
         </p:spPr>
@@ -12927,13 +12931,14 @@
               <a:spcBef>
                 <a:spcPts val="100"/>
               </a:spcBef>
-              <a:defRPr b="1" sz="1300">
+              <a:defRPr sz="1300" b="1">
                 <a:solidFill>
                   <a:srgbClr val="4A9ECC"/>
                 </a:solidFill>
               </a:defRPr>
             </a:pPr>
             <a:r>
+              <a:rPr dirty="0"/>
               <a:t>Foundational</a:t>
             </a:r>
           </a:p>
@@ -12942,13 +12947,13 @@
               <a:spcBef>
                 <a:spcPts val="100"/>
               </a:spcBef>
-              <a:defRPr b="1" sz="1300">
+              <a:defRPr sz="1300" b="1">
                 <a:solidFill>
                   <a:srgbClr val="4A9ECC"/>
                 </a:solidFill>
               </a:defRPr>
             </a:pPr>
-            <a:endParaRPr sz="1000"/>
+            <a:endParaRPr sz="1000" dirty="0"/>
           </a:p>
           <a:p>
             <a:pPr>
@@ -12962,6 +12967,7 @@
               </a:defRPr>
             </a:pPr>
             <a:r>
+              <a:rPr dirty="0"/>
               <a:t>Shannon, C.E. (1948). A Mathematical Theory of Communication. Bell System Technical Journal.</a:t>
             </a:r>
           </a:p>
@@ -12976,6 +12982,7 @@
                 </a:solidFill>
               </a:defRPr>
             </a:pPr>
+            <a:endParaRPr dirty="0"/>
           </a:p>
           <a:p>
             <a:pPr>
@@ -12989,6 +12996,7 @@
               </a:defRPr>
             </a:pPr>
             <a:r>
+              <a:rPr dirty="0"/>
               <a:t>Wolfram, S. (1984). Computation theory of cellular automata. Comm. Math. Phys. 96(1), 15–57.</a:t>
             </a:r>
           </a:p>
@@ -13003,6 +13011,7 @@
                 </a:solidFill>
               </a:defRPr>
             </a:pPr>
+            <a:endParaRPr dirty="0"/>
           </a:p>
           <a:p>
             <a:pPr>
@@ -13016,6 +13025,7 @@
               </a:defRPr>
             </a:pPr>
             <a:r>
+              <a:rPr dirty="0"/>
               <a:t>Cover, T.M. &amp; Thomas, J.A. (2006). Elements of Information Theory. 2nd ed., Wiley.</a:t>
             </a:r>
           </a:p>
@@ -13030,6 +13040,7 @@
                 </a:solidFill>
               </a:defRPr>
             </a:pPr>
+            <a:endParaRPr dirty="0"/>
           </a:p>
           <a:p>
             <a:pPr>
@@ -13042,34 +13053,31 @@
                 </a:solidFill>
               </a:defRPr>
             </a:pPr>
+            <a:endParaRPr dirty="0"/>
           </a:p>
           <a:p>
             <a:pPr>
               <a:spcBef>
                 <a:spcPts val="100"/>
               </a:spcBef>
-              <a:defRPr b="1" sz="1300">
+              <a:defRPr sz="1300" b="1">
                 <a:solidFill>
                   <a:srgbClr val="4A9ECC"/>
                 </a:solidFill>
               </a:defRPr>
             </a:pPr>
             <a:r>
-              <a:t>Entropy in GoL and 2D CA</a:t>
-            </a:r>
-          </a:p>
-          <a:p>
-            <a:pPr>
-              <a:spcBef>
-                <a:spcPts val="100"/>
-              </a:spcBef>
-              <a:defRPr b="1" sz="1300">
-                <a:solidFill>
-                  <a:srgbClr val="4A9ECC"/>
-                </a:solidFill>
-              </a:defRPr>
-            </a:pPr>
-            <a:endParaRPr sz="1000"/>
+              <a:rPr dirty="0"/>
+              <a:t>Entropy in </a:t>
+            </a:r>
+            <a:r>
+              <a:rPr dirty="0" err="1"/>
+              <a:t>GoL</a:t>
+            </a:r>
+            <a:r>
+              <a:rPr dirty="0"/>
+              <a:t> and 2D CA</a:t>
+            </a:r>
           </a:p>
           <a:p>
             <a:pPr>
@@ -13083,7 +13091,16 @@
               </a:defRPr>
             </a:pPr>
             <a:r>
-              <a:t>Pan, Z. (2010). Emergence from symmetry: A new type of cellular automata. arXiv:1003.3394.</a:t>
+              <a:rPr dirty="0"/>
+              <a:t>Ruivo et al. (2023). Thermodynamics in Stochastic Conway's </a:t>
+            </a:r>
+            <a:r>
+              <a:rPr dirty="0" err="1"/>
+              <a:t>GoL</a:t>
+            </a:r>
+            <a:r>
+              <a:rPr dirty="0"/>
+              <a:t>. MDPI Dynamics 8(2), 47.</a:t>
             </a:r>
           </a:p>
           <a:p>
@@ -13097,6 +13114,7 @@
                 </a:solidFill>
               </a:defRPr>
             </a:pPr>
+            <a:endParaRPr dirty="0"/>
           </a:p>
           <a:p>
             <a:pPr>
@@ -13110,7 +13128,24 @@
               </a:defRPr>
             </a:pPr>
             <a:r>
-              <a:t>Ruivo et al. (2023). Thermodynamics in Stochastic Conway's GoL. MDPI Dynamics 8(2), 47.</a:t>
+              <a:rPr dirty="0"/>
+              <a:t>Contreras-Reyes, J.E. (2021). Lerch distribution based on </a:t>
+            </a:r>
+            <a:r>
+              <a:rPr dirty="0" err="1"/>
+              <a:t>MaxNSEntr</a:t>
+            </a:r>
+            <a:r>
+              <a:rPr dirty="0"/>
+              <a:t>: Application to </a:t>
+            </a:r>
+            <a:r>
+              <a:rPr dirty="0" err="1"/>
+              <a:t>GoL</a:t>
+            </a:r>
+            <a:r>
+              <a:rPr dirty="0"/>
+              <a:t>. Chaos, Solitons &amp; Fractals.</a:t>
             </a:r>
           </a:p>
           <a:p>
@@ -13124,6 +13159,7 @@
                 </a:solidFill>
               </a:defRPr>
             </a:pPr>
+            <a:endParaRPr dirty="0"/>
           </a:p>
           <a:p>
             <a:pPr>
@@ -13137,8 +13173,47 @@
               </a:defRPr>
             </a:pPr>
             <a:r>
-              <a:t>Contreras-Reyes, J.E. (2021). Lerch distribution based on MaxNSEntr: Application to GoL. Chaos, Solitons &amp; Fractals.</a:t>
-            </a:r>
+              <a:rPr dirty="0"/>
+              <a:t>Sherrill et al. (2024). Conway's </a:t>
+            </a:r>
+            <a:r>
+              <a:rPr dirty="0" err="1"/>
+              <a:t>GoL</a:t>
+            </a:r>
+            <a:r>
+              <a:rPr dirty="0"/>
+              <a:t> as an Analogue to a Habitable World. arXiv:2410.22389.</a:t>
+            </a:r>
+          </a:p>
+          <a:p>
+            <a:pPr>
+              <a:spcBef>
+                <a:spcPts val="100"/>
+              </a:spcBef>
+              <a:defRPr sz="1300" b="1">
+                <a:solidFill>
+                  <a:srgbClr val="4A9ECC"/>
+                </a:solidFill>
+              </a:defRPr>
+            </a:pPr>
+            <a:r>
+              <a:rPr dirty="0" err="1"/>
+              <a:t>Omniperiodicity</a:t>
+            </a:r>
+            <a:endParaRPr dirty="0"/>
+          </a:p>
+          <a:p>
+            <a:pPr>
+              <a:spcBef>
+                <a:spcPts val="100"/>
+              </a:spcBef>
+              <a:defRPr sz="1300" b="1">
+                <a:solidFill>
+                  <a:srgbClr val="4A9ECC"/>
+                </a:solidFill>
+              </a:defRPr>
+            </a:pPr>
+            <a:endParaRPr sz="1000" dirty="0"/>
           </a:p>
           <a:p>
             <a:pPr>
@@ -13151,87 +13226,17 @@
                 </a:solidFill>
               </a:defRPr>
             </a:pPr>
-          </a:p>
-          <a:p>
-            <a:pPr>
-              <a:spcBef>
-                <a:spcPts val="100"/>
-              </a:spcBef>
-              <a:defRPr sz="1000">
-                <a:solidFill>
-                  <a:srgbClr val="A0A0A0"/>
-                </a:solidFill>
-              </a:defRPr>
-            </a:pPr>
-            <a:r>
-              <a:t>Sherrill et al. (2024). Conway's GoL as an Analogue to a Habitable World. arXiv:2410.22389.</a:t>
-            </a:r>
-          </a:p>
-          <a:p>
-            <a:pPr>
-              <a:spcBef>
-                <a:spcPts val="100"/>
-              </a:spcBef>
-              <a:defRPr sz="1000">
-                <a:solidFill>
-                  <a:srgbClr val="A0A0A0"/>
-                </a:solidFill>
-              </a:defRPr>
-            </a:pPr>
-          </a:p>
-          <a:p>
-            <a:pPr>
-              <a:spcBef>
-                <a:spcPts val="100"/>
-              </a:spcBef>
-              <a:defRPr sz="1000">
-                <a:solidFill>
-                  <a:srgbClr val="A0A0A0"/>
-                </a:solidFill>
-              </a:defRPr>
-            </a:pPr>
-          </a:p>
-          <a:p>
-            <a:pPr>
-              <a:spcBef>
-                <a:spcPts val="100"/>
-              </a:spcBef>
-              <a:defRPr b="1" sz="1300">
-                <a:solidFill>
-                  <a:srgbClr val="4A9ECC"/>
-                </a:solidFill>
-              </a:defRPr>
-            </a:pPr>
-            <a:r>
-              <a:t>Omniperiodicity</a:t>
-            </a:r>
-          </a:p>
-          <a:p>
-            <a:pPr>
-              <a:spcBef>
-                <a:spcPts val="100"/>
-              </a:spcBef>
-              <a:defRPr b="1" sz="1300">
-                <a:solidFill>
-                  <a:srgbClr val="4A9ECC"/>
-                </a:solidFill>
-              </a:defRPr>
-            </a:pPr>
-            <a:endParaRPr sz="1000"/>
-          </a:p>
-          <a:p>
-            <a:pPr>
-              <a:spcBef>
-                <a:spcPts val="100"/>
-              </a:spcBef>
-              <a:defRPr sz="1000">
-                <a:solidFill>
-                  <a:srgbClr val="A0A0A0"/>
-                </a:solidFill>
-              </a:defRPr>
-            </a:pPr>
-            <a:r>
-              <a:t>Brown, N. et al. (2023). Conway's Game of Life is Omniperiodic. arXiv:2312.02799.</a:t>
+            <a:r>
+              <a:rPr dirty="0"/>
+              <a:t>Brown, N. et al. (2023). Conway's Game of Life is </a:t>
+            </a:r>
+            <a:r>
+              <a:rPr dirty="0" err="1"/>
+              <a:t>Omniperiodic</a:t>
+            </a:r>
+            <a:r>
+              <a:rPr dirty="0"/>
+              <a:t>. arXiv:2312.02799.</a:t>
             </a:r>
           </a:p>
         </p:txBody>
@@ -13241,18 +13246,19 @@
   <p:clrMapOvr>
     <a:masterClrMapping/>
   </p:clrMapOvr>
-  <p:transition xmlns:p14="http://schemas.microsoft.com/office/powerpoint/2010/main" spd="med" advClick="1"/>
+  <p:transition spd="med"/>
 </p:sld>
 </file>
 
 <file path=ppt/slides/slide24.xml><?xml version="1.0" encoding="utf-8"?>
-<p:sld xmlns:a="http://schemas.openxmlformats.org/drawingml/2006/main" xmlns:r="http://schemas.openxmlformats.org/officeDocument/2006/relationships" xmlns:p="http://schemas.openxmlformats.org/presentationml/2006/main" xmlns:m="http://schemas.openxmlformats.org/officeDocument/2006/math" xmlns:a14="http://schemas.microsoft.com/office/drawing/2010/main" showMasterSp="1" showMasterPhAnim="1">
+<p:sld xmlns:a="http://schemas.openxmlformats.org/drawingml/2006/main" xmlns:r="http://schemas.openxmlformats.org/officeDocument/2006/relationships" xmlns:p="http://schemas.openxmlformats.org/presentationml/2006/main">
   <p:cSld>
     <p:bg>
       <p:bgPr>
         <a:solidFill>
           <a:srgbClr val="0F0F0F"/>
         </a:solidFill>
+        <a:effectLst/>
       </p:bgPr>
     </p:bg>
     <p:spTree>
@@ -13296,7 +13302,7 @@
           <a:bodyPr lIns="45719" rIns="45719"/>
           <a:lstStyle/>
           <a:p>
-            <a:pPr/>
+            <a:endParaRPr/>
           </a:p>
         </p:txBody>
       </p:sp>
@@ -13327,7 +13333,7 @@
           <a:bodyPr lIns="45719" rIns="45719"/>
           <a:lstStyle/>
           <a:p>
-            <a:pPr/>
+            <a:endParaRPr/>
           </a:p>
         </p:txBody>
       </p:sp>
@@ -13358,7 +13364,7 @@
           <a:bodyPr lIns="45719" rIns="45719"/>
           <a:lstStyle/>
           <a:p>
-            <a:pPr/>
+            <a:endParaRPr/>
           </a:p>
         </p:txBody>
       </p:sp>
@@ -13389,7 +13395,7 @@
           <a:bodyPr lIns="45719" rIns="45719"/>
           <a:lstStyle/>
           <a:p>
-            <a:pPr/>
+            <a:endParaRPr/>
           </a:p>
         </p:txBody>
       </p:sp>
@@ -13420,7 +13426,7 @@
           <a:bodyPr lIns="45719" rIns="45719"/>
           <a:lstStyle/>
           <a:p>
-            <a:pPr/>
+            <a:endParaRPr/>
           </a:p>
         </p:txBody>
       </p:sp>
@@ -13451,7 +13457,7 @@
           <a:bodyPr lIns="45719" rIns="45719"/>
           <a:lstStyle/>
           <a:p>
-            <a:pPr/>
+            <a:endParaRPr/>
           </a:p>
         </p:txBody>
       </p:sp>
@@ -13482,7 +13488,7 @@
           <a:bodyPr lIns="45719" rIns="45719"/>
           <a:lstStyle/>
           <a:p>
-            <a:pPr/>
+            <a:endParaRPr/>
           </a:p>
         </p:txBody>
       </p:sp>
@@ -13513,7 +13519,7 @@
           <a:bodyPr lIns="45719" rIns="45719"/>
           <a:lstStyle/>
           <a:p>
-            <a:pPr/>
+            <a:endParaRPr/>
           </a:p>
         </p:txBody>
       </p:sp>
@@ -13544,7 +13550,7 @@
           <a:bodyPr lIns="45719" rIns="45719"/>
           <a:lstStyle/>
           <a:p>
-            <a:pPr/>
+            <a:endParaRPr/>
           </a:p>
         </p:txBody>
       </p:sp>
@@ -13567,7 +13573,7 @@
           </a:ln>
           <a:extLst>
             <a:ext uri="{C572A759-6A51-4108-AA02-DFA0A04FC94B}">
-              <ma14:wrappingTextBoxFlag xmlns:ma14="http://schemas.microsoft.com/office/mac/drawingml/2011/main" val="1"/>
+              <ma14:wrappingTextBoxFlag xmlns:ma14="http://schemas.microsoft.com/office/mac/drawingml/2011/main" xmlns:a14="http://schemas.microsoft.com/office/drawing/2010/main" xmlns:m="http://schemas.openxmlformats.org/officeDocument/2006/math" xmlns="" val="1"/>
             </a:ext>
           </a:extLst>
         </p:spPr>
@@ -13581,7 +13587,7 @@
               <a:lnSpc>
                 <a:spcPct val="115000"/>
               </a:lnSpc>
-              <a:defRPr b="1" sz="3600">
+              <a:defRPr sz="3600" b="1">
                 <a:solidFill>
                   <a:srgbClr val="FFFFFF"/>
                 </a:solidFill>
@@ -13600,7 +13606,7 @@
               <a:lnSpc>
                 <a:spcPct val="115000"/>
               </a:lnSpc>
-              <a:defRPr b="1" sz="3600">
+              <a:defRPr sz="3600" b="1">
                 <a:solidFill>
                   <a:srgbClr val="FFFFFF"/>
                 </a:solidFill>
@@ -13635,7 +13641,7 @@
           </a:ln>
           <a:extLst>
             <a:ext uri="{C572A759-6A51-4108-AA02-DFA0A04FC94B}">
-              <ma14:wrappingTextBoxFlag xmlns:ma14="http://schemas.microsoft.com/office/mac/drawingml/2011/main" val="1"/>
+              <ma14:wrappingTextBoxFlag xmlns:ma14="http://schemas.microsoft.com/office/mac/drawingml/2011/main" xmlns:a14="http://schemas.microsoft.com/office/drawing/2010/main" xmlns:m="http://schemas.openxmlformats.org/officeDocument/2006/math" xmlns="" val="1"/>
             </a:ext>
           </a:extLst>
         </p:spPr>
@@ -13695,7 +13701,7 @@
           <a:bodyPr lIns="45719" rIns="45719"/>
           <a:lstStyle/>
           <a:p>
-            <a:pPr/>
+            <a:endParaRPr/>
           </a:p>
         </p:txBody>
       </p:sp>
@@ -13718,7 +13724,7 @@
           </a:ln>
           <a:extLst>
             <a:ext uri="{C572A759-6A51-4108-AA02-DFA0A04FC94B}">
-              <ma14:wrappingTextBoxFlag xmlns:ma14="http://schemas.microsoft.com/office/mac/drawingml/2011/main" val="1"/>
+              <ma14:wrappingTextBoxFlag xmlns:ma14="http://schemas.microsoft.com/office/mac/drawingml/2011/main" xmlns:a14="http://schemas.microsoft.com/office/drawing/2010/main" xmlns:m="http://schemas.openxmlformats.org/officeDocument/2006/math" xmlns="" val="1"/>
             </a:ext>
           </a:extLst>
         </p:spPr>
@@ -13736,7 +13742,6 @@
             </a:lvl1pPr>
           </a:lstStyle>
           <a:p>
-            <a:pPr/>
             <a:r>
               <a:t>Prof. Mirko Degli Esposti  •  mirko.degliesposti@unibo.it  •  University of Bologna</a:t>
             </a:r>
@@ -13748,18 +13753,19 @@
   <p:clrMapOvr>
     <a:masterClrMapping/>
   </p:clrMapOvr>
-  <p:transition xmlns:p14="http://schemas.microsoft.com/office/powerpoint/2010/main" spd="med" advClick="1"/>
+  <p:transition spd="med"/>
 </p:sld>
 </file>
 
 <file path=ppt/slides/slide3.xml><?xml version="1.0" encoding="utf-8"?>
-<p:sld xmlns:a="http://schemas.openxmlformats.org/drawingml/2006/main" xmlns:r="http://schemas.openxmlformats.org/officeDocument/2006/relationships" xmlns:p="http://schemas.openxmlformats.org/presentationml/2006/main" xmlns:m="http://schemas.openxmlformats.org/officeDocument/2006/math" xmlns:a14="http://schemas.microsoft.com/office/drawing/2010/main" showMasterSp="1" showMasterPhAnim="1">
+<p:sld xmlns:a="http://schemas.openxmlformats.org/drawingml/2006/main" xmlns:r="http://schemas.openxmlformats.org/officeDocument/2006/relationships" xmlns:p="http://schemas.openxmlformats.org/presentationml/2006/main">
   <p:cSld>
     <p:bg>
       <p:bgPr>
         <a:solidFill>
           <a:srgbClr val="1A1A1A"/>
         </a:solidFill>
+        <a:effectLst/>
       </p:bgPr>
     </p:bg>
     <p:spTree>
@@ -13801,7 +13807,7 @@
           <a:bodyPr lIns="45719" rIns="45719"/>
           <a:lstStyle/>
           <a:p>
-            <a:pPr/>
+            <a:endParaRPr/>
           </a:p>
         </p:txBody>
       </p:sp>
@@ -13824,7 +13830,7 @@
           </a:ln>
           <a:extLst>
             <a:ext uri="{C572A759-6A51-4108-AA02-DFA0A04FC94B}">
-              <ma14:wrappingTextBoxFlag xmlns:ma14="http://schemas.microsoft.com/office/mac/drawingml/2011/main" val="1"/>
+              <ma14:wrappingTextBoxFlag xmlns:ma14="http://schemas.microsoft.com/office/mac/drawingml/2011/main" xmlns:a14="http://schemas.microsoft.com/office/drawing/2010/main" xmlns:m="http://schemas.openxmlformats.org/officeDocument/2006/math" xmlns="" val="1"/>
             </a:ext>
           </a:extLst>
         </p:spPr>
@@ -13842,7 +13848,6 @@
             </a:lvl1pPr>
           </a:lstStyle>
           <a:p>
-            <a:pPr/>
             <a:r>
               <a:t>From Conway to LangGraph  •  University of Bologna  •  Dept. of Physics</a:t>
             </a:r>
@@ -13868,7 +13873,7 @@
           </a:ln>
           <a:extLst>
             <a:ext uri="{C572A759-6A51-4108-AA02-DFA0A04FC94B}">
-              <ma14:wrappingTextBoxFlag xmlns:ma14="http://schemas.microsoft.com/office/mac/drawingml/2011/main" val="1"/>
+              <ma14:wrappingTextBoxFlag xmlns:ma14="http://schemas.microsoft.com/office/mac/drawingml/2011/main" xmlns:a14="http://schemas.microsoft.com/office/drawing/2010/main" xmlns:m="http://schemas.openxmlformats.org/officeDocument/2006/math" xmlns="" val="1"/>
             </a:ext>
           </a:extLst>
         </p:spPr>
@@ -13878,7 +13883,7 @@
           </a:bodyPr>
           <a:lstStyle>
             <a:lvl1pPr>
-              <a:defRPr b="1" sz="2800">
+              <a:defRPr sz="2800" b="1">
                 <a:solidFill>
                   <a:srgbClr val="FFFFFF"/>
                 </a:solidFill>
@@ -13890,7 +13895,6 @@
             </a:lvl1pPr>
           </a:lstStyle>
           <a:p>
-            <a:pPr/>
             <a:r>
               <a:t>Recap: Shannon Entropy</a:t>
             </a:r>
@@ -13916,7 +13920,7 @@
           </a:ln>
           <a:extLst>
             <a:ext uri="{C572A759-6A51-4108-AA02-DFA0A04FC94B}">
-              <ma14:wrappingTextBoxFlag xmlns:ma14="http://schemas.microsoft.com/office/mac/drawingml/2011/main" val="1"/>
+              <ma14:wrappingTextBoxFlag xmlns:ma14="http://schemas.microsoft.com/office/mac/drawingml/2011/main" xmlns:a14="http://schemas.microsoft.com/office/drawing/2010/main" xmlns:m="http://schemas.openxmlformats.org/officeDocument/2006/math" xmlns="" val="1"/>
             </a:ext>
           </a:extLst>
         </p:spPr>
@@ -13926,7 +13930,7 @@
           </a:bodyPr>
           <a:lstStyle>
             <a:lvl1pPr>
-              <a:defRPr i="1" sz="1200">
+              <a:defRPr sz="1200" i="1">
                 <a:solidFill>
                   <a:srgbClr val="707070"/>
                 </a:solidFill>
@@ -13934,7 +13938,6 @@
             </a:lvl1pPr>
           </a:lstStyle>
           <a:p>
-            <a:pPr/>
             <a:r>
               <a:t>from 1D to the general framework</a:t>
             </a:r>
@@ -13966,7 +13969,7 @@
           <a:bodyPr lIns="45719" rIns="45719"/>
           <a:lstStyle/>
           <a:p>
-            <a:pPr/>
+            <a:endParaRPr/>
           </a:p>
         </p:txBody>
       </p:sp>
@@ -13989,7 +13992,7 @@
           </a:ln>
           <a:extLst>
             <a:ext uri="{C572A759-6A51-4108-AA02-DFA0A04FC94B}">
-              <ma14:wrappingTextBoxFlag xmlns:ma14="http://schemas.microsoft.com/office/mac/drawingml/2011/main" val="1"/>
+              <ma14:wrappingTextBoxFlag xmlns:ma14="http://schemas.microsoft.com/office/mac/drawingml/2011/main" xmlns:a14="http://schemas.microsoft.com/office/drawing/2010/main" xmlns:m="http://schemas.openxmlformats.org/officeDocument/2006/math" xmlns="" val="1"/>
             </a:ext>
           </a:extLst>
         </p:spPr>
@@ -14011,7 +14014,6 @@
             </a:lvl1pPr>
           </a:lstStyle>
           <a:p>
-            <a:pPr/>
             <a:r>
               <a:t>H(X)  =  − Σᵢ  p(xᵢ) log₂ p(xᵢ)    [bits]</a:t>
             </a:r>
@@ -14043,7 +14045,7 @@
           <a:bodyPr lIns="45719" rIns="45719"/>
           <a:lstStyle/>
           <a:p>
-            <a:pPr/>
+            <a:endParaRPr/>
           </a:p>
         </p:txBody>
       </p:sp>
@@ -14072,7 +14074,7 @@
           <a:bodyPr lIns="45719" rIns="45719"/>
           <a:lstStyle/>
           <a:p>
-            <a:pPr/>
+            <a:endParaRPr/>
           </a:p>
         </p:txBody>
       </p:sp>
@@ -14095,7 +14097,7 @@
           </a:ln>
           <a:extLst>
             <a:ext uri="{C572A759-6A51-4108-AA02-DFA0A04FC94B}">
-              <ma14:wrappingTextBoxFlag xmlns:ma14="http://schemas.microsoft.com/office/mac/drawingml/2011/main" val="1"/>
+              <ma14:wrappingTextBoxFlag xmlns:ma14="http://schemas.microsoft.com/office/mac/drawingml/2011/main" xmlns:a14="http://schemas.microsoft.com/office/drawing/2010/main" xmlns:m="http://schemas.openxmlformats.org/officeDocument/2006/math" xmlns="" val="1"/>
             </a:ext>
           </a:extLst>
         </p:spPr>
@@ -14117,7 +14119,6 @@
             </a:lvl1pPr>
           </a:lstStyle>
           <a:p>
-            <a:pPr/>
             <a:r>
               <a:t>H = 0</a:t>
             </a:r>
@@ -14143,7 +14144,7 @@
           </a:ln>
           <a:extLst>
             <a:ext uri="{C572A759-6A51-4108-AA02-DFA0A04FC94B}">
-              <ma14:wrappingTextBoxFlag xmlns:ma14="http://schemas.microsoft.com/office/mac/drawingml/2011/main" val="1"/>
+              <ma14:wrappingTextBoxFlag xmlns:ma14="http://schemas.microsoft.com/office/mac/drawingml/2011/main" xmlns:a14="http://schemas.microsoft.com/office/drawing/2010/main" xmlns:m="http://schemas.openxmlformats.org/officeDocument/2006/math" xmlns="" val="1"/>
             </a:ext>
           </a:extLst>
         </p:spPr>
@@ -14215,7 +14216,7 @@
           <a:bodyPr lIns="45719" rIns="45719"/>
           <a:lstStyle/>
           <a:p>
-            <a:pPr/>
+            <a:endParaRPr/>
           </a:p>
         </p:txBody>
       </p:sp>
@@ -14244,7 +14245,7 @@
           <a:bodyPr lIns="45719" rIns="45719"/>
           <a:lstStyle/>
           <a:p>
-            <a:pPr/>
+            <a:endParaRPr/>
           </a:p>
         </p:txBody>
       </p:sp>
@@ -14267,7 +14268,7 @@
           </a:ln>
           <a:extLst>
             <a:ext uri="{C572A759-6A51-4108-AA02-DFA0A04FC94B}">
-              <ma14:wrappingTextBoxFlag xmlns:ma14="http://schemas.microsoft.com/office/mac/drawingml/2011/main" val="1"/>
+              <ma14:wrappingTextBoxFlag xmlns:ma14="http://schemas.microsoft.com/office/mac/drawingml/2011/main" xmlns:a14="http://schemas.microsoft.com/office/drawing/2010/main" xmlns:m="http://schemas.openxmlformats.org/officeDocument/2006/math" xmlns="" val="1"/>
             </a:ext>
           </a:extLst>
         </p:spPr>
@@ -14289,7 +14290,6 @@
             </a:lvl1pPr>
           </a:lstStyle>
           <a:p>
-            <a:pPr/>
             <a:r>
               <a:t>H = 1 bit</a:t>
             </a:r>
@@ -14315,7 +14315,7 @@
           </a:ln>
           <a:extLst>
             <a:ext uri="{C572A759-6A51-4108-AA02-DFA0A04FC94B}">
-              <ma14:wrappingTextBoxFlag xmlns:ma14="http://schemas.microsoft.com/office/mac/drawingml/2011/main" val="1"/>
+              <ma14:wrappingTextBoxFlag xmlns:ma14="http://schemas.microsoft.com/office/mac/drawingml/2011/main" xmlns:a14="http://schemas.microsoft.com/office/drawing/2010/main" xmlns:m="http://schemas.openxmlformats.org/officeDocument/2006/math" xmlns="" val="1"/>
             </a:ext>
           </a:extLst>
         </p:spPr>
@@ -14387,7 +14387,7 @@
           <a:bodyPr lIns="45719" rIns="45719"/>
           <a:lstStyle/>
           <a:p>
-            <a:pPr/>
+            <a:endParaRPr/>
           </a:p>
         </p:txBody>
       </p:sp>
@@ -14416,7 +14416,7 @@
           <a:bodyPr lIns="45719" rIns="45719"/>
           <a:lstStyle/>
           <a:p>
-            <a:pPr/>
+            <a:endParaRPr/>
           </a:p>
         </p:txBody>
       </p:sp>
@@ -14439,7 +14439,7 @@
           </a:ln>
           <a:extLst>
             <a:ext uri="{C572A759-6A51-4108-AA02-DFA0A04FC94B}">
-              <ma14:wrappingTextBoxFlag xmlns:ma14="http://schemas.microsoft.com/office/mac/drawingml/2011/main" val="1"/>
+              <ma14:wrappingTextBoxFlag xmlns:ma14="http://schemas.microsoft.com/office/mac/drawingml/2011/main" xmlns:a14="http://schemas.microsoft.com/office/drawing/2010/main" xmlns:m="http://schemas.openxmlformats.org/officeDocument/2006/math" xmlns="" val="1"/>
             </a:ext>
           </a:extLst>
         </p:spPr>
@@ -14461,7 +14461,6 @@
             </a:lvl1pPr>
           </a:lstStyle>
           <a:p>
-            <a:pPr/>
             <a:r>
               <a:t>0 &lt; H &lt; 1</a:t>
             </a:r>
@@ -14487,7 +14486,7 @@
           </a:ln>
           <a:extLst>
             <a:ext uri="{C572A759-6A51-4108-AA02-DFA0A04FC94B}">
-              <ma14:wrappingTextBoxFlag xmlns:ma14="http://schemas.microsoft.com/office/mac/drawingml/2011/main" val="1"/>
+              <ma14:wrappingTextBoxFlag xmlns:ma14="http://schemas.microsoft.com/office/mac/drawingml/2011/main" xmlns:a14="http://schemas.microsoft.com/office/drawing/2010/main" xmlns:m="http://schemas.openxmlformats.org/officeDocument/2006/math" xmlns="" val="1"/>
             </a:ext>
           </a:extLst>
         </p:spPr>
@@ -14539,18 +14538,19 @@
   <p:clrMapOvr>
     <a:masterClrMapping/>
   </p:clrMapOvr>
-  <p:transition xmlns:p14="http://schemas.microsoft.com/office/powerpoint/2010/main" spd="med" advClick="1"/>
+  <p:transition spd="med"/>
 </p:sld>
 </file>
 
 <file path=ppt/slides/slide4.xml><?xml version="1.0" encoding="utf-8"?>
-<p:sld xmlns:a="http://schemas.openxmlformats.org/drawingml/2006/main" xmlns:r="http://schemas.openxmlformats.org/officeDocument/2006/relationships" xmlns:p="http://schemas.openxmlformats.org/presentationml/2006/main" xmlns:m="http://schemas.openxmlformats.org/officeDocument/2006/math" xmlns:a14="http://schemas.microsoft.com/office/drawing/2010/main" showMasterSp="1" showMasterPhAnim="1">
+<p:sld xmlns:a="http://schemas.openxmlformats.org/drawingml/2006/main" xmlns:r="http://schemas.openxmlformats.org/officeDocument/2006/relationships" xmlns:p="http://schemas.openxmlformats.org/presentationml/2006/main">
   <p:cSld>
     <p:bg>
       <p:bgPr>
         <a:solidFill>
           <a:srgbClr val="111111"/>
         </a:solidFill>
+        <a:effectLst/>
       </p:bgPr>
     </p:bg>
     <p:spTree>
@@ -14592,7 +14592,7 @@
           <a:bodyPr lIns="45719" rIns="45719"/>
           <a:lstStyle/>
           <a:p>
-            <a:pPr/>
+            <a:endParaRPr/>
           </a:p>
         </p:txBody>
       </p:sp>
@@ -14615,7 +14615,7 @@
           </a:ln>
           <a:extLst>
             <a:ext uri="{C572A759-6A51-4108-AA02-DFA0A04FC94B}">
-              <ma14:wrappingTextBoxFlag xmlns:ma14="http://schemas.microsoft.com/office/mac/drawingml/2011/main" val="1"/>
+              <ma14:wrappingTextBoxFlag xmlns:ma14="http://schemas.microsoft.com/office/mac/drawingml/2011/main" xmlns:a14="http://schemas.microsoft.com/office/drawing/2010/main" xmlns:m="http://schemas.openxmlformats.org/officeDocument/2006/math" xmlns="" val="1"/>
             </a:ext>
           </a:extLst>
         </p:spPr>
@@ -14625,7 +14625,7 @@
           </a:bodyPr>
           <a:lstStyle>
             <a:lvl1pPr>
-              <a:defRPr b="1" sz="3600">
+              <a:defRPr sz="3600" b="1">
                 <a:solidFill>
                   <a:srgbClr val="FFFFFF"/>
                 </a:solidFill>
@@ -14637,7 +14637,6 @@
             </a:lvl1pPr>
           </a:lstStyle>
           <a:p>
-            <a:pPr/>
             <a:r>
               <a:t>Part I: Entropy Measures</a:t>
             </a:r>
@@ -14663,7 +14662,7 @@
           </a:ln>
           <a:extLst>
             <a:ext uri="{C572A759-6A51-4108-AA02-DFA0A04FC94B}">
-              <ma14:wrappingTextBoxFlag xmlns:ma14="http://schemas.microsoft.com/office/mac/drawingml/2011/main" val="1"/>
+              <ma14:wrappingTextBoxFlag xmlns:ma14="http://schemas.microsoft.com/office/mac/drawingml/2011/main" xmlns:a14="http://schemas.microsoft.com/office/drawing/2010/main" xmlns:m="http://schemas.openxmlformats.org/officeDocument/2006/math" xmlns="" val="1"/>
             </a:ext>
           </a:extLst>
         </p:spPr>
@@ -14681,7 +14680,6 @@
             </a:lvl1pPr>
           </a:lstStyle>
           <a:p>
-            <a:pPr/>
             <a:r>
               <a:t>Adapting information theory from 1D chains to 2D lattices</a:t>
             </a:r>
@@ -14693,18 +14691,19 @@
   <p:clrMapOvr>
     <a:masterClrMapping/>
   </p:clrMapOvr>
-  <p:transition xmlns:p14="http://schemas.microsoft.com/office/powerpoint/2010/main" spd="med" advClick="1"/>
+  <p:transition spd="med"/>
 </p:sld>
 </file>
 
 <file path=ppt/slides/slide5.xml><?xml version="1.0" encoding="utf-8"?>
-<p:sld xmlns:a="http://schemas.openxmlformats.org/drawingml/2006/main" xmlns:r="http://schemas.openxmlformats.org/officeDocument/2006/relationships" xmlns:p="http://schemas.openxmlformats.org/presentationml/2006/main" xmlns:m="http://schemas.openxmlformats.org/officeDocument/2006/math" xmlns:a14="http://schemas.microsoft.com/office/drawing/2010/main" showMasterSp="1" showMasterPhAnim="1">
+<p:sld xmlns:a="http://schemas.openxmlformats.org/drawingml/2006/main" xmlns:r="http://schemas.openxmlformats.org/officeDocument/2006/relationships" xmlns:p="http://schemas.openxmlformats.org/presentationml/2006/main">
   <p:cSld>
     <p:bg>
       <p:bgPr>
         <a:solidFill>
           <a:srgbClr val="1A1A1A"/>
         </a:solidFill>
+        <a:effectLst/>
       </p:bgPr>
     </p:bg>
     <p:spTree>
@@ -14746,7 +14745,7 @@
           <a:bodyPr lIns="45719" rIns="45719"/>
           <a:lstStyle/>
           <a:p>
-            <a:pPr/>
+            <a:endParaRPr/>
           </a:p>
         </p:txBody>
       </p:sp>
@@ -14769,7 +14768,7 @@
           </a:ln>
           <a:extLst>
             <a:ext uri="{C572A759-6A51-4108-AA02-DFA0A04FC94B}">
-              <ma14:wrappingTextBoxFlag xmlns:ma14="http://schemas.microsoft.com/office/mac/drawingml/2011/main" val="1"/>
+              <ma14:wrappingTextBoxFlag xmlns:ma14="http://schemas.microsoft.com/office/mac/drawingml/2011/main" xmlns:a14="http://schemas.microsoft.com/office/drawing/2010/main" xmlns:m="http://schemas.openxmlformats.org/officeDocument/2006/math" xmlns="" val="1"/>
             </a:ext>
           </a:extLst>
         </p:spPr>
@@ -14787,7 +14786,6 @@
             </a:lvl1pPr>
           </a:lstStyle>
           <a:p>
-            <a:pPr/>
             <a:r>
               <a:t>From Conway to LangGraph  •  University of Bologna  •  Dept. of Physics</a:t>
             </a:r>
@@ -14813,7 +14811,7 @@
           </a:ln>
           <a:extLst>
             <a:ext uri="{C572A759-6A51-4108-AA02-DFA0A04FC94B}">
-              <ma14:wrappingTextBoxFlag xmlns:ma14="http://schemas.microsoft.com/office/mac/drawingml/2011/main" val="1"/>
+              <ma14:wrappingTextBoxFlag xmlns:ma14="http://schemas.microsoft.com/office/mac/drawingml/2011/main" xmlns:a14="http://schemas.microsoft.com/office/drawing/2010/main" xmlns:m="http://schemas.openxmlformats.org/officeDocument/2006/math" xmlns="" val="1"/>
             </a:ext>
           </a:extLst>
         </p:spPr>
@@ -14823,7 +14821,7 @@
           </a:bodyPr>
           <a:lstStyle>
             <a:lvl1pPr>
-              <a:defRPr b="1" sz="2800">
+              <a:defRPr sz="2800" b="1">
                 <a:solidFill>
                   <a:srgbClr val="FFFFFF"/>
                 </a:solidFill>
@@ -14835,7 +14833,6 @@
             </a:lvl1pPr>
           </a:lstStyle>
           <a:p>
-            <a:pPr/>
             <a:r>
               <a:t>Density Entropy</a:t>
             </a:r>
@@ -14861,7 +14858,7 @@
           </a:ln>
           <a:extLst>
             <a:ext uri="{C572A759-6A51-4108-AA02-DFA0A04FC94B}">
-              <ma14:wrappingTextBoxFlag xmlns:ma14="http://schemas.microsoft.com/office/mac/drawingml/2011/main" val="1"/>
+              <ma14:wrappingTextBoxFlag xmlns:ma14="http://schemas.microsoft.com/office/mac/drawingml/2011/main" xmlns:a14="http://schemas.microsoft.com/office/drawing/2010/main" xmlns:m="http://schemas.openxmlformats.org/officeDocument/2006/math" xmlns="" val="1"/>
             </a:ext>
           </a:extLst>
         </p:spPr>
@@ -14871,7 +14868,7 @@
           </a:bodyPr>
           <a:lstStyle>
             <a:lvl1pPr>
-              <a:defRPr i="1" sz="1200">
+              <a:defRPr sz="1200" i="1">
                 <a:solidFill>
                   <a:srgbClr val="707070"/>
                 </a:solidFill>
@@ -14879,7 +14876,6 @@
             </a:lvl1pPr>
           </a:lstStyle>
           <a:p>
-            <a:pPr/>
             <a:r>
               <a:t>The simplest measure: global alive/dead ratio</a:t>
             </a:r>
@@ -14911,7 +14907,7 @@
           <a:bodyPr lIns="45719" rIns="45719"/>
           <a:lstStyle/>
           <a:p>
-            <a:pPr/>
+            <a:endParaRPr/>
           </a:p>
         </p:txBody>
       </p:sp>
@@ -14934,7 +14930,7 @@
           </a:ln>
           <a:extLst>
             <a:ext uri="{C572A759-6A51-4108-AA02-DFA0A04FC94B}">
-              <ma14:wrappingTextBoxFlag xmlns:ma14="http://schemas.microsoft.com/office/mac/drawingml/2011/main" val="1"/>
+              <ma14:wrappingTextBoxFlag xmlns:ma14="http://schemas.microsoft.com/office/mac/drawingml/2011/main" xmlns:a14="http://schemas.microsoft.com/office/drawing/2010/main" xmlns:m="http://schemas.openxmlformats.org/officeDocument/2006/math" xmlns="" val="1"/>
             </a:ext>
           </a:extLst>
         </p:spPr>
@@ -14956,7 +14952,6 @@
             </a:lvl1pPr>
           </a:lstStyle>
           <a:p>
-            <a:pPr/>
             <a:r>
               <a:t>ρ(t) = N_alive(t) / N_total</a:t>
             </a:r>
@@ -14982,7 +14977,7 @@
           </a:ln>
           <a:extLst>
             <a:ext uri="{C572A759-6A51-4108-AA02-DFA0A04FC94B}">
-              <ma14:wrappingTextBoxFlag xmlns:ma14="http://schemas.microsoft.com/office/mac/drawingml/2011/main" val="1"/>
+              <ma14:wrappingTextBoxFlag xmlns:ma14="http://schemas.microsoft.com/office/mac/drawingml/2011/main" xmlns:a14="http://schemas.microsoft.com/office/drawing/2010/main" xmlns:m="http://schemas.openxmlformats.org/officeDocument/2006/math" xmlns="" val="1"/>
             </a:ext>
           </a:extLst>
         </p:spPr>
@@ -15004,7 +14999,6 @@
             </a:lvl1pPr>
           </a:lstStyle>
           <a:p>
-            <a:pPr/>
             <a:r>
               <a:t>H_density(t) = − ρ log₂ ρ − (1−ρ) log₂(1−ρ)</a:t>
             </a:r>
@@ -15030,7 +15024,7 @@
           </a:ln>
           <a:extLst>
             <a:ext uri="{C572A759-6A51-4108-AA02-DFA0A04FC94B}">
-              <ma14:wrappingTextBoxFlag xmlns:ma14="http://schemas.microsoft.com/office/mac/drawingml/2011/main" val="1"/>
+              <ma14:wrappingTextBoxFlag xmlns:ma14="http://schemas.microsoft.com/office/mac/drawingml/2011/main" xmlns:a14="http://schemas.microsoft.com/office/drawing/2010/main" xmlns:m="http://schemas.openxmlformats.org/officeDocument/2006/math" xmlns="" val="1"/>
             </a:ext>
           </a:extLst>
         </p:spPr>
@@ -15048,7 +15042,6 @@
             </a:lvl1pPr>
           </a:lstStyle>
           <a:p>
-            <a:pPr/>
             <a:r>
               <a:t>→  This is the binary entropy function h(ρ)</a:t>
             </a:r>
@@ -15080,7 +15073,7 @@
           <a:bodyPr lIns="45719" rIns="45719"/>
           <a:lstStyle/>
           <a:p>
-            <a:pPr/>
+            <a:endParaRPr/>
           </a:p>
         </p:txBody>
       </p:sp>
@@ -15103,7 +15096,7 @@
           </a:ln>
           <a:extLst>
             <a:ext uri="{C572A759-6A51-4108-AA02-DFA0A04FC94B}">
-              <ma14:wrappingTextBoxFlag xmlns:ma14="http://schemas.microsoft.com/office/mac/drawingml/2011/main" val="1"/>
+              <ma14:wrappingTextBoxFlag xmlns:ma14="http://schemas.microsoft.com/office/mac/drawingml/2011/main" xmlns:a14="http://schemas.microsoft.com/office/drawing/2010/main" xmlns:m="http://schemas.openxmlformats.org/officeDocument/2006/math" xmlns="" val="1"/>
             </a:ext>
           </a:extLst>
         </p:spPr>
@@ -15113,7 +15106,7 @@
           </a:bodyPr>
           <a:lstStyle>
             <a:lvl1pPr>
-              <a:defRPr b="1" sz="1400">
+              <a:defRPr sz="1400" b="1">
                 <a:solidFill>
                   <a:srgbClr val="D4853B"/>
                 </a:solidFill>
@@ -15125,7 +15118,6 @@
             </a:lvl1pPr>
           </a:lstStyle>
           <a:p>
-            <a:pPr/>
             <a:r>
               <a:t>Key observation</a:t>
             </a:r>
@@ -15151,7 +15143,7 @@
           </a:ln>
           <a:extLst>
             <a:ext uri="{C572A759-6A51-4108-AA02-DFA0A04FC94B}">
-              <ma14:wrappingTextBoxFlag xmlns:ma14="http://schemas.microsoft.com/office/mac/drawingml/2011/main" val="1"/>
+              <ma14:wrappingTextBoxFlag xmlns:ma14="http://schemas.microsoft.com/office/mac/drawingml/2011/main" xmlns:a14="http://schemas.microsoft.com/office/drawing/2010/main" xmlns:m="http://schemas.openxmlformats.org/officeDocument/2006/math" xmlns="" val="1"/>
             </a:ext>
           </a:extLst>
         </p:spPr>
@@ -15188,6 +15180,7 @@
             <a:pPr>
               <a:defRPr sz="1100"/>
             </a:pPr>
+            <a:endParaRPr/>
           </a:p>
           <a:p>
             <a:pPr>
@@ -15252,7 +15245,7 @@
           <a:bodyPr lIns="45719" rIns="45719"/>
           <a:lstStyle/>
           <a:p>
-            <a:pPr/>
+            <a:endParaRPr/>
           </a:p>
         </p:txBody>
       </p:sp>
@@ -15281,7 +15274,7 @@
           <a:bodyPr lIns="45719" rIns="45719"/>
           <a:lstStyle/>
           <a:p>
-            <a:pPr/>
+            <a:endParaRPr/>
           </a:p>
         </p:txBody>
       </p:sp>
@@ -15304,7 +15297,7 @@
           </a:ln>
           <a:extLst>
             <a:ext uri="{C572A759-6A51-4108-AA02-DFA0A04FC94B}">
-              <ma14:wrappingTextBoxFlag xmlns:ma14="http://schemas.microsoft.com/office/mac/drawingml/2011/main" val="1"/>
+              <ma14:wrappingTextBoxFlag xmlns:ma14="http://schemas.microsoft.com/office/mac/drawingml/2011/main" xmlns:a14="http://schemas.microsoft.com/office/drawing/2010/main" xmlns:m="http://schemas.openxmlformats.org/officeDocument/2006/math" xmlns="" val="1"/>
             </a:ext>
           </a:extLst>
         </p:spPr>
@@ -15314,7 +15307,7 @@
           </a:bodyPr>
           <a:lstStyle>
             <a:lvl1pPr>
-              <a:defRPr b="1" sz="1400">
+              <a:defRPr sz="1400" b="1">
                 <a:solidFill>
                   <a:srgbClr val="CC4444"/>
                 </a:solidFill>
@@ -15326,7 +15319,6 @@
             </a:lvl1pPr>
           </a:lstStyle>
           <a:p>
-            <a:pPr/>
             <a:r>
               <a:t>Limitation</a:t>
             </a:r>
@@ -15352,7 +15344,7 @@
           </a:ln>
           <a:extLst>
             <a:ext uri="{C572A759-6A51-4108-AA02-DFA0A04FC94B}">
-              <ma14:wrappingTextBoxFlag xmlns:ma14="http://schemas.microsoft.com/office/mac/drawingml/2011/main" val="1"/>
+              <ma14:wrappingTextBoxFlag xmlns:ma14="http://schemas.microsoft.com/office/mac/drawingml/2011/main" xmlns:a14="http://schemas.microsoft.com/office/drawing/2010/main" xmlns:m="http://schemas.openxmlformats.org/officeDocument/2006/math" xmlns="" val="1"/>
             </a:ext>
           </a:extLst>
         </p:spPr>
@@ -15392,18 +15384,19 @@
   <p:clrMapOvr>
     <a:masterClrMapping/>
   </p:clrMapOvr>
-  <p:transition xmlns:p14="http://schemas.microsoft.com/office/powerpoint/2010/main" spd="med" advClick="1"/>
+  <p:transition spd="med"/>
 </p:sld>
 </file>
 
 <file path=ppt/slides/slide6.xml><?xml version="1.0" encoding="utf-8"?>
-<p:sld xmlns:a="http://schemas.openxmlformats.org/drawingml/2006/main" xmlns:r="http://schemas.openxmlformats.org/officeDocument/2006/relationships" xmlns:p="http://schemas.openxmlformats.org/presentationml/2006/main" xmlns:m="http://schemas.openxmlformats.org/officeDocument/2006/math" xmlns:a14="http://schemas.microsoft.com/office/drawing/2010/main" showMasterSp="1" showMasterPhAnim="1">
+<p:sld xmlns:a="http://schemas.openxmlformats.org/drawingml/2006/main" xmlns:r="http://schemas.openxmlformats.org/officeDocument/2006/relationships" xmlns:p="http://schemas.openxmlformats.org/presentationml/2006/main">
   <p:cSld>
     <p:bg>
       <p:bgPr>
         <a:solidFill>
           <a:srgbClr val="1A1A1A"/>
         </a:solidFill>
+        <a:effectLst/>
       </p:bgPr>
     </p:bg>
     <p:spTree>
@@ -15445,7 +15438,7 @@
           <a:bodyPr lIns="45719" rIns="45719"/>
           <a:lstStyle/>
           <a:p>
-            <a:pPr/>
+            <a:endParaRPr/>
           </a:p>
         </p:txBody>
       </p:sp>
@@ -15468,7 +15461,7 @@
           </a:ln>
           <a:extLst>
             <a:ext uri="{C572A759-6A51-4108-AA02-DFA0A04FC94B}">
-              <ma14:wrappingTextBoxFlag xmlns:ma14="http://schemas.microsoft.com/office/mac/drawingml/2011/main" val="1"/>
+              <ma14:wrappingTextBoxFlag xmlns:ma14="http://schemas.microsoft.com/office/mac/drawingml/2011/main" xmlns:a14="http://schemas.microsoft.com/office/drawing/2010/main" xmlns:m="http://schemas.openxmlformats.org/officeDocument/2006/math" xmlns="" val="1"/>
             </a:ext>
           </a:extLst>
         </p:spPr>
@@ -15486,7 +15479,6 @@
             </a:lvl1pPr>
           </a:lstStyle>
           <a:p>
-            <a:pPr/>
             <a:r>
               <a:t>From Conway to LangGraph  •  University of Bologna  •  Dept. of Physics</a:t>
             </a:r>
@@ -15512,7 +15504,7 @@
           </a:ln>
           <a:extLst>
             <a:ext uri="{C572A759-6A51-4108-AA02-DFA0A04FC94B}">
-              <ma14:wrappingTextBoxFlag xmlns:ma14="http://schemas.microsoft.com/office/mac/drawingml/2011/main" val="1"/>
+              <ma14:wrappingTextBoxFlag xmlns:ma14="http://schemas.microsoft.com/office/mac/drawingml/2011/main" xmlns:a14="http://schemas.microsoft.com/office/drawing/2010/main" xmlns:m="http://schemas.openxmlformats.org/officeDocument/2006/math" xmlns="" val="1"/>
             </a:ext>
           </a:extLst>
         </p:spPr>
@@ -15522,7 +15514,7 @@
           </a:bodyPr>
           <a:lstStyle>
             <a:lvl1pPr>
-              <a:defRPr b="1" sz="2800">
+              <a:defRPr sz="2800" b="1">
                 <a:solidFill>
                   <a:srgbClr val="FFFFFF"/>
                 </a:solidFill>
@@ -15534,7 +15526,6 @@
             </a:lvl1pPr>
           </a:lstStyle>
           <a:p>
-            <a:pPr/>
             <a:r>
               <a:t>2D Block Entropy</a:t>
             </a:r>
@@ -15560,7 +15551,7 @@
           </a:ln>
           <a:extLst>
             <a:ext uri="{C572A759-6A51-4108-AA02-DFA0A04FC94B}">
-              <ma14:wrappingTextBoxFlag xmlns:ma14="http://schemas.microsoft.com/office/mac/drawingml/2011/main" val="1"/>
+              <ma14:wrappingTextBoxFlag xmlns:ma14="http://schemas.microsoft.com/office/mac/drawingml/2011/main" xmlns:a14="http://schemas.microsoft.com/office/drawing/2010/main" xmlns:m="http://schemas.openxmlformats.org/officeDocument/2006/math" xmlns="" val="1"/>
             </a:ext>
           </a:extLst>
         </p:spPr>
@@ -15570,7 +15561,7 @@
           </a:bodyPr>
           <a:lstStyle>
             <a:lvl1pPr>
-              <a:defRPr i="1" sz="1200">
+              <a:defRPr sz="1200" i="1">
                 <a:solidFill>
                   <a:srgbClr val="707070"/>
                 </a:solidFill>
@@ -15578,7 +15569,6 @@
             </a:lvl1pPr>
           </a:lstStyle>
           <a:p>
-            <a:pPr/>
             <a:r>
               <a:t>Extending block entropy to square patches</a:t>
             </a:r>
@@ -15610,7 +15600,7 @@
           <a:bodyPr lIns="45719" rIns="45719"/>
           <a:lstStyle/>
           <a:p>
-            <a:pPr/>
+            <a:endParaRPr/>
           </a:p>
         </p:txBody>
       </p:sp>
@@ -15633,7 +15623,7 @@
           </a:ln>
           <a:extLst>
             <a:ext uri="{C572A759-6A51-4108-AA02-DFA0A04FC94B}">
-              <ma14:wrappingTextBoxFlag xmlns:ma14="http://schemas.microsoft.com/office/mac/drawingml/2011/main" val="1"/>
+              <ma14:wrappingTextBoxFlag xmlns:ma14="http://schemas.microsoft.com/office/mac/drawingml/2011/main" xmlns:a14="http://schemas.microsoft.com/office/drawing/2010/main" xmlns:m="http://schemas.openxmlformats.org/officeDocument/2006/math" xmlns="" val="1"/>
             </a:ext>
           </a:extLst>
         </p:spPr>
@@ -15643,7 +15633,7 @@
           </a:bodyPr>
           <a:lstStyle>
             <a:lvl1pPr>
-              <a:defRPr b="1" sz="1400">
+              <a:defRPr sz="1400" b="1">
                 <a:solidFill>
                   <a:srgbClr val="4A9ECC"/>
                 </a:solidFill>
@@ -15655,7 +15645,6 @@
             </a:lvl1pPr>
           </a:lstStyle>
           <a:p>
-            <a:pPr/>
             <a:r>
               <a:t>Definition</a:t>
             </a:r>
@@ -15681,7 +15670,7 @@
           </a:ln>
           <a:extLst>
             <a:ext uri="{C572A759-6A51-4108-AA02-DFA0A04FC94B}">
-              <ma14:wrappingTextBoxFlag xmlns:ma14="http://schemas.microsoft.com/office/mac/drawingml/2011/main" val="1"/>
+              <ma14:wrappingTextBoxFlag xmlns:ma14="http://schemas.microsoft.com/office/mac/drawingml/2011/main" xmlns:a14="http://schemas.microsoft.com/office/drawing/2010/main" xmlns:m="http://schemas.openxmlformats.org/officeDocument/2006/math" xmlns="" val="1"/>
             </a:ext>
           </a:extLst>
         </p:spPr>
@@ -15718,6 +15707,7 @@
             <a:pPr>
               <a:defRPr sz="1200"/>
             </a:pPr>
+            <a:endParaRPr/>
           </a:p>
           <a:p>
             <a:pPr>
@@ -15735,6 +15725,7 @@
             <a:pPr>
               <a:defRPr sz="1200"/>
             </a:pPr>
+            <a:endParaRPr/>
           </a:p>
           <a:p>
             <a:pPr>
@@ -15752,6 +15743,7 @@
             <a:pPr>
               <a:defRPr sz="1200"/>
             </a:pPr>
+            <a:endParaRPr/>
           </a:p>
           <a:p>
             <a:pPr>
@@ -15792,7 +15784,7 @@
           <a:bodyPr lIns="45719" rIns="45719"/>
           <a:lstStyle/>
           <a:p>
-            <a:pPr/>
+            <a:endParaRPr/>
           </a:p>
         </p:txBody>
       </p:sp>
@@ -15815,7 +15807,7 @@
           </a:ln>
           <a:extLst>
             <a:ext uri="{C572A759-6A51-4108-AA02-DFA0A04FC94B}">
-              <ma14:wrappingTextBoxFlag xmlns:ma14="http://schemas.microsoft.com/office/mac/drawingml/2011/main" val="1"/>
+              <ma14:wrappingTextBoxFlag xmlns:ma14="http://schemas.microsoft.com/office/mac/drawingml/2011/main" xmlns:a14="http://schemas.microsoft.com/office/drawing/2010/main" xmlns:m="http://schemas.openxmlformats.org/officeDocument/2006/math" xmlns="" val="1"/>
             </a:ext>
           </a:extLst>
         </p:spPr>
@@ -15825,7 +15817,7 @@
           </a:bodyPr>
           <a:lstStyle>
             <a:lvl1pPr>
-              <a:defRPr b="1" sz="1400">
+              <a:defRPr sz="1400" b="1">
                 <a:solidFill>
                   <a:srgbClr val="E8B931"/>
                 </a:solidFill>
@@ -15837,7 +15829,6 @@
             </a:lvl1pPr>
           </a:lstStyle>
           <a:p>
-            <a:pPr/>
             <a:r>
               <a:t>Typical block sizes</a:t>
             </a:r>
@@ -15863,7 +15854,7 @@
           </a:ln>
           <a:extLst>
             <a:ext uri="{C572A759-6A51-4108-AA02-DFA0A04FC94B}">
-              <ma14:wrappingTextBoxFlag xmlns:ma14="http://schemas.microsoft.com/office/mac/drawingml/2011/main" val="1"/>
+              <ma14:wrappingTextBoxFlag xmlns:ma14="http://schemas.microsoft.com/office/mac/drawingml/2011/main" xmlns:a14="http://schemas.microsoft.com/office/drawing/2010/main" xmlns:m="http://schemas.openxmlformats.org/officeDocument/2006/math" xmlns="" val="1"/>
             </a:ext>
           </a:extLst>
         </p:spPr>
@@ -15885,7 +15876,6 @@
             </a:lvl1pPr>
           </a:lstStyle>
           <a:p>
-            <a:pPr/>
             <a:r>
               <a:t>2×2</a:t>
             </a:r>
@@ -15919,7 +15909,7 @@
           <a:bodyPr lIns="45719" rIns="45719"/>
           <a:lstStyle/>
           <a:p>
-            <a:pPr/>
+            <a:endParaRPr/>
           </a:p>
         </p:txBody>
       </p:sp>
@@ -15950,7 +15940,7 @@
           <a:bodyPr lIns="45719" rIns="45719"/>
           <a:lstStyle/>
           <a:p>
-            <a:pPr/>
+            <a:endParaRPr/>
           </a:p>
         </p:txBody>
       </p:sp>
@@ -15981,7 +15971,7 @@
           <a:bodyPr lIns="45719" rIns="45719"/>
           <a:lstStyle/>
           <a:p>
-            <a:pPr/>
+            <a:endParaRPr/>
           </a:p>
         </p:txBody>
       </p:sp>
@@ -16012,7 +16002,7 @@
           <a:bodyPr lIns="45719" rIns="45719"/>
           <a:lstStyle/>
           <a:p>
-            <a:pPr/>
+            <a:endParaRPr/>
           </a:p>
         </p:txBody>
       </p:sp>
@@ -16035,7 +16025,7 @@
           </a:ln>
           <a:extLst>
             <a:ext uri="{C572A759-6A51-4108-AA02-DFA0A04FC94B}">
-              <ma14:wrappingTextBoxFlag xmlns:ma14="http://schemas.microsoft.com/office/mac/drawingml/2011/main" val="1"/>
+              <ma14:wrappingTextBoxFlag xmlns:ma14="http://schemas.microsoft.com/office/mac/drawingml/2011/main" xmlns:a14="http://schemas.microsoft.com/office/drawing/2010/main" xmlns:m="http://schemas.openxmlformats.org/officeDocument/2006/math" xmlns="" val="1"/>
             </a:ext>
           </a:extLst>
         </p:spPr>
@@ -16053,7 +16043,6 @@
             </a:lvl1pPr>
           </a:lstStyle>
           <a:p>
-            <a:pPr/>
             <a:r>
               <a:t>→  2⁴ = 16 patterns</a:t>
             </a:r>
@@ -16079,7 +16068,7 @@
           </a:ln>
           <a:extLst>
             <a:ext uri="{C572A759-6A51-4108-AA02-DFA0A04FC94B}">
-              <ma14:wrappingTextBoxFlag xmlns:ma14="http://schemas.microsoft.com/office/mac/drawingml/2011/main" val="1"/>
+              <ma14:wrappingTextBoxFlag xmlns:ma14="http://schemas.microsoft.com/office/mac/drawingml/2011/main" xmlns:a14="http://schemas.microsoft.com/office/drawing/2010/main" xmlns:m="http://schemas.openxmlformats.org/officeDocument/2006/math" xmlns="" val="1"/>
             </a:ext>
           </a:extLst>
         </p:spPr>
@@ -16101,7 +16090,6 @@
             </a:lvl1pPr>
           </a:lstStyle>
           <a:p>
-            <a:pPr/>
             <a:r>
               <a:t>3×3</a:t>
             </a:r>
@@ -16127,7 +16115,7 @@
           </a:ln>
           <a:extLst>
             <a:ext uri="{C572A759-6A51-4108-AA02-DFA0A04FC94B}">
-              <ma14:wrappingTextBoxFlag xmlns:ma14="http://schemas.microsoft.com/office/mac/drawingml/2011/main" val="1"/>
+              <ma14:wrappingTextBoxFlag xmlns:ma14="http://schemas.microsoft.com/office/mac/drawingml/2011/main" xmlns:a14="http://schemas.microsoft.com/office/drawing/2010/main" xmlns:m="http://schemas.openxmlformats.org/officeDocument/2006/math" xmlns="" val="1"/>
             </a:ext>
           </a:extLst>
         </p:spPr>
@@ -16145,7 +16133,6 @@
             </a:lvl1pPr>
           </a:lstStyle>
           <a:p>
-            <a:pPr/>
             <a:r>
               <a:t>→  2⁹ = 512 patterns</a:t>
             </a:r>
@@ -16171,7 +16158,7 @@
           </a:ln>
           <a:extLst>
             <a:ext uri="{C572A759-6A51-4108-AA02-DFA0A04FC94B}">
-              <ma14:wrappingTextBoxFlag xmlns:ma14="http://schemas.microsoft.com/office/mac/drawingml/2011/main" val="1"/>
+              <ma14:wrappingTextBoxFlag xmlns:ma14="http://schemas.microsoft.com/office/mac/drawingml/2011/main" xmlns:a14="http://schemas.microsoft.com/office/drawing/2010/main" xmlns:m="http://schemas.openxmlformats.org/officeDocument/2006/math" xmlns="" val="1"/>
             </a:ext>
           </a:extLst>
         </p:spPr>
@@ -16193,7 +16180,6 @@
             </a:lvl1pPr>
           </a:lstStyle>
           <a:p>
-            <a:pPr/>
             <a:r>
               <a:t>4×4</a:t>
             </a:r>
@@ -16219,7 +16205,7 @@
           </a:ln>
           <a:extLst>
             <a:ext uri="{C572A759-6A51-4108-AA02-DFA0A04FC94B}">
-              <ma14:wrappingTextBoxFlag xmlns:ma14="http://schemas.microsoft.com/office/mac/drawingml/2011/main" val="1"/>
+              <ma14:wrappingTextBoxFlag xmlns:ma14="http://schemas.microsoft.com/office/mac/drawingml/2011/main" xmlns:a14="http://schemas.microsoft.com/office/drawing/2010/main" xmlns:m="http://schemas.openxmlformats.org/officeDocument/2006/math" xmlns="" val="1"/>
             </a:ext>
           </a:extLst>
         </p:spPr>
@@ -16291,7 +16277,7 @@
           <a:bodyPr lIns="45719" rIns="45719"/>
           <a:lstStyle/>
           <a:p>
-            <a:pPr/>
+            <a:endParaRPr/>
           </a:p>
         </p:txBody>
       </p:sp>
@@ -16320,7 +16306,7 @@
           <a:bodyPr lIns="45719" rIns="45719"/>
           <a:lstStyle/>
           <a:p>
-            <a:pPr/>
+            <a:endParaRPr/>
           </a:p>
         </p:txBody>
       </p:sp>
@@ -16343,7 +16329,7 @@
           </a:ln>
           <a:extLst>
             <a:ext uri="{C572A759-6A51-4108-AA02-DFA0A04FC94B}">
-              <ma14:wrappingTextBoxFlag xmlns:ma14="http://schemas.microsoft.com/office/mac/drawingml/2011/main" val="1"/>
+              <ma14:wrappingTextBoxFlag xmlns:ma14="http://schemas.microsoft.com/office/mac/drawingml/2011/main" xmlns:a14="http://schemas.microsoft.com/office/drawing/2010/main" xmlns:m="http://schemas.openxmlformats.org/officeDocument/2006/math" xmlns="" val="1"/>
             </a:ext>
           </a:extLst>
         </p:spPr>
@@ -16354,7 +16340,7 @@
           <a:lstStyle/>
           <a:p>
             <a:pPr>
-              <a:defRPr b="1" sz="1100">
+              <a:defRPr sz="1100" b="1">
                 <a:solidFill>
                   <a:srgbClr val="44AA66"/>
                 </a:solidFill>
@@ -16379,18 +16365,19 @@
   <p:clrMapOvr>
     <a:masterClrMapping/>
   </p:clrMapOvr>
-  <p:transition xmlns:p14="http://schemas.microsoft.com/office/powerpoint/2010/main" spd="med" advClick="1"/>
+  <p:transition spd="med"/>
 </p:sld>
 </file>
 
 <file path=ppt/slides/slide7.xml><?xml version="1.0" encoding="utf-8"?>
-<p:sld xmlns:a="http://schemas.openxmlformats.org/drawingml/2006/main" xmlns:r="http://schemas.openxmlformats.org/officeDocument/2006/relationships" xmlns:p="http://schemas.openxmlformats.org/presentationml/2006/main" xmlns:m="http://schemas.openxmlformats.org/officeDocument/2006/math" xmlns:a14="http://schemas.microsoft.com/office/drawing/2010/main" showMasterSp="1" showMasterPhAnim="1">
+<p:sld xmlns:a="http://schemas.openxmlformats.org/drawingml/2006/main" xmlns:r="http://schemas.openxmlformats.org/officeDocument/2006/relationships" xmlns:p="http://schemas.openxmlformats.org/presentationml/2006/main">
   <p:cSld>
     <p:bg>
       <p:bgPr>
         <a:solidFill>
           <a:srgbClr val="1A1A1A"/>
         </a:solidFill>
+        <a:effectLst/>
       </p:bgPr>
     </p:bg>
     <p:spTree>
@@ -16432,7 +16419,7 @@
           <a:bodyPr lIns="45719" rIns="45719"/>
           <a:lstStyle/>
           <a:p>
-            <a:pPr/>
+            <a:endParaRPr/>
           </a:p>
         </p:txBody>
       </p:sp>
@@ -16455,7 +16442,7 @@
           </a:ln>
           <a:extLst>
             <a:ext uri="{C572A759-6A51-4108-AA02-DFA0A04FC94B}">
-              <ma14:wrappingTextBoxFlag xmlns:ma14="http://schemas.microsoft.com/office/mac/drawingml/2011/main" val="1"/>
+              <ma14:wrappingTextBoxFlag xmlns:ma14="http://schemas.microsoft.com/office/mac/drawingml/2011/main" xmlns:a14="http://schemas.microsoft.com/office/drawing/2010/main" xmlns:m="http://schemas.openxmlformats.org/officeDocument/2006/math" xmlns="" val="1"/>
             </a:ext>
           </a:extLst>
         </p:spPr>
@@ -16473,7 +16460,6 @@
             </a:lvl1pPr>
           </a:lstStyle>
           <a:p>
-            <a:pPr/>
             <a:r>
               <a:t>From Conway to LangGraph  •  University of Bologna  •  Dept. of Physics</a:t>
             </a:r>
@@ -16499,7 +16485,7 @@
           </a:ln>
           <a:extLst>
             <a:ext uri="{C572A759-6A51-4108-AA02-DFA0A04FC94B}">
-              <ma14:wrappingTextBoxFlag xmlns:ma14="http://schemas.microsoft.com/office/mac/drawingml/2011/main" val="1"/>
+              <ma14:wrappingTextBoxFlag xmlns:ma14="http://schemas.microsoft.com/office/mac/drawingml/2011/main" xmlns:a14="http://schemas.microsoft.com/office/drawing/2010/main" xmlns:m="http://schemas.openxmlformats.org/officeDocument/2006/math" xmlns="" val="1"/>
             </a:ext>
           </a:extLst>
         </p:spPr>
@@ -16509,7 +16495,7 @@
           </a:bodyPr>
           <a:lstStyle>
             <a:lvl1pPr>
-              <a:defRPr b="1" sz="2800">
+              <a:defRPr sz="2800" b="1">
                 <a:solidFill>
                   <a:srgbClr val="FFFFFF"/>
                 </a:solidFill>
@@ -16521,7 +16507,6 @@
             </a:lvl1pPr>
           </a:lstStyle>
           <a:p>
-            <a:pPr/>
             <a:r>
               <a:t>Neighborhood Pattern Entropy</a:t>
             </a:r>
@@ -16547,7 +16532,7 @@
           </a:ln>
           <a:extLst>
             <a:ext uri="{C572A759-6A51-4108-AA02-DFA0A04FC94B}">
-              <ma14:wrappingTextBoxFlag xmlns:ma14="http://schemas.microsoft.com/office/mac/drawingml/2011/main" val="1"/>
+              <ma14:wrappingTextBoxFlag xmlns:ma14="http://schemas.microsoft.com/office/mac/drawingml/2011/main" xmlns:a14="http://schemas.microsoft.com/office/drawing/2010/main" xmlns:m="http://schemas.openxmlformats.org/officeDocument/2006/math" xmlns="" val="1"/>
             </a:ext>
           </a:extLst>
         </p:spPr>
@@ -16557,7 +16542,7 @@
           </a:bodyPr>
           <a:lstStyle>
             <a:lvl1pPr>
-              <a:defRPr i="1" sz="1200">
+              <a:defRPr sz="1200" i="1">
                 <a:solidFill>
                   <a:srgbClr val="707070"/>
                 </a:solidFill>
@@ -16565,7 +16550,6 @@
             </a:lvl1pPr>
           </a:lstStyle>
           <a:p>
-            <a:pPr/>
             <a:r>
               <a:t>The natural measure for GoL: Moore neighborhood configurations</a:t>
             </a:r>
@@ -16597,7 +16581,7 @@
           <a:bodyPr lIns="45719" rIns="45719"/>
           <a:lstStyle/>
           <a:p>
-            <a:pPr/>
+            <a:endParaRPr/>
           </a:p>
         </p:txBody>
       </p:sp>
@@ -16620,7 +16604,7 @@
           </a:ln>
           <a:extLst>
             <a:ext uri="{C572A759-6A51-4108-AA02-DFA0A04FC94B}">
-              <ma14:wrappingTextBoxFlag xmlns:ma14="http://schemas.microsoft.com/office/mac/drawingml/2011/main" val="1"/>
+              <ma14:wrappingTextBoxFlag xmlns:ma14="http://schemas.microsoft.com/office/mac/drawingml/2011/main" xmlns:a14="http://schemas.microsoft.com/office/drawing/2010/main" xmlns:m="http://schemas.openxmlformats.org/officeDocument/2006/math" xmlns="" val="1"/>
             </a:ext>
           </a:extLst>
         </p:spPr>
@@ -16630,7 +16614,7 @@
           </a:bodyPr>
           <a:lstStyle>
             <a:lvl1pPr>
-              <a:defRPr b="1" sz="1400">
+              <a:defRPr sz="1400" b="1">
                 <a:solidFill>
                   <a:srgbClr val="4A9ECC"/>
                 </a:solidFill>
@@ -16642,7 +16626,6 @@
             </a:lvl1pPr>
           </a:lstStyle>
           <a:p>
-            <a:pPr/>
             <a:r>
               <a:t>Idea</a:t>
             </a:r>
@@ -16668,7 +16651,7 @@
           </a:ln>
           <a:extLst>
             <a:ext uri="{C572A759-6A51-4108-AA02-DFA0A04FC94B}">
-              <ma14:wrappingTextBoxFlag xmlns:ma14="http://schemas.microsoft.com/office/mac/drawingml/2011/main" val="1"/>
+              <ma14:wrappingTextBoxFlag xmlns:ma14="http://schemas.microsoft.com/office/mac/drawingml/2011/main" xmlns:a14="http://schemas.microsoft.com/office/drawing/2010/main" xmlns:m="http://schemas.openxmlformats.org/officeDocument/2006/math" xmlns="" val="1"/>
             </a:ext>
           </a:extLst>
         </p:spPr>
@@ -16705,6 +16688,7 @@
             <a:pPr>
               <a:defRPr sz="1200"/>
             </a:pPr>
+            <a:endParaRPr/>
           </a:p>
           <a:p>
             <a:pPr>
@@ -16746,6 +16730,7 @@
             <a:pPr>
               <a:defRPr sz="1200"/>
             </a:pPr>
+            <a:endParaRPr/>
           </a:p>
           <a:p>
             <a:pPr>
@@ -16786,7 +16771,7 @@
           <a:bodyPr lIns="45719" rIns="45719"/>
           <a:lstStyle/>
           <a:p>
-            <a:pPr/>
+            <a:endParaRPr/>
           </a:p>
         </p:txBody>
       </p:sp>
@@ -16809,7 +16794,7 @@
           </a:ln>
           <a:extLst>
             <a:ext uri="{C572A759-6A51-4108-AA02-DFA0A04FC94B}">
-              <ma14:wrappingTextBoxFlag xmlns:ma14="http://schemas.microsoft.com/office/mac/drawingml/2011/main" val="1"/>
+              <ma14:wrappingTextBoxFlag xmlns:ma14="http://schemas.microsoft.com/office/mac/drawingml/2011/main" xmlns:a14="http://schemas.microsoft.com/office/drawing/2010/main" xmlns:m="http://schemas.openxmlformats.org/officeDocument/2006/math" xmlns="" val="1"/>
             </a:ext>
           </a:extLst>
         </p:spPr>
@@ -16819,7 +16804,7 @@
           </a:bodyPr>
           <a:lstStyle>
             <a:lvl1pPr>
-              <a:defRPr b="1" sz="1100">
+              <a:defRPr sz="1100" b="1">
                 <a:solidFill>
                   <a:srgbClr val="E8B931"/>
                 </a:solidFill>
@@ -16831,7 +16816,6 @@
             </a:lvl1pPr>
           </a:lstStyle>
           <a:p>
-            <a:pPr/>
             <a:r>
               <a:t>Full pattern entropy</a:t>
             </a:r>
@@ -16857,7 +16841,7 @@
           </a:ln>
           <a:extLst>
             <a:ext uri="{C572A759-6A51-4108-AA02-DFA0A04FC94B}">
-              <ma14:wrappingTextBoxFlag xmlns:ma14="http://schemas.microsoft.com/office/mac/drawingml/2011/main" val="1"/>
+              <ma14:wrappingTextBoxFlag xmlns:ma14="http://schemas.microsoft.com/office/mac/drawingml/2011/main" xmlns:a14="http://schemas.microsoft.com/office/drawing/2010/main" xmlns:m="http://schemas.openxmlformats.org/officeDocument/2006/math" xmlns="" val="1"/>
             </a:ext>
           </a:extLst>
         </p:spPr>
@@ -16917,7 +16901,7 @@
           <a:bodyPr lIns="45719" rIns="45719"/>
           <a:lstStyle/>
           <a:p>
-            <a:pPr/>
+            <a:endParaRPr/>
           </a:p>
         </p:txBody>
       </p:sp>
@@ -16940,7 +16924,7 @@
           </a:ln>
           <a:extLst>
             <a:ext uri="{C572A759-6A51-4108-AA02-DFA0A04FC94B}">
-              <ma14:wrappingTextBoxFlag xmlns:ma14="http://schemas.microsoft.com/office/mac/drawingml/2011/main" val="1"/>
+              <ma14:wrappingTextBoxFlag xmlns:ma14="http://schemas.microsoft.com/office/mac/drawingml/2011/main" xmlns:a14="http://schemas.microsoft.com/office/drawing/2010/main" xmlns:m="http://schemas.openxmlformats.org/officeDocument/2006/math" xmlns="" val="1"/>
             </a:ext>
           </a:extLst>
         </p:spPr>
@@ -16950,7 +16934,7 @@
           </a:bodyPr>
           <a:lstStyle>
             <a:lvl1pPr>
-              <a:defRPr b="1" sz="1100">
+              <a:defRPr sz="1100" b="1">
                 <a:solidFill>
                   <a:srgbClr val="E8B931"/>
                 </a:solidFill>
@@ -16962,7 +16946,6 @@
             </a:lvl1pPr>
           </a:lstStyle>
           <a:p>
-            <a:pPr/>
             <a:r>
               <a:t>Sum-based entropy</a:t>
             </a:r>
@@ -16988,7 +16971,7 @@
           </a:ln>
           <a:extLst>
             <a:ext uri="{C572A759-6A51-4108-AA02-DFA0A04FC94B}">
-              <ma14:wrappingTextBoxFlag xmlns:ma14="http://schemas.microsoft.com/office/mac/drawingml/2011/main" val="1"/>
+              <ma14:wrappingTextBoxFlag xmlns:ma14="http://schemas.microsoft.com/office/mac/drawingml/2011/main" xmlns:a14="http://schemas.microsoft.com/office/drawing/2010/main" xmlns:m="http://schemas.openxmlformats.org/officeDocument/2006/math" xmlns="" val="1"/>
             </a:ext>
           </a:extLst>
         </p:spPr>
@@ -17048,7 +17031,7 @@
           <a:bodyPr lIns="45719" rIns="45719"/>
           <a:lstStyle/>
           <a:p>
-            <a:pPr/>
+            <a:endParaRPr/>
           </a:p>
         </p:txBody>
       </p:sp>
@@ -17071,7 +17054,7 @@
           </a:ln>
           <a:extLst>
             <a:ext uri="{C572A759-6A51-4108-AA02-DFA0A04FC94B}">
-              <ma14:wrappingTextBoxFlag xmlns:ma14="http://schemas.microsoft.com/office/mac/drawingml/2011/main" val="1"/>
+              <ma14:wrappingTextBoxFlag xmlns:ma14="http://schemas.microsoft.com/office/mac/drawingml/2011/main" xmlns:a14="http://schemas.microsoft.com/office/drawing/2010/main" xmlns:m="http://schemas.openxmlformats.org/officeDocument/2006/math" xmlns="" val="1"/>
             </a:ext>
           </a:extLst>
         </p:spPr>
@@ -17081,7 +17064,7 @@
           </a:bodyPr>
           <a:lstStyle>
             <a:lvl1pPr>
-              <a:defRPr b="1" sz="1200">
+              <a:defRPr sz="1200" b="1">
                 <a:solidFill>
                   <a:srgbClr val="4A9ECC"/>
                 </a:solidFill>
@@ -17093,7 +17076,6 @@
             </a:lvl1pPr>
           </a:lstStyle>
           <a:p>
-            <a:pPr/>
             <a:r>
               <a:t>Moore Neighborhood</a:t>
             </a:r>
@@ -17127,7 +17109,7 @@
           <a:bodyPr lIns="45719" rIns="45719"/>
           <a:lstStyle/>
           <a:p>
-            <a:pPr/>
+            <a:endParaRPr/>
           </a:p>
         </p:txBody>
       </p:sp>
@@ -17158,7 +17140,7 @@
           <a:bodyPr lIns="45719" rIns="45719"/>
           <a:lstStyle/>
           <a:p>
-            <a:pPr/>
+            <a:endParaRPr/>
           </a:p>
         </p:txBody>
       </p:sp>
@@ -17189,7 +17171,7 @@
           <a:bodyPr lIns="45719" rIns="45719"/>
           <a:lstStyle/>
           <a:p>
-            <a:pPr/>
+            <a:endParaRPr/>
           </a:p>
         </p:txBody>
       </p:sp>
@@ -17220,7 +17202,7 @@
           <a:bodyPr lIns="45719" rIns="45719"/>
           <a:lstStyle/>
           <a:p>
-            <a:pPr/>
+            <a:endParaRPr/>
           </a:p>
         </p:txBody>
       </p:sp>
@@ -17251,7 +17233,7 @@
           <a:bodyPr lIns="45719" rIns="45719"/>
           <a:lstStyle/>
           <a:p>
-            <a:pPr/>
+            <a:endParaRPr/>
           </a:p>
         </p:txBody>
       </p:sp>
@@ -17282,7 +17264,7 @@
           <a:bodyPr lIns="45719" rIns="45719"/>
           <a:lstStyle/>
           <a:p>
-            <a:pPr/>
+            <a:endParaRPr/>
           </a:p>
         </p:txBody>
       </p:sp>
@@ -17313,7 +17295,7 @@
           <a:bodyPr lIns="45719" rIns="45719"/>
           <a:lstStyle/>
           <a:p>
-            <a:pPr/>
+            <a:endParaRPr/>
           </a:p>
         </p:txBody>
       </p:sp>
@@ -17344,7 +17326,7 @@
           <a:bodyPr lIns="45719" rIns="45719"/>
           <a:lstStyle/>
           <a:p>
-            <a:pPr/>
+            <a:endParaRPr/>
           </a:p>
         </p:txBody>
       </p:sp>
@@ -17375,7 +17357,7 @@
           <a:bodyPr lIns="45719" rIns="45719"/>
           <a:lstStyle/>
           <a:p>
-            <a:pPr/>
+            <a:endParaRPr/>
           </a:p>
         </p:txBody>
       </p:sp>
@@ -17398,7 +17380,7 @@
           </a:ln>
           <a:extLst>
             <a:ext uri="{C572A759-6A51-4108-AA02-DFA0A04FC94B}">
-              <ma14:wrappingTextBoxFlag xmlns:ma14="http://schemas.microsoft.com/office/mac/drawingml/2011/main" val="1"/>
+              <ma14:wrappingTextBoxFlag xmlns:ma14="http://schemas.microsoft.com/office/mac/drawingml/2011/main" xmlns:a14="http://schemas.microsoft.com/office/drawing/2010/main" xmlns:m="http://schemas.openxmlformats.org/officeDocument/2006/math" xmlns="" val="1"/>
             </a:ext>
           </a:extLst>
         </p:spPr>
@@ -17416,7 +17398,6 @@
             </a:lvl1pPr>
           </a:lstStyle>
           <a:p>
-            <a:pPr/>
             <a:r>
               <a:t>center cell</a:t>
             </a:r>
@@ -17442,7 +17423,7 @@
           </a:ln>
           <a:extLst>
             <a:ext uri="{C572A759-6A51-4108-AA02-DFA0A04FC94B}">
-              <ma14:wrappingTextBoxFlag xmlns:ma14="http://schemas.microsoft.com/office/mac/drawingml/2011/main" val="1"/>
+              <ma14:wrappingTextBoxFlag xmlns:ma14="http://schemas.microsoft.com/office/mac/drawingml/2011/main" xmlns:a14="http://schemas.microsoft.com/office/drawing/2010/main" xmlns:m="http://schemas.openxmlformats.org/officeDocument/2006/math" xmlns="" val="1"/>
             </a:ext>
           </a:extLst>
         </p:spPr>
@@ -17460,7 +17441,6 @@
             </a:lvl1pPr>
           </a:lstStyle>
           <a:p>
-            <a:pPr/>
             <a:r>
               <a:t>+ 8 neighbors = 9 bits</a:t>
             </a:r>
@@ -17472,18 +17452,19 @@
   <p:clrMapOvr>
     <a:masterClrMapping/>
   </p:clrMapOvr>
-  <p:transition xmlns:p14="http://schemas.microsoft.com/office/powerpoint/2010/main" spd="med" advClick="1"/>
+  <p:transition spd="med"/>
 </p:sld>
 </file>
 
 <file path=ppt/slides/slide8.xml><?xml version="1.0" encoding="utf-8"?>
-<p:sld xmlns:a="http://schemas.openxmlformats.org/drawingml/2006/main" xmlns:r="http://schemas.openxmlformats.org/officeDocument/2006/relationships" xmlns:p="http://schemas.openxmlformats.org/presentationml/2006/main" xmlns:m="http://schemas.openxmlformats.org/officeDocument/2006/math" xmlns:a14="http://schemas.microsoft.com/office/drawing/2010/main" showMasterSp="1" showMasterPhAnim="1">
+<p:sld xmlns:a="http://schemas.openxmlformats.org/drawingml/2006/main" xmlns:r="http://schemas.openxmlformats.org/officeDocument/2006/relationships" xmlns:p="http://schemas.openxmlformats.org/presentationml/2006/main">
   <p:cSld>
     <p:bg>
       <p:bgPr>
         <a:solidFill>
           <a:srgbClr val="1A1A1A"/>
         </a:solidFill>
+        <a:effectLst/>
       </p:bgPr>
     </p:bg>
     <p:spTree>
@@ -17525,7 +17506,7 @@
           <a:bodyPr lIns="45719" rIns="45719"/>
           <a:lstStyle/>
           <a:p>
-            <a:pPr/>
+            <a:endParaRPr/>
           </a:p>
         </p:txBody>
       </p:sp>
@@ -17548,7 +17529,7 @@
           </a:ln>
           <a:extLst>
             <a:ext uri="{C572A759-6A51-4108-AA02-DFA0A04FC94B}">
-              <ma14:wrappingTextBoxFlag xmlns:ma14="http://schemas.microsoft.com/office/mac/drawingml/2011/main" val="1"/>
+              <ma14:wrappingTextBoxFlag xmlns:ma14="http://schemas.microsoft.com/office/mac/drawingml/2011/main" xmlns:a14="http://schemas.microsoft.com/office/drawing/2010/main" xmlns:m="http://schemas.openxmlformats.org/officeDocument/2006/math" xmlns="" val="1"/>
             </a:ext>
           </a:extLst>
         </p:spPr>
@@ -17566,7 +17547,6 @@
             </a:lvl1pPr>
           </a:lstStyle>
           <a:p>
-            <a:pPr/>
             <a:r>
               <a:t>From Conway to LangGraph  •  University of Bologna  •  Dept. of Physics</a:t>
             </a:r>
@@ -17592,7 +17572,7 @@
           </a:ln>
           <a:extLst>
             <a:ext uri="{C572A759-6A51-4108-AA02-DFA0A04FC94B}">
-              <ma14:wrappingTextBoxFlag xmlns:ma14="http://schemas.microsoft.com/office/mac/drawingml/2011/main" val="1"/>
+              <ma14:wrappingTextBoxFlag xmlns:ma14="http://schemas.microsoft.com/office/mac/drawingml/2011/main" xmlns:a14="http://schemas.microsoft.com/office/drawing/2010/main" xmlns:m="http://schemas.openxmlformats.org/officeDocument/2006/math" xmlns="" val="1"/>
             </a:ext>
           </a:extLst>
         </p:spPr>
@@ -17602,7 +17582,7 @@
           </a:bodyPr>
           <a:lstStyle>
             <a:lvl1pPr>
-              <a:defRPr b="1" sz="2800">
+              <a:defRPr sz="2800" b="1">
                 <a:solidFill>
                   <a:srgbClr val="FFFFFF"/>
                 </a:solidFill>
@@ -17614,7 +17594,6 @@
             </a:lvl1pPr>
           </a:lstStyle>
           <a:p>
-            <a:pPr/>
             <a:r>
               <a:t>Temporal Entropy</a:t>
             </a:r>
@@ -17640,7 +17619,7 @@
           </a:ln>
           <a:extLst>
             <a:ext uri="{C572A759-6A51-4108-AA02-DFA0A04FC94B}">
-              <ma14:wrappingTextBoxFlag xmlns:ma14="http://schemas.microsoft.com/office/mac/drawingml/2011/main" val="1"/>
+              <ma14:wrappingTextBoxFlag xmlns:ma14="http://schemas.microsoft.com/office/mac/drawingml/2011/main" xmlns:a14="http://schemas.microsoft.com/office/drawing/2010/main" xmlns:m="http://schemas.openxmlformats.org/officeDocument/2006/math" xmlns="" val="1"/>
             </a:ext>
           </a:extLst>
         </p:spPr>
@@ -17650,7 +17629,7 @@
           </a:bodyPr>
           <a:lstStyle>
             <a:lvl1pPr>
-              <a:defRPr i="1" sz="1200">
+              <a:defRPr sz="1200" i="1">
                 <a:solidFill>
                   <a:srgbClr val="707070"/>
                 </a:solidFill>
@@ -17658,7 +17637,6 @@
             </a:lvl1pPr>
           </a:lstStyle>
           <a:p>
-            <a:pPr/>
             <a:r>
               <a:t>Tracking how each cell fluctuates over time</a:t>
             </a:r>
@@ -17690,7 +17668,7 @@
           <a:bodyPr lIns="45719" rIns="45719"/>
           <a:lstStyle/>
           <a:p>
-            <a:pPr/>
+            <a:endParaRPr/>
           </a:p>
         </p:txBody>
       </p:sp>
@@ -17713,7 +17691,7 @@
           </a:ln>
           <a:extLst>
             <a:ext uri="{C572A759-6A51-4108-AA02-DFA0A04FC94B}">
-              <ma14:wrappingTextBoxFlag xmlns:ma14="http://schemas.microsoft.com/office/mac/drawingml/2011/main" val="1"/>
+              <ma14:wrappingTextBoxFlag xmlns:ma14="http://schemas.microsoft.com/office/mac/drawingml/2011/main" xmlns:a14="http://schemas.microsoft.com/office/drawing/2010/main" xmlns:m="http://schemas.openxmlformats.org/officeDocument/2006/math" xmlns="" val="1"/>
             </a:ext>
           </a:extLst>
         </p:spPr>
@@ -17742,6 +17720,7 @@
             <a:pPr>
               <a:defRPr sz="1300"/>
             </a:pPr>
+            <a:endParaRPr/>
           </a:p>
           <a:p>
             <a:pPr>
@@ -17763,6 +17742,7 @@
             <a:pPr>
               <a:defRPr sz="1300"/>
             </a:pPr>
+            <a:endParaRPr/>
           </a:p>
           <a:p>
             <a:pPr>
@@ -17784,6 +17764,7 @@
             <a:pPr>
               <a:defRPr sz="1300"/>
             </a:pPr>
+            <a:endParaRPr/>
           </a:p>
           <a:p>
             <a:pPr>
@@ -17805,6 +17786,7 @@
             <a:pPr>
               <a:defRPr sz="1300"/>
             </a:pPr>
+            <a:endParaRPr/>
           </a:p>
           <a:p>
             <a:pPr>
@@ -17849,7 +17831,7 @@
           <a:bodyPr lIns="45719" rIns="45719"/>
           <a:lstStyle/>
           <a:p>
-            <a:pPr/>
+            <a:endParaRPr/>
           </a:p>
         </p:txBody>
       </p:sp>
@@ -17872,7 +17854,7 @@
           </a:ln>
           <a:extLst>
             <a:ext uri="{C572A759-6A51-4108-AA02-DFA0A04FC94B}">
-              <ma14:wrappingTextBoxFlag xmlns:ma14="http://schemas.microsoft.com/office/mac/drawingml/2011/main" val="1"/>
+              <ma14:wrappingTextBoxFlag xmlns:ma14="http://schemas.microsoft.com/office/mac/drawingml/2011/main" xmlns:a14="http://schemas.microsoft.com/office/drawing/2010/main" xmlns:m="http://schemas.openxmlformats.org/officeDocument/2006/math" xmlns="" val="1"/>
             </a:ext>
           </a:extLst>
         </p:spPr>
@@ -17882,7 +17864,7 @@
           </a:bodyPr>
           <a:lstStyle>
             <a:lvl1pPr>
-              <a:defRPr b="1" sz="1400">
+              <a:defRPr sz="1400" b="1">
                 <a:solidFill>
                   <a:srgbClr val="E8B931"/>
                 </a:solidFill>
@@ -17894,7 +17876,6 @@
             </a:lvl1pPr>
           </a:lstStyle>
           <a:p>
-            <a:pPr/>
             <a:r>
               <a:t>Interpretation</a:t>
             </a:r>
@@ -17920,7 +17901,7 @@
           </a:ln>
           <a:extLst>
             <a:ext uri="{C572A759-6A51-4108-AA02-DFA0A04FC94B}">
-              <ma14:wrappingTextBoxFlag xmlns:ma14="http://schemas.microsoft.com/office/mac/drawingml/2011/main" val="1"/>
+              <ma14:wrappingTextBoxFlag xmlns:ma14="http://schemas.microsoft.com/office/mac/drawingml/2011/main" xmlns:a14="http://schemas.microsoft.com/office/drawing/2010/main" xmlns:m="http://schemas.openxmlformats.org/officeDocument/2006/math" xmlns="" val="1"/>
             </a:ext>
           </a:extLst>
         </p:spPr>
@@ -17931,7 +17912,7 @@
           <a:lstStyle/>
           <a:p>
             <a:pPr>
-              <a:defRPr b="1" sz="1100">
+              <a:defRPr sz="1100" b="1">
                 <a:solidFill>
                   <a:srgbClr val="44AA66"/>
                 </a:solidFill>
@@ -17953,6 +17934,11 @@
             <a:pPr>
               <a:defRPr sz="600"/>
             </a:pPr>
+            <a:endParaRPr b="0">
+              <a:solidFill>
+                <a:srgbClr val="A0A0A0"/>
+              </a:solidFill>
+            </a:endParaRPr>
           </a:p>
           <a:p>
             <a:pPr>
@@ -17962,7 +17948,7 @@
           </a:p>
           <a:p>
             <a:pPr>
-              <a:defRPr b="1" sz="1100">
+              <a:defRPr sz="1100" b="1">
                 <a:solidFill>
                   <a:srgbClr val="CC4444"/>
                 </a:solidFill>
@@ -17984,6 +17970,11 @@
             <a:pPr>
               <a:defRPr sz="600"/>
             </a:pPr>
+            <a:endParaRPr b="0">
+              <a:solidFill>
+                <a:srgbClr val="A0A0A0"/>
+              </a:solidFill>
+            </a:endParaRPr>
           </a:p>
           <a:p>
             <a:pPr>
@@ -17993,7 +17984,7 @@
           </a:p>
           <a:p>
             <a:pPr>
-              <a:defRPr b="1" sz="1100">
+              <a:defRPr sz="1100" b="1">
                 <a:solidFill>
                   <a:srgbClr val="D4853B"/>
                 </a:solidFill>
@@ -18038,7 +18029,7 @@
           <a:bodyPr lIns="45719" rIns="45719"/>
           <a:lstStyle/>
           <a:p>
-            <a:pPr/>
+            <a:endParaRPr/>
           </a:p>
         </p:txBody>
       </p:sp>
@@ -18067,7 +18058,7 @@
           <a:bodyPr lIns="45719" rIns="45719"/>
           <a:lstStyle/>
           <a:p>
-            <a:pPr/>
+            <a:endParaRPr/>
           </a:p>
         </p:txBody>
       </p:sp>
@@ -18090,7 +18081,7 @@
           </a:ln>
           <a:extLst>
             <a:ext uri="{C572A759-6A51-4108-AA02-DFA0A04FC94B}">
-              <ma14:wrappingTextBoxFlag xmlns:ma14="http://schemas.microsoft.com/office/mac/drawingml/2011/main" val="1"/>
+              <ma14:wrappingTextBoxFlag xmlns:ma14="http://schemas.microsoft.com/office/mac/drawingml/2011/main" xmlns:a14="http://schemas.microsoft.com/office/drawing/2010/main" xmlns:m="http://schemas.openxmlformats.org/officeDocument/2006/math" xmlns="" val="1"/>
             </a:ext>
           </a:extLst>
         </p:spPr>
@@ -18101,7 +18092,7 @@
           <a:lstStyle/>
           <a:p>
             <a:pPr>
-              <a:defRPr b="1" sz="1100">
+              <a:defRPr sz="1100" b="1">
                 <a:solidFill>
                   <a:srgbClr val="4A9ECC"/>
                 </a:solidFill>
@@ -18126,18 +18117,19 @@
   <p:clrMapOvr>
     <a:masterClrMapping/>
   </p:clrMapOvr>
-  <p:transition xmlns:p14="http://schemas.microsoft.com/office/powerpoint/2010/main" spd="med" advClick="1"/>
+  <p:transition spd="med"/>
 </p:sld>
 </file>
 
 <file path=ppt/slides/slide9.xml><?xml version="1.0" encoding="utf-8"?>
-<p:sld xmlns:a="http://schemas.openxmlformats.org/drawingml/2006/main" xmlns:r="http://schemas.openxmlformats.org/officeDocument/2006/relationships" xmlns:p="http://schemas.openxmlformats.org/presentationml/2006/main" xmlns:m="http://schemas.openxmlformats.org/officeDocument/2006/math" xmlns:a14="http://schemas.microsoft.com/office/drawing/2010/main" showMasterSp="1" showMasterPhAnim="1">
+<p:sld xmlns:a="http://schemas.openxmlformats.org/drawingml/2006/main" xmlns:r="http://schemas.openxmlformats.org/officeDocument/2006/relationships" xmlns:p="http://schemas.openxmlformats.org/presentationml/2006/main">
   <p:cSld>
     <p:bg>
       <p:bgPr>
         <a:solidFill>
           <a:srgbClr val="1A1A1A"/>
         </a:solidFill>
+        <a:effectLst/>
       </p:bgPr>
     </p:bg>
     <p:spTree>
@@ -18179,7 +18171,7 @@
           <a:bodyPr lIns="45719" rIns="45719"/>
           <a:lstStyle/>
           <a:p>
-            <a:pPr/>
+            <a:endParaRPr/>
           </a:p>
         </p:txBody>
       </p:sp>
@@ -18202,7 +18194,7 @@
           </a:ln>
           <a:extLst>
             <a:ext uri="{C572A759-6A51-4108-AA02-DFA0A04FC94B}">
-              <ma14:wrappingTextBoxFlag xmlns:ma14="http://schemas.microsoft.com/office/mac/drawingml/2011/main" val="1"/>
+              <ma14:wrappingTextBoxFlag xmlns:ma14="http://schemas.microsoft.com/office/mac/drawingml/2011/main" xmlns:a14="http://schemas.microsoft.com/office/drawing/2010/main" xmlns:m="http://schemas.openxmlformats.org/officeDocument/2006/math" xmlns="" val="1"/>
             </a:ext>
           </a:extLst>
         </p:spPr>
@@ -18220,7 +18212,6 @@
             </a:lvl1pPr>
           </a:lstStyle>
           <a:p>
-            <a:pPr/>
             <a:r>
               <a:t>From Conway to LangGraph  •  University of Bologna  •  Dept. of Physics</a:t>
             </a:r>
@@ -18246,7 +18237,7 @@
           </a:ln>
           <a:extLst>
             <a:ext uri="{C572A759-6A51-4108-AA02-DFA0A04FC94B}">
-              <ma14:wrappingTextBoxFlag xmlns:ma14="http://schemas.microsoft.com/office/mac/drawingml/2011/main" val="1"/>
+              <ma14:wrappingTextBoxFlag xmlns:ma14="http://schemas.microsoft.com/office/mac/drawingml/2011/main" xmlns:a14="http://schemas.microsoft.com/office/drawing/2010/main" xmlns:m="http://schemas.openxmlformats.org/officeDocument/2006/math" xmlns="" val="1"/>
             </a:ext>
           </a:extLst>
         </p:spPr>
@@ -18256,7 +18247,7 @@
           </a:bodyPr>
           <a:lstStyle>
             <a:lvl1pPr>
-              <a:defRPr b="1" sz="2800">
+              <a:defRPr sz="2800" b="1">
                 <a:solidFill>
                   <a:srgbClr val="FFFFFF"/>
                 </a:solidFill>
@@ -18268,7 +18259,6 @@
             </a:lvl1pPr>
           </a:lstStyle>
           <a:p>
-            <a:pPr/>
             <a:r>
               <a:t>Entropy Dynamics in GoL</a:t>
             </a:r>
@@ -18294,7 +18284,7 @@
           </a:ln>
           <a:extLst>
             <a:ext uri="{C572A759-6A51-4108-AA02-DFA0A04FC94B}">
-              <ma14:wrappingTextBoxFlag xmlns:ma14="http://schemas.microsoft.com/office/mac/drawingml/2011/main" val="1"/>
+              <ma14:wrappingTextBoxFlag xmlns:ma14="http://schemas.microsoft.com/office/mac/drawingml/2011/main" xmlns:a14="http://schemas.microsoft.com/office/drawing/2010/main" xmlns:m="http://schemas.openxmlformats.org/officeDocument/2006/math" xmlns="" val="1"/>
             </a:ext>
           </a:extLst>
         </p:spPr>
@@ -18304,7 +18294,7 @@
           </a:bodyPr>
           <a:lstStyle>
             <a:lvl1pPr>
-              <a:defRPr i="1" sz="1200">
+              <a:defRPr sz="1200" i="1">
                 <a:solidFill>
                   <a:srgbClr val="707070"/>
                 </a:solidFill>
@@ -18312,7 +18302,6 @@
             </a:lvl1pPr>
           </a:lstStyle>
           <a:p>
-            <a:pPr/>
             <a:r>
               <a:t>What happens when you start from a random soup?</a:t>
             </a:r>
@@ -18344,7 +18333,7 @@
           <a:bodyPr lIns="45719" rIns="45719"/>
           <a:lstStyle/>
           <a:p>
-            <a:pPr/>
+            <a:endParaRPr/>
           </a:p>
         </p:txBody>
       </p:sp>
@@ -18373,7 +18362,7 @@
           <a:bodyPr lIns="45719" rIns="45719"/>
           <a:lstStyle/>
           <a:p>
-            <a:pPr/>
+            <a:endParaRPr/>
           </a:p>
         </p:txBody>
       </p:sp>
@@ -18396,7 +18385,7 @@
           </a:ln>
           <a:extLst>
             <a:ext uri="{C572A759-6A51-4108-AA02-DFA0A04FC94B}">
-              <ma14:wrappingTextBoxFlag xmlns:ma14="http://schemas.microsoft.com/office/mac/drawingml/2011/main" val="1"/>
+              <ma14:wrappingTextBoxFlag xmlns:ma14="http://schemas.microsoft.com/office/mac/drawingml/2011/main" xmlns:a14="http://schemas.microsoft.com/office/drawing/2010/main" xmlns:m="http://schemas.openxmlformats.org/officeDocument/2006/math" xmlns="" val="1"/>
             </a:ext>
           </a:extLst>
         </p:spPr>
@@ -18414,7 +18403,6 @@
             </a:lvl1pPr>
           </a:lstStyle>
           <a:p>
-            <a:pPr/>
             <a:r>
               <a:t>→</a:t>
             </a:r>
@@ -18440,7 +18428,7 @@
           </a:ln>
           <a:extLst>
             <a:ext uri="{C572A759-6A51-4108-AA02-DFA0A04FC94B}">
-              <ma14:wrappingTextBoxFlag xmlns:ma14="http://schemas.microsoft.com/office/mac/drawingml/2011/main" val="1"/>
+              <ma14:wrappingTextBoxFlag xmlns:ma14="http://schemas.microsoft.com/office/mac/drawingml/2011/main" xmlns:a14="http://schemas.microsoft.com/office/drawing/2010/main" xmlns:m="http://schemas.openxmlformats.org/officeDocument/2006/math" xmlns="" val="1"/>
             </a:ext>
           </a:extLst>
         </p:spPr>
@@ -18450,7 +18438,7 @@
           </a:bodyPr>
           <a:lstStyle>
             <a:lvl1pPr>
-              <a:defRPr b="1" sz="1000">
+              <a:defRPr sz="1000" b="1">
                 <a:solidFill>
                   <a:srgbClr val="CC4444"/>
                 </a:solidFill>
@@ -18458,7 +18446,6 @@
             </a:lvl1pPr>
           </a:lstStyle>
           <a:p>
-            <a:pPr/>
             <a:r>
               <a:t>Phase I</a:t>
             </a:r>
@@ -18484,7 +18471,7 @@
           </a:ln>
           <a:extLst>
             <a:ext uri="{C572A759-6A51-4108-AA02-DFA0A04FC94B}">
-              <ma14:wrappingTextBoxFlag xmlns:ma14="http://schemas.microsoft.com/office/mac/drawingml/2011/main" val="1"/>
+              <ma14:wrappingTextBoxFlag xmlns:ma14="http://schemas.microsoft.com/office/mac/drawingml/2011/main" xmlns:a14="http://schemas.microsoft.com/office/drawing/2010/main" xmlns:m="http://schemas.openxmlformats.org/officeDocument/2006/math" xmlns="" val="1"/>
             </a:ext>
           </a:extLst>
         </p:spPr>
@@ -18506,7 +18493,6 @@
             </a:lvl1pPr>
           </a:lstStyle>
           <a:p>
-            <a:pPr/>
             <a:r>
               <a:t>t = 0–10</a:t>
             </a:r>
@@ -18532,7 +18518,7 @@
           </a:ln>
           <a:extLst>
             <a:ext uri="{C572A759-6A51-4108-AA02-DFA0A04FC94B}">
-              <ma14:wrappingTextBoxFlag xmlns:ma14="http://schemas.microsoft.com/office/mac/drawingml/2011/main" val="1"/>
+              <ma14:wrappingTextBoxFlag xmlns:ma14="http://schemas.microsoft.com/office/mac/drawingml/2011/main" xmlns:a14="http://schemas.microsoft.com/office/drawing/2010/main" xmlns:m="http://schemas.openxmlformats.org/officeDocument/2006/math" xmlns="" val="1"/>
             </a:ext>
           </a:extLst>
         </p:spPr>
@@ -18542,7 +18528,7 @@
           </a:bodyPr>
           <a:lstStyle>
             <a:lvl1pPr>
-              <a:defRPr b="1" sz="1600">
+              <a:defRPr sz="1600" b="1">
                 <a:solidFill>
                   <a:srgbClr val="FFFFFF"/>
                 </a:solidFill>
@@ -18554,7 +18540,6 @@
             </a:lvl1pPr>
           </a:lstStyle>
           <a:p>
-            <a:pPr/>
             <a:r>
               <a:t>Chaos</a:t>
             </a:r>
@@ -18580,7 +18565,7 @@
           </a:ln>
           <a:extLst>
             <a:ext uri="{C572A759-6A51-4108-AA02-DFA0A04FC94B}">
-              <ma14:wrappingTextBoxFlag xmlns:ma14="http://schemas.microsoft.com/office/mac/drawingml/2011/main" val="1"/>
+              <ma14:wrappingTextBoxFlag xmlns:ma14="http://schemas.microsoft.com/office/mac/drawingml/2011/main" xmlns:a14="http://schemas.microsoft.com/office/drawing/2010/main" xmlns:m="http://schemas.openxmlformats.org/officeDocument/2006/math" xmlns="" val="1"/>
             </a:ext>
           </a:extLst>
         </p:spPr>
@@ -18652,7 +18637,7 @@
           <a:bodyPr lIns="45719" rIns="45719"/>
           <a:lstStyle/>
           <a:p>
-            <a:pPr/>
+            <a:endParaRPr/>
           </a:p>
         </p:txBody>
       </p:sp>
@@ -18681,7 +18666,7 @@
           <a:bodyPr lIns="45719" rIns="45719"/>
           <a:lstStyle/>
           <a:p>
-            <a:pPr/>
+            <a:endParaRPr/>
           </a:p>
         </p:txBody>
       </p:sp>
@@ -18704,7 +18689,7 @@
           </a:ln>
           <a:extLst>
             <a:ext uri="{C572A759-6A51-4108-AA02-DFA0A04FC94B}">
-              <ma14:wrappingTextBoxFlag xmlns:ma14="http://schemas.microsoft.com/office/mac/drawingml/2011/main" val="1"/>
+              <ma14:wrappingTextBoxFlag xmlns:ma14="http://schemas.microsoft.com/office/mac/drawingml/2011/main" xmlns:a14="http://schemas.microsoft.com/office/drawing/2010/main" xmlns:m="http://schemas.openxmlformats.org/officeDocument/2006/math" xmlns="" val="1"/>
             </a:ext>
           </a:extLst>
         </p:spPr>
@@ -18722,7 +18707,6 @@
             </a:lvl1pPr>
           </a:lstStyle>
           <a:p>
-            <a:pPr/>
             <a:r>
               <a:t>→</a:t>
             </a:r>
@@ -18748,7 +18732,7 @@
           </a:ln>
           <a:extLst>
             <a:ext uri="{C572A759-6A51-4108-AA02-DFA0A04FC94B}">
-              <ma14:wrappingTextBoxFlag xmlns:ma14="http://schemas.microsoft.com/office/mac/drawingml/2011/main" val="1"/>
+              <ma14:wrappingTextBoxFlag xmlns:ma14="http://schemas.microsoft.com/office/mac/drawingml/2011/main" xmlns:a14="http://schemas.microsoft.com/office/drawing/2010/main" xmlns:m="http://schemas.openxmlformats.org/officeDocument/2006/math" xmlns="" val="1"/>
             </a:ext>
           </a:extLst>
         </p:spPr>
@@ -18758,7 +18742,7 @@
           </a:bodyPr>
           <a:lstStyle>
             <a:lvl1pPr>
-              <a:defRPr b="1" sz="1000">
+              <a:defRPr sz="1000" b="1">
                 <a:solidFill>
                   <a:srgbClr val="D4853B"/>
                 </a:solidFill>
@@ -18766,7 +18750,6 @@
             </a:lvl1pPr>
           </a:lstStyle>
           <a:p>
-            <a:pPr/>
             <a:r>
               <a:t>Phase II</a:t>
             </a:r>
@@ -18792,7 +18775,7 @@
           </a:ln>
           <a:extLst>
             <a:ext uri="{C572A759-6A51-4108-AA02-DFA0A04FC94B}">
-              <ma14:wrappingTextBoxFlag xmlns:ma14="http://schemas.microsoft.com/office/mac/drawingml/2011/main" val="1"/>
+              <ma14:wrappingTextBoxFlag xmlns:ma14="http://schemas.microsoft.com/office/mac/drawingml/2011/main" xmlns:a14="http://schemas.microsoft.com/office/drawing/2010/main" xmlns:m="http://schemas.openxmlformats.org/officeDocument/2006/math" xmlns="" val="1"/>
             </a:ext>
           </a:extLst>
         </p:spPr>
@@ -18814,7 +18797,6 @@
             </a:lvl1pPr>
           </a:lstStyle>
           <a:p>
-            <a:pPr/>
             <a:r>
               <a:t>t = 10–100</a:t>
             </a:r>
@@ -18840,7 +18822,7 @@
           </a:ln>
           <a:extLst>
             <a:ext uri="{C572A759-6A51-4108-AA02-DFA0A04FC94B}">
-              <ma14:wrappingTextBoxFlag xmlns:ma14="http://schemas.microsoft.com/office/mac/drawingml/2011/main" val="1"/>
+              <ma14:wrappingTextBoxFlag xmlns:ma14="http://schemas.microsoft.com/office/mac/drawingml/2011/main" xmlns:a14="http://schemas.microsoft.com/office/drawing/2010/main" xmlns:m="http://schemas.openxmlformats.org/officeDocument/2006/math" xmlns="" val="1"/>
             </a:ext>
           </a:extLst>
         </p:spPr>
@@ -18850,7 +18832,7 @@
           </a:bodyPr>
           <a:lstStyle>
             <a:lvl1pPr>
-              <a:defRPr b="1" sz="1600">
+              <a:defRPr sz="1600" b="1">
                 <a:solidFill>
                   <a:srgbClr val="FFFFFF"/>
                 </a:solidFill>
@@ -18862,7 +18844,6 @@
             </a:lvl1pPr>
           </a:lstStyle>
           <a:p>
-            <a:pPr/>
             <a:r>
               <a:t>Self-Organization</a:t>
             </a:r>
@@ -18888,7 +18869,7 @@
           </a:ln>
           <a:extLst>
             <a:ext uri="{C572A759-6A51-4108-AA02-DFA0A04FC94B}">
-              <ma14:wrappingTextBoxFlag xmlns:ma14="http://schemas.microsoft.com/office/mac/drawingml/2011/main" val="1"/>
+              <ma14:wrappingTextBoxFlag xmlns:ma14="http://schemas.microsoft.com/office/mac/drawingml/2011/main" xmlns:a14="http://schemas.microsoft.com/office/drawing/2010/main" xmlns:m="http://schemas.openxmlformats.org/officeDocument/2006/math" xmlns="" val="1"/>
             </a:ext>
           </a:extLst>
         </p:spPr>
@@ -18960,7 +18941,7 @@
           <a:bodyPr lIns="45719" rIns="45719"/>
           <a:lstStyle/>
           <a:p>
-            <a:pPr/>
+            <a:endParaRPr/>
           </a:p>
         </p:txBody>
       </p:sp>
@@ -18989,7 +18970,7 @@
           <a:bodyPr lIns="45719" rIns="45719"/>
           <a:lstStyle/>
           <a:p>
-            <a:pPr/>
+            <a:endParaRPr/>
           </a:p>
         </p:txBody>
       </p:sp>
@@ -19012,7 +18993,7 @@
           </a:ln>
           <a:extLst>
             <a:ext uri="{C572A759-6A51-4108-AA02-DFA0A04FC94B}">
-              <ma14:wrappingTextBoxFlag xmlns:ma14="http://schemas.microsoft.com/office/mac/drawingml/2011/main" val="1"/>
+              <ma14:wrappingTextBoxFlag xmlns:ma14="http://schemas.microsoft.com/office/mac/drawingml/2011/main" xmlns:a14="http://schemas.microsoft.com/office/drawing/2010/main" xmlns:m="http://schemas.openxmlformats.org/officeDocument/2006/math" xmlns="" val="1"/>
             </a:ext>
           </a:extLst>
         </p:spPr>
@@ -19030,7 +19011,6 @@
             </a:lvl1pPr>
           </a:lstStyle>
           <a:p>
-            <a:pPr/>
             <a:r>
               <a:t>→</a:t>
             </a:r>
@@ -19056,7 +19036,7 @@
           </a:ln>
           <a:extLst>
             <a:ext uri="{C572A759-6A51-4108-AA02-DFA0A04FC94B}">
-              <ma14:wrappingTextBoxFlag xmlns:ma14="http://schemas.microsoft.com/office/mac/drawingml/2011/main" val="1"/>
+              <ma14:wrappingTextBoxFlag xmlns:ma14="http://schemas.microsoft.com/office/mac/drawingml/2011/main" xmlns:a14="http://schemas.microsoft.com/office/drawing/2010/main" xmlns:m="http://schemas.openxmlformats.org/officeDocument/2006/math" xmlns="" val="1"/>
             </a:ext>
           </a:extLst>
         </p:spPr>
@@ -19066,7 +19046,7 @@
           </a:bodyPr>
           <a:lstStyle>
             <a:lvl1pPr>
-              <a:defRPr b="1" sz="1000">
+              <a:defRPr sz="1000" b="1">
                 <a:solidFill>
                   <a:srgbClr val="4A9ECC"/>
                 </a:solidFill>
@@ -19074,7 +19054,6 @@
             </a:lvl1pPr>
           </a:lstStyle>
           <a:p>
-            <a:pPr/>
             <a:r>
               <a:t>Phase III</a:t>
             </a:r>
@@ -19100,7 +19079,7 @@
           </a:ln>
           <a:extLst>
             <a:ext uri="{C572A759-6A51-4108-AA02-DFA0A04FC94B}">
-              <ma14:wrappingTextBoxFlag xmlns:ma14="http://schemas.microsoft.com/office/mac/drawingml/2011/main" val="1"/>
+              <ma14:wrappingTextBoxFlag xmlns:ma14="http://schemas.microsoft.com/office/mac/drawingml/2011/main" xmlns:a14="http://schemas.microsoft.com/office/drawing/2010/main" xmlns:m="http://schemas.openxmlformats.org/officeDocument/2006/math" xmlns="" val="1"/>
             </a:ext>
           </a:extLst>
         </p:spPr>
@@ -19122,7 +19101,6 @@
             </a:lvl1pPr>
           </a:lstStyle>
           <a:p>
-            <a:pPr/>
             <a:r>
               <a:t>t = 100–500</a:t>
             </a:r>
@@ -19148,7 +19126,7 @@
           </a:ln>
           <a:extLst>
             <a:ext uri="{C572A759-6A51-4108-AA02-DFA0A04FC94B}">
-              <ma14:wrappingTextBoxFlag xmlns:ma14="http://schemas.microsoft.com/office/mac/drawingml/2011/main" val="1"/>
+              <ma14:wrappingTextBoxFlag xmlns:ma14="http://schemas.microsoft.com/office/mac/drawingml/2011/main" xmlns:a14="http://schemas.microsoft.com/office/drawing/2010/main" xmlns:m="http://schemas.openxmlformats.org/officeDocument/2006/math" xmlns="" val="1"/>
             </a:ext>
           </a:extLst>
         </p:spPr>
@@ -19158,7 +19136,7 @@
           </a:bodyPr>
           <a:lstStyle>
             <a:lvl1pPr>
-              <a:defRPr b="1" sz="1600">
+              <a:defRPr sz="1600" b="1">
                 <a:solidFill>
                   <a:srgbClr val="FFFFFF"/>
                 </a:solidFill>
@@ -19170,7 +19148,6 @@
             </a:lvl1pPr>
           </a:lstStyle>
           <a:p>
-            <a:pPr/>
             <a:r>
               <a:t>Methuselah Decay</a:t>
             </a:r>
@@ -19196,7 +19173,7 @@
           </a:ln>
           <a:extLst>
             <a:ext uri="{C572A759-6A51-4108-AA02-DFA0A04FC94B}">
-              <ma14:wrappingTextBoxFlag xmlns:ma14="http://schemas.microsoft.com/office/mac/drawingml/2011/main" val="1"/>
+              <ma14:wrappingTextBoxFlag xmlns:ma14="http://schemas.microsoft.com/office/mac/drawingml/2011/main" xmlns:a14="http://schemas.microsoft.com/office/drawing/2010/main" xmlns:m="http://schemas.openxmlformats.org/officeDocument/2006/math" xmlns="" val="1"/>
             </a:ext>
           </a:extLst>
         </p:spPr>
@@ -19268,7 +19245,7 @@
           <a:bodyPr lIns="45719" rIns="45719"/>
           <a:lstStyle/>
           <a:p>
-            <a:pPr/>
+            <a:endParaRPr/>
           </a:p>
         </p:txBody>
       </p:sp>
@@ -19297,7 +19274,7 @@
           <a:bodyPr lIns="45719" rIns="45719"/>
           <a:lstStyle/>
           <a:p>
-            <a:pPr/>
+            <a:endParaRPr/>
           </a:p>
         </p:txBody>
       </p:sp>
@@ -19320,7 +19297,7 @@
           </a:ln>
           <a:extLst>
             <a:ext uri="{C572A759-6A51-4108-AA02-DFA0A04FC94B}">
-              <ma14:wrappingTextBoxFlag xmlns:ma14="http://schemas.microsoft.com/office/mac/drawingml/2011/main" val="1"/>
+              <ma14:wrappingTextBoxFlag xmlns:ma14="http://schemas.microsoft.com/office/mac/drawingml/2011/main" xmlns:a14="http://schemas.microsoft.com/office/drawing/2010/main" xmlns:m="http://schemas.openxmlformats.org/officeDocument/2006/math" xmlns="" val="1"/>
             </a:ext>
           </a:extLst>
         </p:spPr>
@@ -19330,7 +19307,7 @@
           </a:bodyPr>
           <a:lstStyle>
             <a:lvl1pPr>
-              <a:defRPr b="1" sz="1000">
+              <a:defRPr sz="1000" b="1">
                 <a:solidFill>
                   <a:srgbClr val="44AA66"/>
                 </a:solidFill>
@@ -19338,7 +19315,6 @@
             </a:lvl1pPr>
           </a:lstStyle>
           <a:p>
-            <a:pPr/>
             <a:r>
               <a:t>Phase IV</a:t>
             </a:r>
@@ -19364,7 +19340,7 @@
           </a:ln>
           <a:extLst>
             <a:ext uri="{C572A759-6A51-4108-AA02-DFA0A04FC94B}">
-              <ma14:wrappingTextBoxFlag xmlns:ma14="http://schemas.microsoft.com/office/mac/drawingml/2011/main" val="1"/>
+              <ma14:wrappingTextBoxFlag xmlns:ma14="http://schemas.microsoft.com/office/mac/drawingml/2011/main" xmlns:a14="http://schemas.microsoft.com/office/drawing/2010/main" xmlns:m="http://schemas.openxmlformats.org/officeDocument/2006/math" xmlns="" val="1"/>
             </a:ext>
           </a:extLst>
         </p:spPr>
@@ -19386,7 +19362,6 @@
             </a:lvl1pPr>
           </a:lstStyle>
           <a:p>
-            <a:pPr/>
             <a:r>
               <a:t>t &gt; 500</a:t>
             </a:r>
@@ -19412,7 +19387,7 @@
           </a:ln>
           <a:extLst>
             <a:ext uri="{C572A759-6A51-4108-AA02-DFA0A04FC94B}">
-              <ma14:wrappingTextBoxFlag xmlns:ma14="http://schemas.microsoft.com/office/mac/drawingml/2011/main" val="1"/>
+              <ma14:wrappingTextBoxFlag xmlns:ma14="http://schemas.microsoft.com/office/mac/drawingml/2011/main" xmlns:a14="http://schemas.microsoft.com/office/drawing/2010/main" xmlns:m="http://schemas.openxmlformats.org/officeDocument/2006/math" xmlns="" val="1"/>
             </a:ext>
           </a:extLst>
         </p:spPr>
@@ -19422,7 +19397,7 @@
           </a:bodyPr>
           <a:lstStyle>
             <a:lvl1pPr>
-              <a:defRPr b="1" sz="1600">
+              <a:defRPr sz="1600" b="1">
                 <a:solidFill>
                   <a:srgbClr val="FFFFFF"/>
                 </a:solidFill>
@@ -19434,7 +19409,6 @@
             </a:lvl1pPr>
           </a:lstStyle>
           <a:p>
-            <a:pPr/>
             <a:r>
               <a:t>Equilibrium</a:t>
             </a:r>
@@ -19460,7 +19434,7 @@
           </a:ln>
           <a:extLst>
             <a:ext uri="{C572A759-6A51-4108-AA02-DFA0A04FC94B}">
-              <ma14:wrappingTextBoxFlag xmlns:ma14="http://schemas.microsoft.com/office/mac/drawingml/2011/main" val="1"/>
+              <ma14:wrappingTextBoxFlag xmlns:ma14="http://schemas.microsoft.com/office/mac/drawingml/2011/main" xmlns:a14="http://schemas.microsoft.com/office/drawing/2010/main" xmlns:m="http://schemas.openxmlformats.org/officeDocument/2006/math" xmlns="" val="1"/>
             </a:ext>
           </a:extLst>
         </p:spPr>
@@ -19512,12 +19486,12 @@
   <p:clrMapOvr>
     <a:masterClrMapping/>
   </p:clrMapOvr>
-  <p:transition xmlns:p14="http://schemas.microsoft.com/office/powerpoint/2010/main" spd="med" advClick="1"/>
+  <p:transition spd="med"/>
 </p:sld>
 </file>
 
 <file path=ppt/theme/theme1.xml><?xml version="1.0" encoding="utf-8"?>
-<a:theme xmlns:a="http://schemas.openxmlformats.org/drawingml/2006/main" xmlns:r="http://schemas.openxmlformats.org/officeDocument/2006/relationships" name="Office Theme">
+<a:theme xmlns:a="http://schemas.openxmlformats.org/drawingml/2006/main" name="Office Theme">
   <a:themeElements>
     <a:clrScheme name="Office Theme">
       <a:dk1>
@@ -19719,7 +19693,7 @@
         <a:effectLst/>
         <a:sp3d/>
       </a:spPr>
-      <a:bodyPr rot="0" spcFirstLastPara="1" vertOverflow="overflow" horzOverflow="overflow" vert="horz" wrap="square" lIns="45719" tIns="45719" rIns="45719" bIns="45719" numCol="1" spcCol="38100" rtlCol="0" anchor="ctr" upright="0">
+      <a:bodyPr rot="0" spcFirstLastPara="1" vertOverflow="overflow" horzOverflow="overflow" vert="horz" wrap="square" lIns="45719" tIns="45719" rIns="45719" bIns="45719" numCol="1" spcCol="38100" rtlCol="0" anchor="ctr">
         <a:spAutoFit/>
       </a:bodyPr>
       <a:lstStyle>
@@ -19738,7 +19712,7 @@
           <a:buFontTx/>
           <a:buNone/>
           <a:tabLst/>
-          <a:defRPr b="0" baseline="0" cap="none" i="0" spc="0" strike="noStrike" sz="1800" u="none" kumimoji="0" normalizeH="0">
+          <a:defRPr kumimoji="0" sz="1800" b="0" i="0" u="none" strike="noStrike" cap="none" spc="0" normalizeH="0" baseline="0">
             <a:ln>
               <a:noFill/>
             </a:ln>
@@ -19768,7 +19742,7 @@
           <a:buFontTx/>
           <a:buNone/>
           <a:tabLst/>
-          <a:defRPr b="0" baseline="0" cap="none" i="0" spc="0" strike="noStrike" sz="1800" u="none" kumimoji="0" normalizeH="0">
+          <a:defRPr kumimoji="0" sz="1800" b="0" i="0" u="none" strike="noStrike" cap="none" spc="0" normalizeH="0" baseline="0">
             <a:ln>
               <a:noFill/>
             </a:ln>
@@ -19794,7 +19768,7 @@
           <a:buFontTx/>
           <a:buNone/>
           <a:tabLst/>
-          <a:defRPr b="0" baseline="0" cap="none" i="0" spc="0" strike="noStrike" sz="1800" u="none" kumimoji="0" normalizeH="0">
+          <a:defRPr kumimoji="0" sz="1800" b="0" i="0" u="none" strike="noStrike" cap="none" spc="0" normalizeH="0" baseline="0">
             <a:ln>
               <a:noFill/>
             </a:ln>
@@ -19820,7 +19794,7 @@
           <a:buFontTx/>
           <a:buNone/>
           <a:tabLst/>
-          <a:defRPr b="0" baseline="0" cap="none" i="0" spc="0" strike="noStrike" sz="1800" u="none" kumimoji="0" normalizeH="0">
+          <a:defRPr kumimoji="0" sz="1800" b="0" i="0" u="none" strike="noStrike" cap="none" spc="0" normalizeH="0" baseline="0">
             <a:ln>
               <a:noFill/>
             </a:ln>
@@ -19846,7 +19820,7 @@
           <a:buFontTx/>
           <a:buNone/>
           <a:tabLst/>
-          <a:defRPr b="0" baseline="0" cap="none" i="0" spc="0" strike="noStrike" sz="1800" u="none" kumimoji="0" normalizeH="0">
+          <a:defRPr kumimoji="0" sz="1800" b="0" i="0" u="none" strike="noStrike" cap="none" spc="0" normalizeH="0" baseline="0">
             <a:ln>
               <a:noFill/>
             </a:ln>
@@ -19872,7 +19846,7 @@
           <a:buFontTx/>
           <a:buNone/>
           <a:tabLst/>
-          <a:defRPr b="0" baseline="0" cap="none" i="0" spc="0" strike="noStrike" sz="1800" u="none" kumimoji="0" normalizeH="0">
+          <a:defRPr kumimoji="0" sz="1800" b="0" i="0" u="none" strike="noStrike" cap="none" spc="0" normalizeH="0" baseline="0">
             <a:ln>
               <a:noFill/>
             </a:ln>
@@ -19898,7 +19872,7 @@
           <a:buFontTx/>
           <a:buNone/>
           <a:tabLst/>
-          <a:defRPr b="0" baseline="0" cap="none" i="0" spc="0" strike="noStrike" sz="1800" u="none" kumimoji="0" normalizeH="0">
+          <a:defRPr kumimoji="0" sz="1800" b="0" i="0" u="none" strike="noStrike" cap="none" spc="0" normalizeH="0" baseline="0">
             <a:ln>
               <a:noFill/>
             </a:ln>
@@ -19924,7 +19898,7 @@
           <a:buFontTx/>
           <a:buNone/>
           <a:tabLst/>
-          <a:defRPr b="0" baseline="0" cap="none" i="0" spc="0" strike="noStrike" sz="1800" u="none" kumimoji="0" normalizeH="0">
+          <a:defRPr kumimoji="0" sz="1800" b="0" i="0" u="none" strike="noStrike" cap="none" spc="0" normalizeH="0" baseline="0">
             <a:ln>
               <a:noFill/>
             </a:ln>
@@ -19950,7 +19924,7 @@
           <a:buFontTx/>
           <a:buNone/>
           <a:tabLst/>
-          <a:defRPr b="0" baseline="0" cap="none" i="0" spc="0" strike="noStrike" sz="1800" u="none" kumimoji="0" normalizeH="0">
+          <a:defRPr kumimoji="0" sz="1800" b="0" i="0" u="none" strike="noStrike" cap="none" spc="0" normalizeH="0" baseline="0">
             <a:ln>
               <a:noFill/>
             </a:ln>
@@ -19976,7 +19950,7 @@
           <a:buFontTx/>
           <a:buNone/>
           <a:tabLst/>
-          <a:defRPr b="0" baseline="0" cap="none" i="0" spc="0" strike="noStrike" sz="1800" u="none" kumimoji="0" normalizeH="0">
+          <a:defRPr kumimoji="0" sz="1800" b="0" i="0" u="none" strike="noStrike" cap="none" spc="0" normalizeH="0" baseline="0">
             <a:ln>
               <a:noFill/>
             </a:ln>
@@ -19989,9 +19963,15 @@
         </a:lvl9pPr>
       </a:lstStyle>
       <a:style>
-        <a:lnRef idx="0"/>
-        <a:fillRef idx="0"/>
-        <a:effectRef idx="0"/>
+        <a:lnRef idx="0">
+          <a:scrgbClr r="0" g="0" b="0"/>
+        </a:lnRef>
+        <a:fillRef idx="0">
+          <a:scrgbClr r="0" g="0" b="0"/>
+        </a:fillRef>
+        <a:effectRef idx="0">
+          <a:scrgbClr r="0" g="0" b="0"/>
+        </a:effectRef>
         <a:fontRef idx="none"/>
       </a:style>
     </a:spDef>
@@ -20008,7 +19988,7 @@
         <a:effectLst/>
         <a:sp3d/>
       </a:spPr>
-      <a:bodyPr rot="0" spcFirstLastPara="1" vertOverflow="overflow" horzOverflow="overflow" vert="horz" wrap="square" lIns="91439" tIns="45719" rIns="91439" bIns="45719" numCol="1" spcCol="38100" rtlCol="0" anchor="t" upright="0">
+      <a:bodyPr rot="0" spcFirstLastPara="1" vertOverflow="overflow" horzOverflow="overflow" vert="horz" wrap="square" lIns="91439" tIns="45719" rIns="91439" bIns="45719" numCol="1" spcCol="38100" rtlCol="0" anchor="t">
         <a:noAutofit/>
       </a:bodyPr>
       <a:lstStyle>
@@ -20027,7 +20007,7 @@
           <a:buFontTx/>
           <a:buNone/>
           <a:tabLst/>
-          <a:defRPr b="0" baseline="0" cap="none" i="0" spc="0" strike="noStrike" sz="1800" u="none" kumimoji="0" normalizeH="0">
+          <a:defRPr kumimoji="0" sz="1800" b="0" i="0" u="none" strike="noStrike" cap="none" spc="0" normalizeH="0" baseline="0">
             <a:ln>
               <a:noFill/>
             </a:ln>
@@ -20053,7 +20033,7 @@
           <a:buFontTx/>
           <a:buNone/>
           <a:tabLst/>
-          <a:defRPr b="0" baseline="0" cap="none" i="0" spc="0" strike="noStrike" sz="1800" u="none" kumimoji="0" normalizeH="0">
+          <a:defRPr kumimoji="0" sz="1800" b="0" i="0" u="none" strike="noStrike" cap="none" spc="0" normalizeH="0" baseline="0">
             <a:ln>
               <a:noFill/>
             </a:ln>
@@ -20079,7 +20059,7 @@
           <a:buFontTx/>
           <a:buNone/>
           <a:tabLst/>
-          <a:defRPr b="0" baseline="0" cap="none" i="0" spc="0" strike="noStrike" sz="1800" u="none" kumimoji="0" normalizeH="0">
+          <a:defRPr kumimoji="0" sz="1800" b="0" i="0" u="none" strike="noStrike" cap="none" spc="0" normalizeH="0" baseline="0">
             <a:ln>
               <a:noFill/>
             </a:ln>
@@ -20105,7 +20085,7 @@
           <a:buFontTx/>
           <a:buNone/>
           <a:tabLst/>
-          <a:defRPr b="0" baseline="0" cap="none" i="0" spc="0" strike="noStrike" sz="1800" u="none" kumimoji="0" normalizeH="0">
+          <a:defRPr kumimoji="0" sz="1800" b="0" i="0" u="none" strike="noStrike" cap="none" spc="0" normalizeH="0" baseline="0">
             <a:ln>
               <a:noFill/>
             </a:ln>
@@ -20131,7 +20111,7 @@
           <a:buFontTx/>
           <a:buNone/>
           <a:tabLst/>
-          <a:defRPr b="0" baseline="0" cap="none" i="0" spc="0" strike="noStrike" sz="1800" u="none" kumimoji="0" normalizeH="0">
+          <a:defRPr kumimoji="0" sz="1800" b="0" i="0" u="none" strike="noStrike" cap="none" spc="0" normalizeH="0" baseline="0">
             <a:ln>
               <a:noFill/>
             </a:ln>
@@ -20157,7 +20137,7 @@
           <a:buFontTx/>
           <a:buNone/>
           <a:tabLst/>
-          <a:defRPr b="0" baseline="0" cap="none" i="0" spc="0" strike="noStrike" sz="1800" u="none" kumimoji="0" normalizeH="0">
+          <a:defRPr kumimoji="0" sz="1800" b="0" i="0" u="none" strike="noStrike" cap="none" spc="0" normalizeH="0" baseline="0">
             <a:ln>
               <a:noFill/>
             </a:ln>
@@ -20183,7 +20163,7 @@
           <a:buFontTx/>
           <a:buNone/>
           <a:tabLst/>
-          <a:defRPr b="0" baseline="0" cap="none" i="0" spc="0" strike="noStrike" sz="1800" u="none" kumimoji="0" normalizeH="0">
+          <a:defRPr kumimoji="0" sz="1800" b="0" i="0" u="none" strike="noStrike" cap="none" spc="0" normalizeH="0" baseline="0">
             <a:ln>
               <a:noFill/>
             </a:ln>
@@ -20209,7 +20189,7 @@
           <a:buFontTx/>
           <a:buNone/>
           <a:tabLst/>
-          <a:defRPr b="0" baseline="0" cap="none" i="0" spc="0" strike="noStrike" sz="1800" u="none" kumimoji="0" normalizeH="0">
+          <a:defRPr kumimoji="0" sz="1800" b="0" i="0" u="none" strike="noStrike" cap="none" spc="0" normalizeH="0" baseline="0">
             <a:ln>
               <a:noFill/>
             </a:ln>
@@ -20235,7 +20215,7 @@
           <a:buFontTx/>
           <a:buNone/>
           <a:tabLst/>
-          <a:defRPr b="0" baseline="0" cap="none" i="0" spc="0" strike="noStrike" sz="1800" u="none" kumimoji="0" normalizeH="0">
+          <a:defRPr kumimoji="0" sz="1800" b="0" i="0" u="none" strike="noStrike" cap="none" spc="0" normalizeH="0" baseline="0">
             <a:ln>
               <a:noFill/>
             </a:ln>
@@ -20261,7 +20241,7 @@
           <a:buFontTx/>
           <a:buNone/>
           <a:tabLst/>
-          <a:defRPr b="0" baseline="0" cap="none" i="0" spc="0" strike="noStrike" sz="1800" u="none" kumimoji="0" normalizeH="0">
+          <a:defRPr kumimoji="0" sz="1800" b="0" i="0" u="none" strike="noStrike" cap="none" spc="0" normalizeH="0" baseline="0">
             <a:ln>
               <a:noFill/>
             </a:ln>
@@ -20274,9 +20254,15 @@
         </a:lvl9pPr>
       </a:lstStyle>
       <a:style>
-        <a:lnRef idx="0"/>
-        <a:fillRef idx="0"/>
-        <a:effectRef idx="0"/>
+        <a:lnRef idx="0">
+          <a:scrgbClr r="0" g="0" b="0"/>
+        </a:lnRef>
+        <a:fillRef idx="0">
+          <a:scrgbClr r="0" g="0" b="0"/>
+        </a:fillRef>
+        <a:effectRef idx="0">
+          <a:scrgbClr r="0" g="0" b="0"/>
+        </a:effectRef>
         <a:fontRef idx="none"/>
       </a:style>
     </a:lnDef>
@@ -20290,7 +20276,7 @@
         <a:effectLst/>
         <a:sp3d/>
       </a:spPr>
-      <a:bodyPr rot="0" spcFirstLastPara="1" vertOverflow="overflow" horzOverflow="overflow" vert="horz" wrap="square" lIns="45719" tIns="45719" rIns="45719" bIns="45719" numCol="1" spcCol="38100" rtlCol="0" anchor="t" upright="0">
+      <a:bodyPr rot="0" spcFirstLastPara="1" vertOverflow="overflow" horzOverflow="overflow" vert="horz" wrap="square" lIns="45719" tIns="45719" rIns="45719" bIns="45719" numCol="1" spcCol="38100" rtlCol="0" anchor="t">
         <a:spAutoFit/>
       </a:bodyPr>
       <a:lstStyle>
@@ -20309,7 +20295,7 @@
           <a:buFontTx/>
           <a:buNone/>
           <a:tabLst/>
-          <a:defRPr b="0" baseline="0" cap="none" i="0" spc="0" strike="noStrike" sz="1800" u="none" kumimoji="0" normalizeH="0">
+          <a:defRPr kumimoji="0" sz="1800" b="0" i="0" u="none" strike="noStrike" cap="none" spc="0" normalizeH="0" baseline="0">
             <a:ln>
               <a:noFill/>
             </a:ln>
@@ -20339,7 +20325,7 @@
           <a:buFontTx/>
           <a:buNone/>
           <a:tabLst/>
-          <a:defRPr b="0" baseline="0" cap="none" i="0" spc="0" strike="noStrike" sz="1800" u="none" kumimoji="0" normalizeH="0">
+          <a:defRPr kumimoji="0" sz="1800" b="0" i="0" u="none" strike="noStrike" cap="none" spc="0" normalizeH="0" baseline="0">
             <a:ln>
               <a:noFill/>
             </a:ln>
@@ -20365,7 +20351,7 @@
           <a:buFontTx/>
           <a:buNone/>
           <a:tabLst/>
-          <a:defRPr b="0" baseline="0" cap="none" i="0" spc="0" strike="noStrike" sz="1800" u="none" kumimoji="0" normalizeH="0">
+          <a:defRPr kumimoji="0" sz="1800" b="0" i="0" u="none" strike="noStrike" cap="none" spc="0" normalizeH="0" baseline="0">
             <a:ln>
               <a:noFill/>
             </a:ln>
@@ -20391,7 +20377,7 @@
           <a:buFontTx/>
           <a:buNone/>
           <a:tabLst/>
-          <a:defRPr b="0" baseline="0" cap="none" i="0" spc="0" strike="noStrike" sz="1800" u="none" kumimoji="0" normalizeH="0">
+          <a:defRPr kumimoji="0" sz="1800" b="0" i="0" u="none" strike="noStrike" cap="none" spc="0" normalizeH="0" baseline="0">
             <a:ln>
               <a:noFill/>
             </a:ln>
@@ -20417,7 +20403,7 @@
           <a:buFontTx/>
           <a:buNone/>
           <a:tabLst/>
-          <a:defRPr b="0" baseline="0" cap="none" i="0" spc="0" strike="noStrike" sz="1800" u="none" kumimoji="0" normalizeH="0">
+          <a:defRPr kumimoji="0" sz="1800" b="0" i="0" u="none" strike="noStrike" cap="none" spc="0" normalizeH="0" baseline="0">
             <a:ln>
               <a:noFill/>
             </a:ln>
@@ -20443,7 +20429,7 @@
           <a:buFontTx/>
           <a:buNone/>
           <a:tabLst/>
-          <a:defRPr b="0" baseline="0" cap="none" i="0" spc="0" strike="noStrike" sz="1800" u="none" kumimoji="0" normalizeH="0">
+          <a:defRPr kumimoji="0" sz="1800" b="0" i="0" u="none" strike="noStrike" cap="none" spc="0" normalizeH="0" baseline="0">
             <a:ln>
               <a:noFill/>
             </a:ln>
@@ -20469,7 +20455,7 @@
           <a:buFontTx/>
           <a:buNone/>
           <a:tabLst/>
-          <a:defRPr b="0" baseline="0" cap="none" i="0" spc="0" strike="noStrike" sz="1800" u="none" kumimoji="0" normalizeH="0">
+          <a:defRPr kumimoji="0" sz="1800" b="0" i="0" u="none" strike="noStrike" cap="none" spc="0" normalizeH="0" baseline="0">
             <a:ln>
               <a:noFill/>
             </a:ln>
@@ -20495,7 +20481,7 @@
           <a:buFontTx/>
           <a:buNone/>
           <a:tabLst/>
-          <a:defRPr b="0" baseline="0" cap="none" i="0" spc="0" strike="noStrike" sz="1800" u="none" kumimoji="0" normalizeH="0">
+          <a:defRPr kumimoji="0" sz="1800" b="0" i="0" u="none" strike="noStrike" cap="none" spc="0" normalizeH="0" baseline="0">
             <a:ln>
               <a:noFill/>
             </a:ln>
@@ -20521,7 +20507,7 @@
           <a:buFontTx/>
           <a:buNone/>
           <a:tabLst/>
-          <a:defRPr b="0" baseline="0" cap="none" i="0" spc="0" strike="noStrike" sz="1800" u="none" kumimoji="0" normalizeH="0">
+          <a:defRPr kumimoji="0" sz="1800" b="0" i="0" u="none" strike="noStrike" cap="none" spc="0" normalizeH="0" baseline="0">
             <a:ln>
               <a:noFill/>
             </a:ln>
@@ -20547,7 +20533,7 @@
           <a:buFontTx/>
           <a:buNone/>
           <a:tabLst/>
-          <a:defRPr b="0" baseline="0" cap="none" i="0" spc="0" strike="noStrike" sz="1800" u="none" kumimoji="0" normalizeH="0">
+          <a:defRPr kumimoji="0" sz="1800" b="0" i="0" u="none" strike="noStrike" cap="none" spc="0" normalizeH="0" baseline="0">
             <a:ln>
               <a:noFill/>
             </a:ln>
@@ -20560,18 +20546,25 @@
         </a:lvl9pPr>
       </a:lstStyle>
       <a:style>
-        <a:lnRef idx="0"/>
-        <a:fillRef idx="0"/>
-        <a:effectRef idx="0"/>
+        <a:lnRef idx="0">
+          <a:scrgbClr r="0" g="0" b="0"/>
+        </a:lnRef>
+        <a:fillRef idx="0">
+          <a:scrgbClr r="0" g="0" b="0"/>
+        </a:fillRef>
+        <a:effectRef idx="0">
+          <a:scrgbClr r="0" g="0" b="0"/>
+        </a:effectRef>
         <a:fontRef idx="none"/>
       </a:style>
     </a:txDef>
   </a:objectDefaults>
+  <a:extraClrSchemeLst/>
 </a:theme>
 </file>
 
 <file path=ppt/theme/theme2.xml><?xml version="1.0" encoding="utf-8"?>
-<a:theme xmlns:a="http://schemas.openxmlformats.org/drawingml/2006/main" xmlns:r="http://schemas.openxmlformats.org/officeDocument/2006/relationships" name="Office Theme">
+<a:theme xmlns:a="http://schemas.openxmlformats.org/drawingml/2006/main" name="Office Theme">
   <a:themeElements>
     <a:clrScheme name="Office Theme">
       <a:dk1>
@@ -20773,7 +20766,7 @@
         <a:effectLst/>
         <a:sp3d/>
       </a:spPr>
-      <a:bodyPr rot="0" spcFirstLastPara="1" vertOverflow="overflow" horzOverflow="overflow" vert="horz" wrap="square" lIns="45719" tIns="45719" rIns="45719" bIns="45719" numCol="1" spcCol="38100" rtlCol="0" anchor="ctr" upright="0">
+      <a:bodyPr rot="0" spcFirstLastPara="1" vertOverflow="overflow" horzOverflow="overflow" vert="horz" wrap="square" lIns="45719" tIns="45719" rIns="45719" bIns="45719" numCol="1" spcCol="38100" rtlCol="0" anchor="ctr">
         <a:spAutoFit/>
       </a:bodyPr>
       <a:lstStyle>
@@ -20792,7 +20785,7 @@
           <a:buFontTx/>
           <a:buNone/>
           <a:tabLst/>
-          <a:defRPr b="0" baseline="0" cap="none" i="0" spc="0" strike="noStrike" sz="1800" u="none" kumimoji="0" normalizeH="0">
+          <a:defRPr kumimoji="0" sz="1800" b="0" i="0" u="none" strike="noStrike" cap="none" spc="0" normalizeH="0" baseline="0">
             <a:ln>
               <a:noFill/>
             </a:ln>
@@ -20822,7 +20815,7 @@
           <a:buFontTx/>
           <a:buNone/>
           <a:tabLst/>
-          <a:defRPr b="0" baseline="0" cap="none" i="0" spc="0" strike="noStrike" sz="1800" u="none" kumimoji="0" normalizeH="0">
+          <a:defRPr kumimoji="0" sz="1800" b="0" i="0" u="none" strike="noStrike" cap="none" spc="0" normalizeH="0" baseline="0">
             <a:ln>
               <a:noFill/>
             </a:ln>
@@ -20848,7 +20841,7 @@
           <a:buFontTx/>
           <a:buNone/>
           <a:tabLst/>
-          <a:defRPr b="0" baseline="0" cap="none" i="0" spc="0" strike="noStrike" sz="1800" u="none" kumimoji="0" normalizeH="0">
+          <a:defRPr kumimoji="0" sz="1800" b="0" i="0" u="none" strike="noStrike" cap="none" spc="0" normalizeH="0" baseline="0">
             <a:ln>
               <a:noFill/>
             </a:ln>
@@ -20874,7 +20867,7 @@
           <a:buFontTx/>
           <a:buNone/>
           <a:tabLst/>
-          <a:defRPr b="0" baseline="0" cap="none" i="0" spc="0" strike="noStrike" sz="1800" u="none" kumimoji="0" normalizeH="0">
+          <a:defRPr kumimoji="0" sz="1800" b="0" i="0" u="none" strike="noStrike" cap="none" spc="0" normalizeH="0" baseline="0">
             <a:ln>
               <a:noFill/>
             </a:ln>
@@ -20900,7 +20893,7 @@
           <a:buFontTx/>
           <a:buNone/>
           <a:tabLst/>
-          <a:defRPr b="0" baseline="0" cap="none" i="0" spc="0" strike="noStrike" sz="1800" u="none" kumimoji="0" normalizeH="0">
+          <a:defRPr kumimoji="0" sz="1800" b="0" i="0" u="none" strike="noStrike" cap="none" spc="0" normalizeH="0" baseline="0">
             <a:ln>
               <a:noFill/>
             </a:ln>
@@ -20926,7 +20919,7 @@
           <a:buFontTx/>
           <a:buNone/>
           <a:tabLst/>
-          <a:defRPr b="0" baseline="0" cap="none" i="0" spc="0" strike="noStrike" sz="1800" u="none" kumimoji="0" normalizeH="0">
+          <a:defRPr kumimoji="0" sz="1800" b="0" i="0" u="none" strike="noStrike" cap="none" spc="0" normalizeH="0" baseline="0">
             <a:ln>
               <a:noFill/>
             </a:ln>
@@ -20952,7 +20945,7 @@
           <a:buFontTx/>
           <a:buNone/>
           <a:tabLst/>
-          <a:defRPr b="0" baseline="0" cap="none" i="0" spc="0" strike="noStrike" sz="1800" u="none" kumimoji="0" normalizeH="0">
+          <a:defRPr kumimoji="0" sz="1800" b="0" i="0" u="none" strike="noStrike" cap="none" spc="0" normalizeH="0" baseline="0">
             <a:ln>
               <a:noFill/>
             </a:ln>
@@ -20978,7 +20971,7 @@
           <a:buFontTx/>
           <a:buNone/>
           <a:tabLst/>
-          <a:defRPr b="0" baseline="0" cap="none" i="0" spc="0" strike="noStrike" sz="1800" u="none" kumimoji="0" normalizeH="0">
+          <a:defRPr kumimoji="0" sz="1800" b="0" i="0" u="none" strike="noStrike" cap="none" spc="0" normalizeH="0" baseline="0">
             <a:ln>
               <a:noFill/>
             </a:ln>
@@ -21004,7 +20997,7 @@
           <a:buFontTx/>
           <a:buNone/>
           <a:tabLst/>
-          <a:defRPr b="0" baseline="0" cap="none" i="0" spc="0" strike="noStrike" sz="1800" u="none" kumimoji="0" normalizeH="0">
+          <a:defRPr kumimoji="0" sz="1800" b="0" i="0" u="none" strike="noStrike" cap="none" spc="0" normalizeH="0" baseline="0">
             <a:ln>
               <a:noFill/>
             </a:ln>
@@ -21030,7 +21023,7 @@
           <a:buFontTx/>
           <a:buNone/>
           <a:tabLst/>
-          <a:defRPr b="0" baseline="0" cap="none" i="0" spc="0" strike="noStrike" sz="1800" u="none" kumimoji="0" normalizeH="0">
+          <a:defRPr kumimoji="0" sz="1800" b="0" i="0" u="none" strike="noStrike" cap="none" spc="0" normalizeH="0" baseline="0">
             <a:ln>
               <a:noFill/>
             </a:ln>
@@ -21043,9 +21036,15 @@
         </a:lvl9pPr>
       </a:lstStyle>
       <a:style>
-        <a:lnRef idx="0"/>
-        <a:fillRef idx="0"/>
-        <a:effectRef idx="0"/>
+        <a:lnRef idx="0">
+          <a:scrgbClr r="0" g="0" b="0"/>
+        </a:lnRef>
+        <a:fillRef idx="0">
+          <a:scrgbClr r="0" g="0" b="0"/>
+        </a:fillRef>
+        <a:effectRef idx="0">
+          <a:scrgbClr r="0" g="0" b="0"/>
+        </a:effectRef>
         <a:fontRef idx="none"/>
       </a:style>
     </a:spDef>
@@ -21062,7 +21061,7 @@
         <a:effectLst/>
         <a:sp3d/>
       </a:spPr>
-      <a:bodyPr rot="0" spcFirstLastPara="1" vertOverflow="overflow" horzOverflow="overflow" vert="horz" wrap="square" lIns="91439" tIns="45719" rIns="91439" bIns="45719" numCol="1" spcCol="38100" rtlCol="0" anchor="t" upright="0">
+      <a:bodyPr rot="0" spcFirstLastPara="1" vertOverflow="overflow" horzOverflow="overflow" vert="horz" wrap="square" lIns="91439" tIns="45719" rIns="91439" bIns="45719" numCol="1" spcCol="38100" rtlCol="0" anchor="t">
         <a:noAutofit/>
       </a:bodyPr>
       <a:lstStyle>
@@ -21081,7 +21080,7 @@
           <a:buFontTx/>
           <a:buNone/>
           <a:tabLst/>
-          <a:defRPr b="0" baseline="0" cap="none" i="0" spc="0" strike="noStrike" sz="1800" u="none" kumimoji="0" normalizeH="0">
+          <a:defRPr kumimoji="0" sz="1800" b="0" i="0" u="none" strike="noStrike" cap="none" spc="0" normalizeH="0" baseline="0">
             <a:ln>
               <a:noFill/>
             </a:ln>
@@ -21107,7 +21106,7 @@
           <a:buFontTx/>
           <a:buNone/>
           <a:tabLst/>
-          <a:defRPr b="0" baseline="0" cap="none" i="0" spc="0" strike="noStrike" sz="1800" u="none" kumimoji="0" normalizeH="0">
+          <a:defRPr kumimoji="0" sz="1800" b="0" i="0" u="none" strike="noStrike" cap="none" spc="0" normalizeH="0" baseline="0">
             <a:ln>
               <a:noFill/>
             </a:ln>
@@ -21133,7 +21132,7 @@
           <a:buFontTx/>
           <a:buNone/>
           <a:tabLst/>
-          <a:defRPr b="0" baseline="0" cap="none" i="0" spc="0" strike="noStrike" sz="1800" u="none" kumimoji="0" normalizeH="0">
+          <a:defRPr kumimoji="0" sz="1800" b="0" i="0" u="none" strike="noStrike" cap="none" spc="0" normalizeH="0" baseline="0">
             <a:ln>
               <a:noFill/>
             </a:ln>
@@ -21159,7 +21158,7 @@
           <a:buFontTx/>
           <a:buNone/>
           <a:tabLst/>
-          <a:defRPr b="0" baseline="0" cap="none" i="0" spc="0" strike="noStrike" sz="1800" u="none" kumimoji="0" normalizeH="0">
+          <a:defRPr kumimoji="0" sz="1800" b="0" i="0" u="none" strike="noStrike" cap="none" spc="0" normalizeH="0" baseline="0">
             <a:ln>
               <a:noFill/>
             </a:ln>
@@ -21185,7 +21184,7 @@
           <a:buFontTx/>
           <a:buNone/>
           <a:tabLst/>
-          <a:defRPr b="0" baseline="0" cap="none" i="0" spc="0" strike="noStrike" sz="1800" u="none" kumimoji="0" normalizeH="0">
+          <a:defRPr kumimoji="0" sz="1800" b="0" i="0" u="none" strike="noStrike" cap="none" spc="0" normalizeH="0" baseline="0">
             <a:ln>
               <a:noFill/>
             </a:ln>
@@ -21211,7 +21210,7 @@
           <a:buFontTx/>
           <a:buNone/>
           <a:tabLst/>
-          <a:defRPr b="0" baseline="0" cap="none" i="0" spc="0" strike="noStrike" sz="1800" u="none" kumimoji="0" normalizeH="0">
+          <a:defRPr kumimoji="0" sz="1800" b="0" i="0" u="none" strike="noStrike" cap="none" spc="0" normalizeH="0" baseline="0">
             <a:ln>
               <a:noFill/>
             </a:ln>
@@ -21237,7 +21236,7 @@
           <a:buFontTx/>
           <a:buNone/>
           <a:tabLst/>
-          <a:defRPr b="0" baseline="0" cap="none" i="0" spc="0" strike="noStrike" sz="1800" u="none" kumimoji="0" normalizeH="0">
+          <a:defRPr kumimoji="0" sz="1800" b="0" i="0" u="none" strike="noStrike" cap="none" spc="0" normalizeH="0" baseline="0">
             <a:ln>
               <a:noFill/>
             </a:ln>
@@ -21263,7 +21262,7 @@
           <a:buFontTx/>
           <a:buNone/>
           <a:tabLst/>
-          <a:defRPr b="0" baseline="0" cap="none" i="0" spc="0" strike="noStrike" sz="1800" u="none" kumimoji="0" normalizeH="0">
+          <a:defRPr kumimoji="0" sz="1800" b="0" i="0" u="none" strike="noStrike" cap="none" spc="0" normalizeH="0" baseline="0">
             <a:ln>
               <a:noFill/>
             </a:ln>
@@ -21289,7 +21288,7 @@
           <a:buFontTx/>
           <a:buNone/>
           <a:tabLst/>
-          <a:defRPr b="0" baseline="0" cap="none" i="0" spc="0" strike="noStrike" sz="1800" u="none" kumimoji="0" normalizeH="0">
+          <a:defRPr kumimoji="0" sz="1800" b="0" i="0" u="none" strike="noStrike" cap="none" spc="0" normalizeH="0" baseline="0">
             <a:ln>
               <a:noFill/>
             </a:ln>
@@ -21315,7 +21314,7 @@
           <a:buFontTx/>
           <a:buNone/>
           <a:tabLst/>
-          <a:defRPr b="0" baseline="0" cap="none" i="0" spc="0" strike="noStrike" sz="1800" u="none" kumimoji="0" normalizeH="0">
+          <a:defRPr kumimoji="0" sz="1800" b="0" i="0" u="none" strike="noStrike" cap="none" spc="0" normalizeH="0" baseline="0">
             <a:ln>
               <a:noFill/>
             </a:ln>
@@ -21328,9 +21327,15 @@
         </a:lvl9pPr>
       </a:lstStyle>
       <a:style>
-        <a:lnRef idx="0"/>
-        <a:fillRef idx="0"/>
-        <a:effectRef idx="0"/>
+        <a:lnRef idx="0">
+          <a:scrgbClr r="0" g="0" b="0"/>
+        </a:lnRef>
+        <a:fillRef idx="0">
+          <a:scrgbClr r="0" g="0" b="0"/>
+        </a:fillRef>
+        <a:effectRef idx="0">
+          <a:scrgbClr r="0" g="0" b="0"/>
+        </a:effectRef>
         <a:fontRef idx="none"/>
       </a:style>
     </a:lnDef>
@@ -21344,7 +21349,7 @@
         <a:effectLst/>
         <a:sp3d/>
       </a:spPr>
-      <a:bodyPr rot="0" spcFirstLastPara="1" vertOverflow="overflow" horzOverflow="overflow" vert="horz" wrap="square" lIns="45719" tIns="45719" rIns="45719" bIns="45719" numCol="1" spcCol="38100" rtlCol="0" anchor="t" upright="0">
+      <a:bodyPr rot="0" spcFirstLastPara="1" vertOverflow="overflow" horzOverflow="overflow" vert="horz" wrap="square" lIns="45719" tIns="45719" rIns="45719" bIns="45719" numCol="1" spcCol="38100" rtlCol="0" anchor="t">
         <a:spAutoFit/>
       </a:bodyPr>
       <a:lstStyle>
@@ -21363,7 +21368,7 @@
           <a:buFontTx/>
           <a:buNone/>
           <a:tabLst/>
-          <a:defRPr b="0" baseline="0" cap="none" i="0" spc="0" strike="noStrike" sz="1800" u="none" kumimoji="0" normalizeH="0">
+          <a:defRPr kumimoji="0" sz="1800" b="0" i="0" u="none" strike="noStrike" cap="none" spc="0" normalizeH="0" baseline="0">
             <a:ln>
               <a:noFill/>
             </a:ln>
@@ -21393,7 +21398,7 @@
           <a:buFontTx/>
           <a:buNone/>
           <a:tabLst/>
-          <a:defRPr b="0" baseline="0" cap="none" i="0" spc="0" strike="noStrike" sz="1800" u="none" kumimoji="0" normalizeH="0">
+          <a:defRPr kumimoji="0" sz="1800" b="0" i="0" u="none" strike="noStrike" cap="none" spc="0" normalizeH="0" baseline="0">
             <a:ln>
               <a:noFill/>
             </a:ln>
@@ -21419,7 +21424,7 @@
           <a:buFontTx/>
           <a:buNone/>
           <a:tabLst/>
-          <a:defRPr b="0" baseline="0" cap="none" i="0" spc="0" strike="noStrike" sz="1800" u="none" kumimoji="0" normalizeH="0">
+          <a:defRPr kumimoji="0" sz="1800" b="0" i="0" u="none" strike="noStrike" cap="none" spc="0" normalizeH="0" baseline="0">
             <a:ln>
               <a:noFill/>
             </a:ln>
@@ -21445,7 +21450,7 @@
           <a:buFontTx/>
           <a:buNone/>
           <a:tabLst/>
-          <a:defRPr b="0" baseline="0" cap="none" i="0" spc="0" strike="noStrike" sz="1800" u="none" kumimoji="0" normalizeH="0">
+          <a:defRPr kumimoji="0" sz="1800" b="0" i="0" u="none" strike="noStrike" cap="none" spc="0" normalizeH="0" baseline="0">
             <a:ln>
               <a:noFill/>
             </a:ln>
@@ -21471,7 +21476,7 @@
           <a:buFontTx/>
           <a:buNone/>
           <a:tabLst/>
-          <a:defRPr b="0" baseline="0" cap="none" i="0" spc="0" strike="noStrike" sz="1800" u="none" kumimoji="0" normalizeH="0">
+          <a:defRPr kumimoji="0" sz="1800" b="0" i="0" u="none" strike="noStrike" cap="none" spc="0" normalizeH="0" baseline="0">
             <a:ln>
               <a:noFill/>
             </a:ln>
@@ -21497,7 +21502,7 @@
           <a:buFontTx/>
           <a:buNone/>
           <a:tabLst/>
-          <a:defRPr b="0" baseline="0" cap="none" i="0" spc="0" strike="noStrike" sz="1800" u="none" kumimoji="0" normalizeH="0">
+          <a:defRPr kumimoji="0" sz="1800" b="0" i="0" u="none" strike="noStrike" cap="none" spc="0" normalizeH="0" baseline="0">
             <a:ln>
               <a:noFill/>
             </a:ln>
@@ -21523,7 +21528,7 @@
           <a:buFontTx/>
           <a:buNone/>
           <a:tabLst/>
-          <a:defRPr b="0" baseline="0" cap="none" i="0" spc="0" strike="noStrike" sz="1800" u="none" kumimoji="0" normalizeH="0">
+          <a:defRPr kumimoji="0" sz="1800" b="0" i="0" u="none" strike="noStrike" cap="none" spc="0" normalizeH="0" baseline="0">
             <a:ln>
               <a:noFill/>
             </a:ln>
@@ -21549,7 +21554,7 @@
           <a:buFontTx/>
           <a:buNone/>
           <a:tabLst/>
-          <a:defRPr b="0" baseline="0" cap="none" i="0" spc="0" strike="noStrike" sz="1800" u="none" kumimoji="0" normalizeH="0">
+          <a:defRPr kumimoji="0" sz="1800" b="0" i="0" u="none" strike="noStrike" cap="none" spc="0" normalizeH="0" baseline="0">
             <a:ln>
               <a:noFill/>
             </a:ln>
@@ -21575,7 +21580,7 @@
           <a:buFontTx/>
           <a:buNone/>
           <a:tabLst/>
-          <a:defRPr b="0" baseline="0" cap="none" i="0" spc="0" strike="noStrike" sz="1800" u="none" kumimoji="0" normalizeH="0">
+          <a:defRPr kumimoji="0" sz="1800" b="0" i="0" u="none" strike="noStrike" cap="none" spc="0" normalizeH="0" baseline="0">
             <a:ln>
               <a:noFill/>
             </a:ln>
@@ -21601,7 +21606,7 @@
           <a:buFontTx/>
           <a:buNone/>
           <a:tabLst/>
-          <a:defRPr b="0" baseline="0" cap="none" i="0" spc="0" strike="noStrike" sz="1800" u="none" kumimoji="0" normalizeH="0">
+          <a:defRPr kumimoji="0" sz="1800" b="0" i="0" u="none" strike="noStrike" cap="none" spc="0" normalizeH="0" baseline="0">
             <a:ln>
               <a:noFill/>
             </a:ln>
@@ -21614,12 +21619,19 @@
         </a:lvl9pPr>
       </a:lstStyle>
       <a:style>
-        <a:lnRef idx="0"/>
-        <a:fillRef idx="0"/>
-        <a:effectRef idx="0"/>
+        <a:lnRef idx="0">
+          <a:scrgbClr r="0" g="0" b="0"/>
+        </a:lnRef>
+        <a:fillRef idx="0">
+          <a:scrgbClr r="0" g="0" b="0"/>
+        </a:fillRef>
+        <a:effectRef idx="0">
+          <a:scrgbClr r="0" g="0" b="0"/>
+        </a:effectRef>
         <a:fontRef idx="none"/>
       </a:style>
     </a:txDef>
   </a:objectDefaults>
+  <a:extraClrSchemeLst/>
 </a:theme>
 </file>